--- a/meeting_notes/presentation.pptx
+++ b/meeting_notes/presentation.pptx
@@ -7,34 +7,39 @@
   <p:sldIdLst>
     <p:sldId id="256" r:id="rId2"/>
     <p:sldId id="257" r:id="rId3"/>
-    <p:sldId id="258" r:id="rId4"/>
-    <p:sldId id="264" r:id="rId5"/>
-    <p:sldId id="263" r:id="rId6"/>
-    <p:sldId id="262" r:id="rId7"/>
-    <p:sldId id="265" r:id="rId8"/>
-    <p:sldId id="267" r:id="rId9"/>
-    <p:sldId id="268" r:id="rId10"/>
-    <p:sldId id="269" r:id="rId11"/>
-    <p:sldId id="270" r:id="rId12"/>
-    <p:sldId id="271" r:id="rId13"/>
-    <p:sldId id="273" r:id="rId14"/>
-    <p:sldId id="274" r:id="rId15"/>
-    <p:sldId id="275" r:id="rId16"/>
-    <p:sldId id="276" r:id="rId17"/>
-    <p:sldId id="290" r:id="rId18"/>
-    <p:sldId id="282" r:id="rId19"/>
-    <p:sldId id="277" r:id="rId20"/>
-    <p:sldId id="283" r:id="rId21"/>
-    <p:sldId id="278" r:id="rId22"/>
-    <p:sldId id="280" r:id="rId23"/>
-    <p:sldId id="279" r:id="rId24"/>
-    <p:sldId id="281" r:id="rId25"/>
-    <p:sldId id="284" r:id="rId26"/>
-    <p:sldId id="285" r:id="rId27"/>
-    <p:sldId id="286" r:id="rId28"/>
-    <p:sldId id="287" r:id="rId29"/>
-    <p:sldId id="288" r:id="rId30"/>
-    <p:sldId id="289" r:id="rId31"/>
+    <p:sldId id="290" r:id="rId4"/>
+    <p:sldId id="258" r:id="rId5"/>
+    <p:sldId id="292" r:id="rId6"/>
+    <p:sldId id="293" r:id="rId7"/>
+    <p:sldId id="295" r:id="rId8"/>
+    <p:sldId id="297" r:id="rId9"/>
+    <p:sldId id="296" r:id="rId10"/>
+    <p:sldId id="298" r:id="rId11"/>
+    <p:sldId id="299" r:id="rId12"/>
+    <p:sldId id="300" r:id="rId13"/>
+    <p:sldId id="265" r:id="rId14"/>
+    <p:sldId id="270" r:id="rId15"/>
+    <p:sldId id="303" r:id="rId16"/>
+    <p:sldId id="304" r:id="rId17"/>
+    <p:sldId id="301" r:id="rId18"/>
+    <p:sldId id="302" r:id="rId19"/>
+    <p:sldId id="305" r:id="rId20"/>
+    <p:sldId id="284" r:id="rId21"/>
+    <p:sldId id="291" r:id="rId22"/>
+    <p:sldId id="288" r:id="rId23"/>
+    <p:sldId id="289" r:id="rId24"/>
+    <p:sldId id="308" r:id="rId25"/>
+    <p:sldId id="310" r:id="rId26"/>
+    <p:sldId id="309" r:id="rId27"/>
+    <p:sldId id="311" r:id="rId28"/>
+    <p:sldId id="312" r:id="rId29"/>
+    <p:sldId id="282" r:id="rId30"/>
+    <p:sldId id="277" r:id="rId31"/>
+    <p:sldId id="283" r:id="rId32"/>
+    <p:sldId id="278" r:id="rId33"/>
+    <p:sldId id="280" r:id="rId34"/>
+    <p:sldId id="279" r:id="rId35"/>
+    <p:sldId id="281" r:id="rId36"/>
   </p:sldIdLst>
   <p:sldSz cx="9144000" cy="6858000" type="screen4x3"/>
   <p:notesSz cx="6858000" cy="9144000"/>
@@ -331,7 +336,7 @@
           <a:p>
             <a:fld id="{241EB5C9-1307-BA42-ABA2-0BC069CD8E7F}" type="datetimeFigureOut">
               <a:rPr lang="en-US" smtClean="0"/>
-              <a:t>3/8/2026</a:t>
+              <a:t>3/15/2026</a:t>
             </a:fld>
             <a:endParaRPr lang="en-US"/>
           </a:p>
@@ -499,7 +504,7 @@
           <a:p>
             <a:fld id="{241EB5C9-1307-BA42-ABA2-0BC069CD8E7F}" type="datetimeFigureOut">
               <a:rPr lang="en-US" smtClean="0"/>
-              <a:t>3/8/2026</a:t>
+              <a:t>3/15/2026</a:t>
             </a:fld>
             <a:endParaRPr lang="en-US"/>
           </a:p>
@@ -677,7 +682,7 @@
           <a:p>
             <a:fld id="{241EB5C9-1307-BA42-ABA2-0BC069CD8E7F}" type="datetimeFigureOut">
               <a:rPr lang="en-US" smtClean="0"/>
-              <a:t>3/8/2026</a:t>
+              <a:t>3/15/2026</a:t>
             </a:fld>
             <a:endParaRPr lang="en-US"/>
           </a:p>
@@ -845,7 +850,7 @@
           <a:p>
             <a:fld id="{241EB5C9-1307-BA42-ABA2-0BC069CD8E7F}" type="datetimeFigureOut">
               <a:rPr lang="en-US" smtClean="0"/>
-              <a:t>3/8/2026</a:t>
+              <a:t>3/15/2026</a:t>
             </a:fld>
             <a:endParaRPr lang="en-US"/>
           </a:p>
@@ -1090,7 +1095,7 @@
           <a:p>
             <a:fld id="{241EB5C9-1307-BA42-ABA2-0BC069CD8E7F}" type="datetimeFigureOut">
               <a:rPr lang="en-US" smtClean="0"/>
-              <a:t>3/8/2026</a:t>
+              <a:t>3/15/2026</a:t>
             </a:fld>
             <a:endParaRPr lang="en-US"/>
           </a:p>
@@ -1375,7 +1380,7 @@
           <a:p>
             <a:fld id="{241EB5C9-1307-BA42-ABA2-0BC069CD8E7F}" type="datetimeFigureOut">
               <a:rPr lang="en-US" smtClean="0"/>
-              <a:t>3/8/2026</a:t>
+              <a:t>3/15/2026</a:t>
             </a:fld>
             <a:endParaRPr lang="en-US"/>
           </a:p>
@@ -1794,7 +1799,7 @@
           <a:p>
             <a:fld id="{241EB5C9-1307-BA42-ABA2-0BC069CD8E7F}" type="datetimeFigureOut">
               <a:rPr lang="en-US" smtClean="0"/>
-              <a:t>3/8/2026</a:t>
+              <a:t>3/15/2026</a:t>
             </a:fld>
             <a:endParaRPr lang="en-US"/>
           </a:p>
@@ -1911,7 +1916,7 @@
           <a:p>
             <a:fld id="{241EB5C9-1307-BA42-ABA2-0BC069CD8E7F}" type="datetimeFigureOut">
               <a:rPr lang="en-US" smtClean="0"/>
-              <a:t>3/8/2026</a:t>
+              <a:t>3/15/2026</a:t>
             </a:fld>
             <a:endParaRPr lang="en-US"/>
           </a:p>
@@ -2006,7 +2011,7 @@
           <a:p>
             <a:fld id="{241EB5C9-1307-BA42-ABA2-0BC069CD8E7F}" type="datetimeFigureOut">
               <a:rPr lang="en-US" smtClean="0"/>
-              <a:t>3/8/2026</a:t>
+              <a:t>3/15/2026</a:t>
             </a:fld>
             <a:endParaRPr lang="en-US"/>
           </a:p>
@@ -2281,7 +2286,7 @@
           <a:p>
             <a:fld id="{241EB5C9-1307-BA42-ABA2-0BC069CD8E7F}" type="datetimeFigureOut">
               <a:rPr lang="en-US" smtClean="0"/>
-              <a:t>3/8/2026</a:t>
+              <a:t>3/15/2026</a:t>
             </a:fld>
             <a:endParaRPr lang="en-US"/>
           </a:p>
@@ -2533,7 +2538,7 @@
           <a:p>
             <a:fld id="{241EB5C9-1307-BA42-ABA2-0BC069CD8E7F}" type="datetimeFigureOut">
               <a:rPr lang="en-US" smtClean="0"/>
-              <a:t>3/8/2026</a:t>
+              <a:t>3/15/2026</a:t>
             </a:fld>
             <a:endParaRPr lang="en-US"/>
           </a:p>
@@ -2744,7 +2749,7 @@
           <a:p>
             <a:fld id="{241EB5C9-1307-BA42-ABA2-0BC069CD8E7F}" type="datetimeFigureOut">
               <a:rPr lang="en-US" smtClean="0"/>
-              <a:t>3/8/2026</a:t>
+              <a:t>3/15/2026</a:t>
             </a:fld>
             <a:endParaRPr lang="en-US"/>
           </a:p>
@@ -3219,7 +3224,7 @@
         <p:cNvPr id="1" name="">
           <a:extLst>
             <a:ext uri="{FF2B5EF4-FFF2-40B4-BE49-F238E27FC236}">
-              <a16:creationId xmlns:a16="http://schemas.microsoft.com/office/drawing/2014/main" id="{B17FB798-81F3-7F56-0F53-C6D4A2602731}"/>
+              <a16:creationId xmlns:a16="http://schemas.microsoft.com/office/drawing/2014/main" id="{F2DF5DBD-9FD3-F64A-EFD1-6EFA6484C057}"/>
             </a:ext>
           </a:extLst>
         </p:cNvPr>
@@ -3239,7 +3244,7 @@
           <p:cNvPr id="2" name="Title 1">
             <a:extLst>
               <a:ext uri="{FF2B5EF4-FFF2-40B4-BE49-F238E27FC236}">
-                <a16:creationId xmlns:a16="http://schemas.microsoft.com/office/drawing/2014/main" id="{EFE5F39C-29B5-E8F4-BFBD-F87AB3B4F6A3}"/>
+                <a16:creationId xmlns:a16="http://schemas.microsoft.com/office/drawing/2014/main" id="{56DDCF15-9B6E-513C-B8CF-B16E66D76A80}"/>
               </a:ext>
             </a:extLst>
           </p:cNvPr>
@@ -3257,7 +3262,7 @@
           <a:p>
             <a:r>
               <a:rPr lang="en-US" dirty="0"/>
-              <a:t>Energy offset (</a:t>
+              <a:t>Default (</a:t>
             </a:r>
             <a:r>
               <a:rPr lang="en-US" dirty="0" err="1"/>
@@ -3265,7 +3270,7 @@
             </a:r>
             <a:r>
               <a:rPr lang="en-US" dirty="0"/>
-              <a:t>)</a:t>
+              <a:t>), Increasing N</a:t>
             </a:r>
           </a:p>
         </p:txBody>
@@ -3275,7 +3280,7 @@
           <p:cNvPr id="4" name="Text Placeholder 3">
             <a:extLst>
               <a:ext uri="{FF2B5EF4-FFF2-40B4-BE49-F238E27FC236}">
-                <a16:creationId xmlns:a16="http://schemas.microsoft.com/office/drawing/2014/main" id="{83F447C0-F0CE-EEBE-50A1-86DF6937F504}"/>
+                <a16:creationId xmlns:a16="http://schemas.microsoft.com/office/drawing/2014/main" id="{BC812B5E-FBFC-7D21-7D42-CA91AF191425}"/>
               </a:ext>
             </a:extLst>
           </p:cNvPr>
@@ -3293,15 +3298,15 @@
           <a:p>
             <a:r>
               <a:rPr lang="en-US" dirty="0"/>
-              <a:t>E=-0.1 eV, eta=10</a:t>
+              <a:t>E=0 eV, eta=10</a:t>
             </a:r>
             <a:r>
               <a:rPr lang="en-US" baseline="30000" dirty="0"/>
-              <a:t>-3</a:t>
+              <a:t>-5</a:t>
             </a:r>
             <a:r>
               <a:rPr lang="en-US" dirty="0"/>
-              <a:t>, NN=4</a:t>
+              <a:t>, NN=2</a:t>
             </a:r>
           </a:p>
         </p:txBody>
@@ -3311,7 +3316,7 @@
           <p:cNvPr id="8" name="Content Placeholder 7">
             <a:extLst>
               <a:ext uri="{FF2B5EF4-FFF2-40B4-BE49-F238E27FC236}">
-                <a16:creationId xmlns:a16="http://schemas.microsoft.com/office/drawing/2014/main" id="{E0BFA6C5-14EE-C18C-D48D-26156EE473F4}"/>
+                <a16:creationId xmlns:a16="http://schemas.microsoft.com/office/drawing/2014/main" id="{0E0BB18B-1D07-CEC2-270D-264EC1C50C92}"/>
               </a:ext>
             </a:extLst>
           </p:cNvPr>
@@ -3342,7 +3347,7 @@
           <p:cNvPr id="9" name="Text Placeholder 3">
             <a:extLst>
               <a:ext uri="{FF2B5EF4-FFF2-40B4-BE49-F238E27FC236}">
-                <a16:creationId xmlns:a16="http://schemas.microsoft.com/office/drawing/2014/main" id="{2C8C3659-A98B-DCB3-86C2-9E031D95938A}"/>
+                <a16:creationId xmlns:a16="http://schemas.microsoft.com/office/drawing/2014/main" id="{45917381-DB79-9CA7-DF05-4113D893AA6F}"/>
               </a:ext>
             </a:extLst>
           </p:cNvPr>
@@ -3504,7 +3509,7 @@
           <a:p>
             <a:r>
               <a:rPr lang="en-US" dirty="0"/>
-              <a:t>N=17</a:t>
+              <a:t>N=13</a:t>
             </a:r>
           </a:p>
         </p:txBody>
@@ -3512,7 +3517,7 @@
     </p:spTree>
     <p:extLst>
       <p:ext uri="{BB962C8B-B14F-4D97-AF65-F5344CB8AC3E}">
-        <p14:creationId xmlns:p14="http://schemas.microsoft.com/office/powerpoint/2010/main" val="861368613"/>
+        <p14:creationId xmlns:p14="http://schemas.microsoft.com/office/powerpoint/2010/main" val="2125461235"/>
       </p:ext>
     </p:extLst>
   </p:cSld>
@@ -3523,6 +3528,823 @@
 </file>
 
 <file path=ppt/slides/slide11.xml><?xml version="1.0" encoding="utf-8"?>
+<p:sld xmlns:a="http://schemas.openxmlformats.org/drawingml/2006/main" xmlns:r="http://schemas.openxmlformats.org/officeDocument/2006/relationships" xmlns:p="http://schemas.openxmlformats.org/presentationml/2006/main">
+  <p:cSld>
+    <p:spTree>
+      <p:nvGrpSpPr>
+        <p:cNvPr id="1" name="">
+          <a:extLst>
+            <a:ext uri="{FF2B5EF4-FFF2-40B4-BE49-F238E27FC236}">
+              <a16:creationId xmlns:a16="http://schemas.microsoft.com/office/drawing/2014/main" id="{4426512F-07F4-311C-546A-07DADD2C75BA}"/>
+            </a:ext>
+          </a:extLst>
+        </p:cNvPr>
+        <p:cNvGrpSpPr/>
+        <p:nvPr/>
+      </p:nvGrpSpPr>
+      <p:grpSpPr>
+        <a:xfrm>
+          <a:off x="0" y="0"/>
+          <a:ext cx="0" cy="0"/>
+          <a:chOff x="0" y="0"/>
+          <a:chExt cx="0" cy="0"/>
+        </a:xfrm>
+      </p:grpSpPr>
+      <p:sp>
+        <p:nvSpPr>
+          <p:cNvPr id="2" name="Title 1">
+            <a:extLst>
+              <a:ext uri="{FF2B5EF4-FFF2-40B4-BE49-F238E27FC236}">
+                <a16:creationId xmlns:a16="http://schemas.microsoft.com/office/drawing/2014/main" id="{8A8674C3-40B0-EA77-FA25-C0163F0AF322}"/>
+              </a:ext>
+            </a:extLst>
+          </p:cNvPr>
+          <p:cNvSpPr>
+            <a:spLocks noGrp="1"/>
+          </p:cNvSpPr>
+          <p:nvPr>
+            <p:ph type="title"/>
+          </p:nvPr>
+        </p:nvSpPr>
+        <p:spPr/>
+        <p:txBody>
+          <a:bodyPr/>
+          <a:lstStyle/>
+          <a:p>
+            <a:r>
+              <a:rPr lang="en-US" dirty="0"/>
+              <a:t>Default (</a:t>
+            </a:r>
+            <a:r>
+              <a:rPr lang="en-US" dirty="0" err="1"/>
+              <a:t>romb</a:t>
+            </a:r>
+            <a:r>
+              <a:rPr lang="en-US" dirty="0"/>
+              <a:t>), Increasing N</a:t>
+            </a:r>
+          </a:p>
+        </p:txBody>
+      </p:sp>
+      <p:sp>
+        <p:nvSpPr>
+          <p:cNvPr id="4" name="Text Placeholder 3">
+            <a:extLst>
+              <a:ext uri="{FF2B5EF4-FFF2-40B4-BE49-F238E27FC236}">
+                <a16:creationId xmlns:a16="http://schemas.microsoft.com/office/drawing/2014/main" id="{6D73CF5F-25B6-14A5-B397-8B49AF159FFB}"/>
+              </a:ext>
+            </a:extLst>
+          </p:cNvPr>
+          <p:cNvSpPr>
+            <a:spLocks noGrp="1"/>
+          </p:cNvSpPr>
+          <p:nvPr>
+            <p:ph type="body" idx="1"/>
+          </p:nvPr>
+        </p:nvSpPr>
+        <p:spPr/>
+        <p:txBody>
+          <a:bodyPr/>
+          <a:lstStyle/>
+          <a:p>
+            <a:r>
+              <a:rPr lang="en-US" dirty="0"/>
+              <a:t>E=0 eV, eta=10</a:t>
+            </a:r>
+            <a:r>
+              <a:rPr lang="en-US" baseline="30000" dirty="0"/>
+              <a:t>-5</a:t>
+            </a:r>
+            <a:r>
+              <a:rPr lang="en-US" dirty="0"/>
+              <a:t>, NN=4</a:t>
+            </a:r>
+          </a:p>
+        </p:txBody>
+      </p:sp>
+      <p:pic>
+        <p:nvPicPr>
+          <p:cNvPr id="8" name="Content Placeholder 7">
+            <a:extLst>
+              <a:ext uri="{FF2B5EF4-FFF2-40B4-BE49-F238E27FC236}">
+                <a16:creationId xmlns:a16="http://schemas.microsoft.com/office/drawing/2014/main" id="{C3F427CA-3170-1B6D-4966-82D025A59248}"/>
+              </a:ext>
+            </a:extLst>
+          </p:cNvPr>
+          <p:cNvPicPr>
+            <a:picLocks noGrp="1" noChangeAspect="1"/>
+          </p:cNvPicPr>
+          <p:nvPr>
+            <p:ph sz="half" idx="2"/>
+          </p:nvPr>
+        </p:nvPicPr>
+        <p:blipFill>
+          <a:blip r:embed="rId2"/>
+          <a:srcRect/>
+          <a:stretch/>
+        </p:blipFill>
+        <p:spPr>
+          <a:xfrm>
+            <a:off x="0" y="2306166"/>
+            <a:ext cx="9146530" cy="3896671"/>
+          </a:xfrm>
+          <a:prstGeom prst="rect">
+            <a:avLst/>
+          </a:prstGeom>
+        </p:spPr>
+      </p:pic>
+      <p:sp>
+        <p:nvSpPr>
+          <p:cNvPr id="9" name="Text Placeholder 3">
+            <a:extLst>
+              <a:ext uri="{FF2B5EF4-FFF2-40B4-BE49-F238E27FC236}">
+                <a16:creationId xmlns:a16="http://schemas.microsoft.com/office/drawing/2014/main" id="{68969154-D35C-AD78-04F5-DFEDAC865449}"/>
+              </a:ext>
+            </a:extLst>
+          </p:cNvPr>
+          <p:cNvSpPr txBox="1">
+            <a:spLocks/>
+          </p:cNvSpPr>
+          <p:nvPr/>
+        </p:nvSpPr>
+        <p:spPr>
+          <a:xfrm>
+            <a:off x="4497388" y="1535113"/>
+            <a:ext cx="4040188" cy="639762"/>
+          </a:xfrm>
+          <a:prstGeom prst="rect">
+            <a:avLst/>
+          </a:prstGeom>
+        </p:spPr>
+        <p:txBody>
+          <a:bodyPr vert="horz" lIns="91440" tIns="45720" rIns="91440" bIns="45720" rtlCol="0" anchor="b">
+            <a:normAutofit/>
+          </a:bodyPr>
+          <a:lstStyle>
+            <a:lvl1pPr marL="0" indent="0" algn="l" defTabSz="457200" rtl="0" eaLnBrk="1" latinLnBrk="0" hangingPunct="1">
+              <a:spcBef>
+                <a:spcPct val="20000"/>
+              </a:spcBef>
+              <a:buFont typeface="Arial"/>
+              <a:buNone/>
+              <a:defRPr sz="2400" b="1" kern="1200">
+                <a:solidFill>
+                  <a:schemeClr val="tx1"/>
+                </a:solidFill>
+                <a:latin typeface="+mn-lt"/>
+                <a:ea typeface="+mn-ea"/>
+                <a:cs typeface="+mn-cs"/>
+              </a:defRPr>
+            </a:lvl1pPr>
+            <a:lvl2pPr marL="457200" indent="0" algn="l" defTabSz="457200" rtl="0" eaLnBrk="1" latinLnBrk="0" hangingPunct="1">
+              <a:spcBef>
+                <a:spcPct val="20000"/>
+              </a:spcBef>
+              <a:buFont typeface="Arial"/>
+              <a:buNone/>
+              <a:defRPr sz="2000" b="1" kern="1200">
+                <a:solidFill>
+                  <a:schemeClr val="tx1"/>
+                </a:solidFill>
+                <a:latin typeface="+mn-lt"/>
+                <a:ea typeface="+mn-ea"/>
+                <a:cs typeface="+mn-cs"/>
+              </a:defRPr>
+            </a:lvl2pPr>
+            <a:lvl3pPr marL="914400" indent="0" algn="l" defTabSz="457200" rtl="0" eaLnBrk="1" latinLnBrk="0" hangingPunct="1">
+              <a:spcBef>
+                <a:spcPct val="20000"/>
+              </a:spcBef>
+              <a:buFont typeface="Arial"/>
+              <a:buNone/>
+              <a:defRPr sz="1800" b="1" kern="1200">
+                <a:solidFill>
+                  <a:schemeClr val="tx1"/>
+                </a:solidFill>
+                <a:latin typeface="+mn-lt"/>
+                <a:ea typeface="+mn-ea"/>
+                <a:cs typeface="+mn-cs"/>
+              </a:defRPr>
+            </a:lvl3pPr>
+            <a:lvl4pPr marL="1371600" indent="0" algn="l" defTabSz="457200" rtl="0" eaLnBrk="1" latinLnBrk="0" hangingPunct="1">
+              <a:spcBef>
+                <a:spcPct val="20000"/>
+              </a:spcBef>
+              <a:buFont typeface="Arial"/>
+              <a:buNone/>
+              <a:defRPr sz="1600" b="1" kern="1200">
+                <a:solidFill>
+                  <a:schemeClr val="tx1"/>
+                </a:solidFill>
+                <a:latin typeface="+mn-lt"/>
+                <a:ea typeface="+mn-ea"/>
+                <a:cs typeface="+mn-cs"/>
+              </a:defRPr>
+            </a:lvl4pPr>
+            <a:lvl5pPr marL="1828800" indent="0" algn="l" defTabSz="457200" rtl="0" eaLnBrk="1" latinLnBrk="0" hangingPunct="1">
+              <a:spcBef>
+                <a:spcPct val="20000"/>
+              </a:spcBef>
+              <a:buFont typeface="Arial"/>
+              <a:buNone/>
+              <a:defRPr sz="1600" b="1" kern="1200">
+                <a:solidFill>
+                  <a:schemeClr val="tx1"/>
+                </a:solidFill>
+                <a:latin typeface="+mn-lt"/>
+                <a:ea typeface="+mn-ea"/>
+                <a:cs typeface="+mn-cs"/>
+              </a:defRPr>
+            </a:lvl5pPr>
+            <a:lvl6pPr marL="2286000" indent="0" algn="l" defTabSz="457200" rtl="0" eaLnBrk="1" latinLnBrk="0" hangingPunct="1">
+              <a:spcBef>
+                <a:spcPct val="20000"/>
+              </a:spcBef>
+              <a:buFont typeface="Arial"/>
+              <a:buNone/>
+              <a:defRPr sz="1600" b="1" kern="1200">
+                <a:solidFill>
+                  <a:schemeClr val="tx1"/>
+                </a:solidFill>
+                <a:latin typeface="+mn-lt"/>
+                <a:ea typeface="+mn-ea"/>
+                <a:cs typeface="+mn-cs"/>
+              </a:defRPr>
+            </a:lvl6pPr>
+            <a:lvl7pPr marL="2743200" indent="0" algn="l" defTabSz="457200" rtl="0" eaLnBrk="1" latinLnBrk="0" hangingPunct="1">
+              <a:spcBef>
+                <a:spcPct val="20000"/>
+              </a:spcBef>
+              <a:buFont typeface="Arial"/>
+              <a:buNone/>
+              <a:defRPr sz="1600" b="1" kern="1200">
+                <a:solidFill>
+                  <a:schemeClr val="tx1"/>
+                </a:solidFill>
+                <a:latin typeface="+mn-lt"/>
+                <a:ea typeface="+mn-ea"/>
+                <a:cs typeface="+mn-cs"/>
+              </a:defRPr>
+            </a:lvl7pPr>
+            <a:lvl8pPr marL="3200400" indent="0" algn="l" defTabSz="457200" rtl="0" eaLnBrk="1" latinLnBrk="0" hangingPunct="1">
+              <a:spcBef>
+                <a:spcPct val="20000"/>
+              </a:spcBef>
+              <a:buFont typeface="Arial"/>
+              <a:buNone/>
+              <a:defRPr sz="1600" b="1" kern="1200">
+                <a:solidFill>
+                  <a:schemeClr val="tx1"/>
+                </a:solidFill>
+                <a:latin typeface="+mn-lt"/>
+                <a:ea typeface="+mn-ea"/>
+                <a:cs typeface="+mn-cs"/>
+              </a:defRPr>
+            </a:lvl8pPr>
+            <a:lvl9pPr marL="3657600" indent="0" algn="l" defTabSz="457200" rtl="0" eaLnBrk="1" latinLnBrk="0" hangingPunct="1">
+              <a:spcBef>
+                <a:spcPct val="20000"/>
+              </a:spcBef>
+              <a:buFont typeface="Arial"/>
+              <a:buNone/>
+              <a:defRPr sz="1600" b="1" kern="1200">
+                <a:solidFill>
+                  <a:schemeClr val="tx1"/>
+                </a:solidFill>
+                <a:latin typeface="+mn-lt"/>
+                <a:ea typeface="+mn-ea"/>
+                <a:cs typeface="+mn-cs"/>
+              </a:defRPr>
+            </a:lvl9pPr>
+          </a:lstStyle>
+          <a:p>
+            <a:r>
+              <a:rPr lang="en-US" dirty="0"/>
+              <a:t>N=17</a:t>
+            </a:r>
+          </a:p>
+        </p:txBody>
+      </p:sp>
+    </p:spTree>
+    <p:extLst>
+      <p:ext uri="{BB962C8B-B14F-4D97-AF65-F5344CB8AC3E}">
+        <p14:creationId xmlns:p14="http://schemas.microsoft.com/office/powerpoint/2010/main" val="3919770944"/>
+      </p:ext>
+    </p:extLst>
+  </p:cSld>
+  <p:clrMapOvr>
+    <a:masterClrMapping/>
+  </p:clrMapOvr>
+</p:sld>
+</file>
+
+<file path=ppt/slides/slide12.xml><?xml version="1.0" encoding="utf-8"?>
+<p:sld xmlns:a="http://schemas.openxmlformats.org/drawingml/2006/main" xmlns:r="http://schemas.openxmlformats.org/officeDocument/2006/relationships" xmlns:p="http://schemas.openxmlformats.org/presentationml/2006/main">
+  <p:cSld>
+    <p:spTree>
+      <p:nvGrpSpPr>
+        <p:cNvPr id="1" name="">
+          <a:extLst>
+            <a:ext uri="{FF2B5EF4-FFF2-40B4-BE49-F238E27FC236}">
+              <a16:creationId xmlns:a16="http://schemas.microsoft.com/office/drawing/2014/main" id="{A574C6E4-EA1E-97AF-9AB2-34CED874BDAB}"/>
+            </a:ext>
+          </a:extLst>
+        </p:cNvPr>
+        <p:cNvGrpSpPr/>
+        <p:nvPr/>
+      </p:nvGrpSpPr>
+      <p:grpSpPr>
+        <a:xfrm>
+          <a:off x="0" y="0"/>
+          <a:ext cx="0" cy="0"/>
+          <a:chOff x="0" y="0"/>
+          <a:chExt cx="0" cy="0"/>
+        </a:xfrm>
+      </p:grpSpPr>
+      <p:sp>
+        <p:nvSpPr>
+          <p:cNvPr id="2" name="Title 1">
+            <a:extLst>
+              <a:ext uri="{FF2B5EF4-FFF2-40B4-BE49-F238E27FC236}">
+                <a16:creationId xmlns:a16="http://schemas.microsoft.com/office/drawing/2014/main" id="{4AFF6561-93FF-DC17-86E6-CA21AC03678B}"/>
+              </a:ext>
+            </a:extLst>
+          </p:cNvPr>
+          <p:cNvSpPr>
+            <a:spLocks noGrp="1"/>
+          </p:cNvSpPr>
+          <p:nvPr>
+            <p:ph type="title"/>
+          </p:nvPr>
+        </p:nvSpPr>
+        <p:spPr/>
+        <p:txBody>
+          <a:bodyPr/>
+          <a:lstStyle/>
+          <a:p>
+            <a:r>
+              <a:rPr lang="en-US" dirty="0"/>
+              <a:t>Default (</a:t>
+            </a:r>
+            <a:r>
+              <a:rPr lang="en-US" dirty="0" err="1"/>
+              <a:t>romb</a:t>
+            </a:r>
+            <a:r>
+              <a:rPr lang="en-US" dirty="0"/>
+              <a:t>), Increasing N</a:t>
+            </a:r>
+          </a:p>
+        </p:txBody>
+      </p:sp>
+      <p:sp>
+        <p:nvSpPr>
+          <p:cNvPr id="4" name="Text Placeholder 3">
+            <a:extLst>
+              <a:ext uri="{FF2B5EF4-FFF2-40B4-BE49-F238E27FC236}">
+                <a16:creationId xmlns:a16="http://schemas.microsoft.com/office/drawing/2014/main" id="{717BBD46-4D67-D0D3-56F6-12FC464AB026}"/>
+              </a:ext>
+            </a:extLst>
+          </p:cNvPr>
+          <p:cNvSpPr>
+            <a:spLocks noGrp="1"/>
+          </p:cNvSpPr>
+          <p:nvPr>
+            <p:ph type="body" idx="1"/>
+          </p:nvPr>
+        </p:nvSpPr>
+        <p:spPr/>
+        <p:txBody>
+          <a:bodyPr/>
+          <a:lstStyle/>
+          <a:p>
+            <a:r>
+              <a:rPr lang="en-US" dirty="0"/>
+              <a:t>E=0 eV, eta=10</a:t>
+            </a:r>
+            <a:r>
+              <a:rPr lang="en-US" baseline="30000" dirty="0"/>
+              <a:t>-5</a:t>
+            </a:r>
+            <a:r>
+              <a:rPr lang="en-US" dirty="0"/>
+              <a:t>, NN=4</a:t>
+            </a:r>
+          </a:p>
+        </p:txBody>
+      </p:sp>
+      <p:pic>
+        <p:nvPicPr>
+          <p:cNvPr id="8" name="Content Placeholder 7">
+            <a:extLst>
+              <a:ext uri="{FF2B5EF4-FFF2-40B4-BE49-F238E27FC236}">
+                <a16:creationId xmlns:a16="http://schemas.microsoft.com/office/drawing/2014/main" id="{00CBFDC4-0537-EF69-E8CB-8CEC0E8F559C}"/>
+              </a:ext>
+            </a:extLst>
+          </p:cNvPr>
+          <p:cNvPicPr>
+            <a:picLocks noGrp="1" noChangeAspect="1"/>
+          </p:cNvPicPr>
+          <p:nvPr>
+            <p:ph sz="half" idx="2"/>
+          </p:nvPr>
+        </p:nvPicPr>
+        <p:blipFill>
+          <a:blip r:embed="rId2"/>
+          <a:srcRect/>
+          <a:stretch/>
+        </p:blipFill>
+        <p:spPr>
+          <a:xfrm>
+            <a:off x="0" y="2306166"/>
+            <a:ext cx="9146530" cy="3896671"/>
+          </a:xfrm>
+          <a:prstGeom prst="rect">
+            <a:avLst/>
+          </a:prstGeom>
+        </p:spPr>
+      </p:pic>
+      <p:sp>
+        <p:nvSpPr>
+          <p:cNvPr id="9" name="Text Placeholder 3">
+            <a:extLst>
+              <a:ext uri="{FF2B5EF4-FFF2-40B4-BE49-F238E27FC236}">
+                <a16:creationId xmlns:a16="http://schemas.microsoft.com/office/drawing/2014/main" id="{72058F0D-BA44-0D0D-CF21-421AA6966E4F}"/>
+              </a:ext>
+            </a:extLst>
+          </p:cNvPr>
+          <p:cNvSpPr txBox="1">
+            <a:spLocks/>
+          </p:cNvSpPr>
+          <p:nvPr/>
+        </p:nvSpPr>
+        <p:spPr>
+          <a:xfrm>
+            <a:off x="4497388" y="1535113"/>
+            <a:ext cx="4040188" cy="639762"/>
+          </a:xfrm>
+          <a:prstGeom prst="rect">
+            <a:avLst/>
+          </a:prstGeom>
+        </p:spPr>
+        <p:txBody>
+          <a:bodyPr vert="horz" lIns="91440" tIns="45720" rIns="91440" bIns="45720" rtlCol="0" anchor="b">
+            <a:normAutofit/>
+          </a:bodyPr>
+          <a:lstStyle>
+            <a:lvl1pPr marL="0" indent="0" algn="l" defTabSz="457200" rtl="0" eaLnBrk="1" latinLnBrk="0" hangingPunct="1">
+              <a:spcBef>
+                <a:spcPct val="20000"/>
+              </a:spcBef>
+              <a:buFont typeface="Arial"/>
+              <a:buNone/>
+              <a:defRPr sz="2400" b="1" kern="1200">
+                <a:solidFill>
+                  <a:schemeClr val="tx1"/>
+                </a:solidFill>
+                <a:latin typeface="+mn-lt"/>
+                <a:ea typeface="+mn-ea"/>
+                <a:cs typeface="+mn-cs"/>
+              </a:defRPr>
+            </a:lvl1pPr>
+            <a:lvl2pPr marL="457200" indent="0" algn="l" defTabSz="457200" rtl="0" eaLnBrk="1" latinLnBrk="0" hangingPunct="1">
+              <a:spcBef>
+                <a:spcPct val="20000"/>
+              </a:spcBef>
+              <a:buFont typeface="Arial"/>
+              <a:buNone/>
+              <a:defRPr sz="2000" b="1" kern="1200">
+                <a:solidFill>
+                  <a:schemeClr val="tx1"/>
+                </a:solidFill>
+                <a:latin typeface="+mn-lt"/>
+                <a:ea typeface="+mn-ea"/>
+                <a:cs typeface="+mn-cs"/>
+              </a:defRPr>
+            </a:lvl2pPr>
+            <a:lvl3pPr marL="914400" indent="0" algn="l" defTabSz="457200" rtl="0" eaLnBrk="1" latinLnBrk="0" hangingPunct="1">
+              <a:spcBef>
+                <a:spcPct val="20000"/>
+              </a:spcBef>
+              <a:buFont typeface="Arial"/>
+              <a:buNone/>
+              <a:defRPr sz="1800" b="1" kern="1200">
+                <a:solidFill>
+                  <a:schemeClr val="tx1"/>
+                </a:solidFill>
+                <a:latin typeface="+mn-lt"/>
+                <a:ea typeface="+mn-ea"/>
+                <a:cs typeface="+mn-cs"/>
+              </a:defRPr>
+            </a:lvl3pPr>
+            <a:lvl4pPr marL="1371600" indent="0" algn="l" defTabSz="457200" rtl="0" eaLnBrk="1" latinLnBrk="0" hangingPunct="1">
+              <a:spcBef>
+                <a:spcPct val="20000"/>
+              </a:spcBef>
+              <a:buFont typeface="Arial"/>
+              <a:buNone/>
+              <a:defRPr sz="1600" b="1" kern="1200">
+                <a:solidFill>
+                  <a:schemeClr val="tx1"/>
+                </a:solidFill>
+                <a:latin typeface="+mn-lt"/>
+                <a:ea typeface="+mn-ea"/>
+                <a:cs typeface="+mn-cs"/>
+              </a:defRPr>
+            </a:lvl4pPr>
+            <a:lvl5pPr marL="1828800" indent="0" algn="l" defTabSz="457200" rtl="0" eaLnBrk="1" latinLnBrk="0" hangingPunct="1">
+              <a:spcBef>
+                <a:spcPct val="20000"/>
+              </a:spcBef>
+              <a:buFont typeface="Arial"/>
+              <a:buNone/>
+              <a:defRPr sz="1600" b="1" kern="1200">
+                <a:solidFill>
+                  <a:schemeClr val="tx1"/>
+                </a:solidFill>
+                <a:latin typeface="+mn-lt"/>
+                <a:ea typeface="+mn-ea"/>
+                <a:cs typeface="+mn-cs"/>
+              </a:defRPr>
+            </a:lvl5pPr>
+            <a:lvl6pPr marL="2286000" indent="0" algn="l" defTabSz="457200" rtl="0" eaLnBrk="1" latinLnBrk="0" hangingPunct="1">
+              <a:spcBef>
+                <a:spcPct val="20000"/>
+              </a:spcBef>
+              <a:buFont typeface="Arial"/>
+              <a:buNone/>
+              <a:defRPr sz="1600" b="1" kern="1200">
+                <a:solidFill>
+                  <a:schemeClr val="tx1"/>
+                </a:solidFill>
+                <a:latin typeface="+mn-lt"/>
+                <a:ea typeface="+mn-ea"/>
+                <a:cs typeface="+mn-cs"/>
+              </a:defRPr>
+            </a:lvl6pPr>
+            <a:lvl7pPr marL="2743200" indent="0" algn="l" defTabSz="457200" rtl="0" eaLnBrk="1" latinLnBrk="0" hangingPunct="1">
+              <a:spcBef>
+                <a:spcPct val="20000"/>
+              </a:spcBef>
+              <a:buFont typeface="Arial"/>
+              <a:buNone/>
+              <a:defRPr sz="1600" b="1" kern="1200">
+                <a:solidFill>
+                  <a:schemeClr val="tx1"/>
+                </a:solidFill>
+                <a:latin typeface="+mn-lt"/>
+                <a:ea typeface="+mn-ea"/>
+                <a:cs typeface="+mn-cs"/>
+              </a:defRPr>
+            </a:lvl7pPr>
+            <a:lvl8pPr marL="3200400" indent="0" algn="l" defTabSz="457200" rtl="0" eaLnBrk="1" latinLnBrk="0" hangingPunct="1">
+              <a:spcBef>
+                <a:spcPct val="20000"/>
+              </a:spcBef>
+              <a:buFont typeface="Arial"/>
+              <a:buNone/>
+              <a:defRPr sz="1600" b="1" kern="1200">
+                <a:solidFill>
+                  <a:schemeClr val="tx1"/>
+                </a:solidFill>
+                <a:latin typeface="+mn-lt"/>
+                <a:ea typeface="+mn-ea"/>
+                <a:cs typeface="+mn-cs"/>
+              </a:defRPr>
+            </a:lvl8pPr>
+            <a:lvl9pPr marL="3657600" indent="0" algn="l" defTabSz="457200" rtl="0" eaLnBrk="1" latinLnBrk="0" hangingPunct="1">
+              <a:spcBef>
+                <a:spcPct val="20000"/>
+              </a:spcBef>
+              <a:buFont typeface="Arial"/>
+              <a:buNone/>
+              <a:defRPr sz="1600" b="1" kern="1200">
+                <a:solidFill>
+                  <a:schemeClr val="tx1"/>
+                </a:solidFill>
+                <a:latin typeface="+mn-lt"/>
+                <a:ea typeface="+mn-ea"/>
+                <a:cs typeface="+mn-cs"/>
+              </a:defRPr>
+            </a:lvl9pPr>
+          </a:lstStyle>
+          <a:p>
+            <a:r>
+              <a:rPr lang="en-US" dirty="0"/>
+              <a:t>N=21</a:t>
+            </a:r>
+          </a:p>
+        </p:txBody>
+      </p:sp>
+    </p:spTree>
+    <p:extLst>
+      <p:ext uri="{BB962C8B-B14F-4D97-AF65-F5344CB8AC3E}">
+        <p14:creationId xmlns:p14="http://schemas.microsoft.com/office/powerpoint/2010/main" val="1003413386"/>
+      </p:ext>
+    </p:extLst>
+  </p:cSld>
+  <p:clrMapOvr>
+    <a:masterClrMapping/>
+  </p:clrMapOvr>
+</p:sld>
+</file>
+
+<file path=ppt/slides/slide13.xml><?xml version="1.0" encoding="utf-8"?>
+<p:sld xmlns:a="http://schemas.openxmlformats.org/drawingml/2006/main" xmlns:r="http://schemas.openxmlformats.org/officeDocument/2006/relationships" xmlns:p="http://schemas.openxmlformats.org/presentationml/2006/main">
+  <p:cSld>
+    <p:spTree>
+      <p:nvGrpSpPr>
+        <p:cNvPr id="1" name=""/>
+        <p:cNvGrpSpPr/>
+        <p:nvPr/>
+      </p:nvGrpSpPr>
+      <p:grpSpPr>
+        <a:xfrm>
+          <a:off x="0" y="0"/>
+          <a:ext cx="0" cy="0"/>
+          <a:chOff x="0" y="0"/>
+          <a:chExt cx="0" cy="0"/>
+        </a:xfrm>
+      </p:grpSpPr>
+      <mc:AlternateContent xmlns:mc="http://schemas.openxmlformats.org/markup-compatibility/2006" xmlns:a14="http://schemas.microsoft.com/office/drawing/2010/main">
+        <mc:Choice Requires="a14">
+          <p:sp>
+            <p:nvSpPr>
+              <p:cNvPr id="7" name="Title 6">
+                <a:extLst>
+                  <a:ext uri="{FF2B5EF4-FFF2-40B4-BE49-F238E27FC236}">
+                    <a16:creationId xmlns:a16="http://schemas.microsoft.com/office/drawing/2014/main" id="{401325A6-31AA-EC4D-C081-5A4E53CC7349}"/>
+                  </a:ext>
+                </a:extLst>
+              </p:cNvPr>
+              <p:cNvSpPr>
+                <a:spLocks noGrp="1"/>
+              </p:cNvSpPr>
+              <p:nvPr>
+                <p:ph type="ctrTitle"/>
+              </p:nvPr>
+            </p:nvSpPr>
+            <p:spPr/>
+            <p:txBody>
+              <a:bodyPr/>
+              <a:lstStyle/>
+              <a:p>
+                <a:pPr/>
+                <a:r>
+                  <a:rPr lang="en-US" dirty="0"/>
+                  <a:t>Energy offset</a:t>
+                </a:r>
+                <a:br>
+                  <a:rPr lang="en-US" dirty="0"/>
+                </a:br>
+                <a14:m>
+                  <m:oMathPara xmlns:m="http://schemas.openxmlformats.org/officeDocument/2006/math">
+                    <m:oMathParaPr>
+                      <m:jc m:val="centerGroup"/>
+                    </m:oMathParaPr>
+                    <m:oMath xmlns:m="http://schemas.openxmlformats.org/officeDocument/2006/math">
+                      <m:r>
+                        <a:rPr lang="da-DK" b="0" i="1" smtClean="0">
+                          <a:latin typeface="Cambria Math" panose="02040503050406030204" pitchFamily="18" charset="0"/>
+                        </a:rPr>
+                        <m:t>𝜂</m:t>
+                      </m:r>
+                      <m:r>
+                        <a:rPr lang="da-DK" b="0" i="1" smtClean="0">
+                          <a:latin typeface="Cambria Math" panose="02040503050406030204" pitchFamily="18" charset="0"/>
+                        </a:rPr>
+                        <m:t>=</m:t>
+                      </m:r>
+                      <m:sSup>
+                        <m:sSupPr>
+                          <m:ctrlPr>
+                            <a:rPr lang="da-DK" b="0" i="1" smtClean="0">
+                              <a:latin typeface="Cambria Math" panose="02040503050406030204" pitchFamily="18" charset="0"/>
+                            </a:rPr>
+                          </m:ctrlPr>
+                        </m:sSupPr>
+                        <m:e>
+                          <m:r>
+                            <a:rPr lang="da-DK" b="0" i="1" smtClean="0">
+                              <a:latin typeface="Cambria Math" panose="02040503050406030204" pitchFamily="18" charset="0"/>
+                            </a:rPr>
+                            <m:t>10</m:t>
+                          </m:r>
+                        </m:e>
+                        <m:sup>
+                          <m:r>
+                            <a:rPr lang="da-DK" b="0" i="1" smtClean="0">
+                              <a:latin typeface="Cambria Math" panose="02040503050406030204" pitchFamily="18" charset="0"/>
+                            </a:rPr>
+                            <m:t>−5</m:t>
+                          </m:r>
+                        </m:sup>
+                      </m:sSup>
+                      <m:r>
+                        <a:rPr lang="da-DK" b="0" i="1" smtClean="0">
+                          <a:latin typeface="Cambria Math" panose="02040503050406030204" pitchFamily="18" charset="0"/>
+                        </a:rPr>
+                        <m:t>,</m:t>
+                      </m:r>
+                      <m:r>
+                        <a:rPr lang="da-DK" b="0" i="1" smtClean="0">
+                          <a:latin typeface="Cambria Math" panose="02040503050406030204" pitchFamily="18" charset="0"/>
+                        </a:rPr>
+                        <m:t>𝑁</m:t>
+                      </m:r>
+                      <m:r>
+                        <a:rPr lang="da-DK" b="0" i="1" smtClean="0">
+                          <a:latin typeface="Cambria Math" panose="02040503050406030204" pitchFamily="18" charset="0"/>
+                        </a:rPr>
+                        <m:t>=21</m:t>
+                      </m:r>
+                    </m:oMath>
+                  </m:oMathPara>
+                </a14:m>
+                <a:endParaRPr lang="en-US" dirty="0"/>
+              </a:p>
+            </p:txBody>
+          </p:sp>
+        </mc:Choice>
+        <mc:Fallback xmlns="">
+          <p:sp>
+            <p:nvSpPr>
+              <p:cNvPr id="7" name="Title 6">
+                <a:extLst>
+                  <a:ext uri="{FF2B5EF4-FFF2-40B4-BE49-F238E27FC236}">
+                    <a16:creationId xmlns:a16="http://schemas.microsoft.com/office/drawing/2014/main" id="{401325A6-31AA-EC4D-C081-5A4E53CC7349}"/>
+                  </a:ext>
+                </a:extLst>
+              </p:cNvPr>
+              <p:cNvSpPr>
+                <a:spLocks noGrp="1" noRot="1" noChangeAspect="1" noMove="1" noResize="1" noEditPoints="1" noAdjustHandles="1" noChangeArrowheads="1" noChangeShapeType="1" noTextEdit="1"/>
+              </p:cNvSpPr>
+              <p:nvPr>
+                <p:ph type="ctrTitle"/>
+              </p:nvPr>
+            </p:nvSpPr>
+            <p:spPr>
+              <a:blipFill>
+                <a:blip r:embed="rId2"/>
+                <a:stretch>
+                  <a:fillRect t="-7438"/>
+                </a:stretch>
+              </a:blipFill>
+            </p:spPr>
+            <p:txBody>
+              <a:bodyPr/>
+              <a:lstStyle/>
+              <a:p>
+                <a:r>
+                  <a:rPr lang="en-US">
+                    <a:noFill/>
+                  </a:rPr>
+                  <a:t> </a:t>
+                </a:r>
+              </a:p>
+            </p:txBody>
+          </p:sp>
+        </mc:Fallback>
+      </mc:AlternateContent>
+      <p:sp>
+        <p:nvSpPr>
+          <p:cNvPr id="8" name="Subtitle 7">
+            <a:extLst>
+              <a:ext uri="{FF2B5EF4-FFF2-40B4-BE49-F238E27FC236}">
+                <a16:creationId xmlns:a16="http://schemas.microsoft.com/office/drawing/2014/main" id="{395EDDC9-0583-6394-E60F-979B0C68E586}"/>
+              </a:ext>
+            </a:extLst>
+          </p:cNvPr>
+          <p:cNvSpPr>
+            <a:spLocks noGrp="1"/>
+          </p:cNvSpPr>
+          <p:nvPr>
+            <p:ph type="subTitle" idx="1"/>
+          </p:nvPr>
+        </p:nvSpPr>
+        <p:spPr/>
+        <p:txBody>
+          <a:bodyPr/>
+          <a:lstStyle/>
+          <a:p>
+            <a:endParaRPr lang="en-US"/>
+          </a:p>
+        </p:txBody>
+      </p:sp>
+    </p:spTree>
+    <p:extLst>
+      <p:ext uri="{BB962C8B-B14F-4D97-AF65-F5344CB8AC3E}">
+        <p14:creationId xmlns:p14="http://schemas.microsoft.com/office/powerpoint/2010/main" val="1964249379"/>
+      </p:ext>
+    </p:extLst>
+  </p:cSld>
+  <p:clrMapOvr>
+    <a:masterClrMapping/>
+  </p:clrMapOvr>
+</p:sld>
+</file>
+
+<file path=ppt/slides/slide14.xml><?xml version="1.0" encoding="utf-8"?>
 <p:sld xmlns:a="http://schemas.openxmlformats.org/drawingml/2006/main" xmlns:r="http://schemas.openxmlformats.org/officeDocument/2006/relationships" xmlns:p="http://schemas.openxmlformats.org/presentationml/2006/main">
   <p:cSld>
     <p:spTree>
@@ -3604,11 +4426,11 @@
           <a:p>
             <a:r>
               <a:rPr lang="en-US" dirty="0"/>
-              <a:t>E=-0.1 eV, eta=10</a:t>
+              <a:t>E=0 eV, eta=10</a:t>
             </a:r>
             <a:r>
               <a:rPr lang="en-US" baseline="30000" dirty="0"/>
-              <a:t>-3</a:t>
+              <a:t>-5</a:t>
             </a:r>
             <a:r>
               <a:rPr lang="en-US" dirty="0"/>
@@ -3824,713 +4646,6 @@
     <p:extLst>
       <p:ext uri="{BB962C8B-B14F-4D97-AF65-F5344CB8AC3E}">
         <p14:creationId xmlns:p14="http://schemas.microsoft.com/office/powerpoint/2010/main" val="1450797194"/>
-      </p:ext>
-    </p:extLst>
-  </p:cSld>
-  <p:clrMapOvr>
-    <a:masterClrMapping/>
-  </p:clrMapOvr>
-</p:sld>
-</file>
-
-<file path=ppt/slides/slide12.xml><?xml version="1.0" encoding="utf-8"?>
-<p:sld xmlns:a="http://schemas.openxmlformats.org/drawingml/2006/main" xmlns:r="http://schemas.openxmlformats.org/officeDocument/2006/relationships" xmlns:p="http://schemas.openxmlformats.org/presentationml/2006/main">
-  <p:cSld>
-    <p:spTree>
-      <p:nvGrpSpPr>
-        <p:cNvPr id="1" name=""/>
-        <p:cNvGrpSpPr/>
-        <p:nvPr/>
-      </p:nvGrpSpPr>
-      <p:grpSpPr>
-        <a:xfrm>
-          <a:off x="0" y="0"/>
-          <a:ext cx="0" cy="0"/>
-          <a:chOff x="0" y="0"/>
-          <a:chExt cx="0" cy="0"/>
-        </a:xfrm>
-      </p:grpSpPr>
-      <p:sp>
-        <p:nvSpPr>
-          <p:cNvPr id="7" name="Title 6">
-            <a:extLst>
-              <a:ext uri="{FF2B5EF4-FFF2-40B4-BE49-F238E27FC236}">
-                <a16:creationId xmlns:a16="http://schemas.microsoft.com/office/drawing/2014/main" id="{A6BBA5A5-1F8F-4ED9-1BF3-60D7BB6613E0}"/>
-              </a:ext>
-            </a:extLst>
-          </p:cNvPr>
-          <p:cNvSpPr>
-            <a:spLocks noGrp="1"/>
-          </p:cNvSpPr>
-          <p:nvPr>
-            <p:ph type="ctrTitle"/>
-          </p:nvPr>
-        </p:nvSpPr>
-        <p:spPr/>
-        <p:txBody>
-          <a:bodyPr/>
-          <a:lstStyle/>
-          <a:p>
-            <a:r>
-              <a:rPr lang="en-US" dirty="0"/>
-              <a:t>Eta change (</a:t>
-            </a:r>
-            <a:r>
-              <a:rPr lang="en-US" dirty="0" err="1"/>
-              <a:t>romb</a:t>
-            </a:r>
-            <a:r>
-              <a:rPr lang="en-US" dirty="0"/>
-              <a:t>)</a:t>
-            </a:r>
-          </a:p>
-        </p:txBody>
-      </p:sp>
-      <p:sp>
-        <p:nvSpPr>
-          <p:cNvPr id="8" name="Subtitle 7">
-            <a:extLst>
-              <a:ext uri="{FF2B5EF4-FFF2-40B4-BE49-F238E27FC236}">
-                <a16:creationId xmlns:a16="http://schemas.microsoft.com/office/drawing/2014/main" id="{BA4400D1-6713-2C29-334E-AD2809E6C497}"/>
-              </a:ext>
-            </a:extLst>
-          </p:cNvPr>
-          <p:cNvSpPr>
-            <a:spLocks noGrp="1"/>
-          </p:cNvSpPr>
-          <p:nvPr>
-            <p:ph type="subTitle" idx="1"/>
-          </p:nvPr>
-        </p:nvSpPr>
-        <p:spPr/>
-        <p:txBody>
-          <a:bodyPr/>
-          <a:lstStyle/>
-          <a:p>
-            <a:endParaRPr lang="en-US"/>
-          </a:p>
-        </p:txBody>
-      </p:sp>
-    </p:spTree>
-    <p:extLst>
-      <p:ext uri="{BB962C8B-B14F-4D97-AF65-F5344CB8AC3E}">
-        <p14:creationId xmlns:p14="http://schemas.microsoft.com/office/powerpoint/2010/main" val="3039208375"/>
-      </p:ext>
-    </p:extLst>
-  </p:cSld>
-  <p:clrMapOvr>
-    <a:masterClrMapping/>
-  </p:clrMapOvr>
-</p:sld>
-</file>
-
-<file path=ppt/slides/slide13.xml><?xml version="1.0" encoding="utf-8"?>
-<p:sld xmlns:a="http://schemas.openxmlformats.org/drawingml/2006/main" xmlns:r="http://schemas.openxmlformats.org/officeDocument/2006/relationships" xmlns:p="http://schemas.openxmlformats.org/presentationml/2006/main">
-  <p:cSld>
-    <p:spTree>
-      <p:nvGrpSpPr>
-        <p:cNvPr id="1" name="">
-          <a:extLst>
-            <a:ext uri="{FF2B5EF4-FFF2-40B4-BE49-F238E27FC236}">
-              <a16:creationId xmlns:a16="http://schemas.microsoft.com/office/drawing/2014/main" id="{85C89914-9B64-2A85-D599-EDFC841B6FA9}"/>
-            </a:ext>
-          </a:extLst>
-        </p:cNvPr>
-        <p:cNvGrpSpPr/>
-        <p:nvPr/>
-      </p:nvGrpSpPr>
-      <p:grpSpPr>
-        <a:xfrm>
-          <a:off x="0" y="0"/>
-          <a:ext cx="0" cy="0"/>
-          <a:chOff x="0" y="0"/>
-          <a:chExt cx="0" cy="0"/>
-        </a:xfrm>
-      </p:grpSpPr>
-      <p:sp>
-        <p:nvSpPr>
-          <p:cNvPr id="2" name="Title 1">
-            <a:extLst>
-              <a:ext uri="{FF2B5EF4-FFF2-40B4-BE49-F238E27FC236}">
-                <a16:creationId xmlns:a16="http://schemas.microsoft.com/office/drawing/2014/main" id="{007C298F-927F-BAD9-399F-5685E1D162B7}"/>
-              </a:ext>
-            </a:extLst>
-          </p:cNvPr>
-          <p:cNvSpPr>
-            <a:spLocks noGrp="1"/>
-          </p:cNvSpPr>
-          <p:nvPr>
-            <p:ph type="title"/>
-          </p:nvPr>
-        </p:nvSpPr>
-        <p:spPr/>
-        <p:txBody>
-          <a:bodyPr/>
-          <a:lstStyle/>
-          <a:p>
-            <a:r>
-              <a:rPr lang="en-US" dirty="0"/>
-              <a:t>Energy offset (</a:t>
-            </a:r>
-            <a:r>
-              <a:rPr lang="en-US" dirty="0" err="1"/>
-              <a:t>romb</a:t>
-            </a:r>
-            <a:r>
-              <a:rPr lang="en-US" dirty="0"/>
-              <a:t>)</a:t>
-            </a:r>
-          </a:p>
-        </p:txBody>
-      </p:sp>
-      <p:sp>
-        <p:nvSpPr>
-          <p:cNvPr id="4" name="Text Placeholder 3">
-            <a:extLst>
-              <a:ext uri="{FF2B5EF4-FFF2-40B4-BE49-F238E27FC236}">
-                <a16:creationId xmlns:a16="http://schemas.microsoft.com/office/drawing/2014/main" id="{03FD5BEE-0840-949E-AC07-57BB6A0FE03C}"/>
-              </a:ext>
-            </a:extLst>
-          </p:cNvPr>
-          <p:cNvSpPr>
-            <a:spLocks noGrp="1"/>
-          </p:cNvSpPr>
-          <p:nvPr>
-            <p:ph type="body" idx="1"/>
-          </p:nvPr>
-        </p:nvSpPr>
-        <p:spPr/>
-        <p:txBody>
-          <a:bodyPr/>
-          <a:lstStyle/>
-          <a:p>
-            <a:r>
-              <a:rPr lang="en-US" dirty="0"/>
-              <a:t>E=0 eV, NN=4, N=17</a:t>
-            </a:r>
-          </a:p>
-        </p:txBody>
-      </p:sp>
-      <p:pic>
-        <p:nvPicPr>
-          <p:cNvPr id="8" name="Content Placeholder 7">
-            <a:extLst>
-              <a:ext uri="{FF2B5EF4-FFF2-40B4-BE49-F238E27FC236}">
-                <a16:creationId xmlns:a16="http://schemas.microsoft.com/office/drawing/2014/main" id="{1A665F5A-3988-D1FC-DBC9-7EBE3A2E5E75}"/>
-              </a:ext>
-            </a:extLst>
-          </p:cNvPr>
-          <p:cNvPicPr>
-            <a:picLocks noGrp="1" noChangeAspect="1"/>
-          </p:cNvPicPr>
-          <p:nvPr>
-            <p:ph sz="half" idx="2"/>
-          </p:nvPr>
-        </p:nvPicPr>
-        <p:blipFill>
-          <a:blip r:embed="rId2"/>
-          <a:srcRect/>
-          <a:stretch/>
-        </p:blipFill>
-        <p:spPr>
-          <a:xfrm>
-            <a:off x="0" y="2306166"/>
-            <a:ext cx="9146530" cy="3896671"/>
-          </a:xfrm>
-          <a:prstGeom prst="rect">
-            <a:avLst/>
-          </a:prstGeom>
-        </p:spPr>
-      </p:pic>
-      <p:sp>
-        <p:nvSpPr>
-          <p:cNvPr id="9" name="Text Placeholder 3">
-            <a:extLst>
-              <a:ext uri="{FF2B5EF4-FFF2-40B4-BE49-F238E27FC236}">
-                <a16:creationId xmlns:a16="http://schemas.microsoft.com/office/drawing/2014/main" id="{492FAB36-3A53-CF4D-C328-EB398B51DEAC}"/>
-              </a:ext>
-            </a:extLst>
-          </p:cNvPr>
-          <p:cNvSpPr txBox="1">
-            <a:spLocks/>
-          </p:cNvSpPr>
-          <p:nvPr/>
-        </p:nvSpPr>
-        <p:spPr>
-          <a:xfrm>
-            <a:off x="4497388" y="1535113"/>
-            <a:ext cx="4040188" cy="639762"/>
-          </a:xfrm>
-          <a:prstGeom prst="rect">
-            <a:avLst/>
-          </a:prstGeom>
-        </p:spPr>
-        <p:txBody>
-          <a:bodyPr vert="horz" lIns="91440" tIns="45720" rIns="91440" bIns="45720" rtlCol="0" anchor="b">
-            <a:normAutofit/>
-          </a:bodyPr>
-          <a:lstStyle>
-            <a:lvl1pPr marL="0" indent="0" algn="l" defTabSz="457200" rtl="0" eaLnBrk="1" latinLnBrk="0" hangingPunct="1">
-              <a:spcBef>
-                <a:spcPct val="20000"/>
-              </a:spcBef>
-              <a:buFont typeface="Arial"/>
-              <a:buNone/>
-              <a:defRPr sz="2400" b="1" kern="1200">
-                <a:solidFill>
-                  <a:schemeClr val="tx1"/>
-                </a:solidFill>
-                <a:latin typeface="+mn-lt"/>
-                <a:ea typeface="+mn-ea"/>
-                <a:cs typeface="+mn-cs"/>
-              </a:defRPr>
-            </a:lvl1pPr>
-            <a:lvl2pPr marL="457200" indent="0" algn="l" defTabSz="457200" rtl="0" eaLnBrk="1" latinLnBrk="0" hangingPunct="1">
-              <a:spcBef>
-                <a:spcPct val="20000"/>
-              </a:spcBef>
-              <a:buFont typeface="Arial"/>
-              <a:buNone/>
-              <a:defRPr sz="2000" b="1" kern="1200">
-                <a:solidFill>
-                  <a:schemeClr val="tx1"/>
-                </a:solidFill>
-                <a:latin typeface="+mn-lt"/>
-                <a:ea typeface="+mn-ea"/>
-                <a:cs typeface="+mn-cs"/>
-              </a:defRPr>
-            </a:lvl2pPr>
-            <a:lvl3pPr marL="914400" indent="0" algn="l" defTabSz="457200" rtl="0" eaLnBrk="1" latinLnBrk="0" hangingPunct="1">
-              <a:spcBef>
-                <a:spcPct val="20000"/>
-              </a:spcBef>
-              <a:buFont typeface="Arial"/>
-              <a:buNone/>
-              <a:defRPr sz="1800" b="1" kern="1200">
-                <a:solidFill>
-                  <a:schemeClr val="tx1"/>
-                </a:solidFill>
-                <a:latin typeface="+mn-lt"/>
-                <a:ea typeface="+mn-ea"/>
-                <a:cs typeface="+mn-cs"/>
-              </a:defRPr>
-            </a:lvl3pPr>
-            <a:lvl4pPr marL="1371600" indent="0" algn="l" defTabSz="457200" rtl="0" eaLnBrk="1" latinLnBrk="0" hangingPunct="1">
-              <a:spcBef>
-                <a:spcPct val="20000"/>
-              </a:spcBef>
-              <a:buFont typeface="Arial"/>
-              <a:buNone/>
-              <a:defRPr sz="1600" b="1" kern="1200">
-                <a:solidFill>
-                  <a:schemeClr val="tx1"/>
-                </a:solidFill>
-                <a:latin typeface="+mn-lt"/>
-                <a:ea typeface="+mn-ea"/>
-                <a:cs typeface="+mn-cs"/>
-              </a:defRPr>
-            </a:lvl4pPr>
-            <a:lvl5pPr marL="1828800" indent="0" algn="l" defTabSz="457200" rtl="0" eaLnBrk="1" latinLnBrk="0" hangingPunct="1">
-              <a:spcBef>
-                <a:spcPct val="20000"/>
-              </a:spcBef>
-              <a:buFont typeface="Arial"/>
-              <a:buNone/>
-              <a:defRPr sz="1600" b="1" kern="1200">
-                <a:solidFill>
-                  <a:schemeClr val="tx1"/>
-                </a:solidFill>
-                <a:latin typeface="+mn-lt"/>
-                <a:ea typeface="+mn-ea"/>
-                <a:cs typeface="+mn-cs"/>
-              </a:defRPr>
-            </a:lvl5pPr>
-            <a:lvl6pPr marL="2286000" indent="0" algn="l" defTabSz="457200" rtl="0" eaLnBrk="1" latinLnBrk="0" hangingPunct="1">
-              <a:spcBef>
-                <a:spcPct val="20000"/>
-              </a:spcBef>
-              <a:buFont typeface="Arial"/>
-              <a:buNone/>
-              <a:defRPr sz="1600" b="1" kern="1200">
-                <a:solidFill>
-                  <a:schemeClr val="tx1"/>
-                </a:solidFill>
-                <a:latin typeface="+mn-lt"/>
-                <a:ea typeface="+mn-ea"/>
-                <a:cs typeface="+mn-cs"/>
-              </a:defRPr>
-            </a:lvl6pPr>
-            <a:lvl7pPr marL="2743200" indent="0" algn="l" defTabSz="457200" rtl="0" eaLnBrk="1" latinLnBrk="0" hangingPunct="1">
-              <a:spcBef>
-                <a:spcPct val="20000"/>
-              </a:spcBef>
-              <a:buFont typeface="Arial"/>
-              <a:buNone/>
-              <a:defRPr sz="1600" b="1" kern="1200">
-                <a:solidFill>
-                  <a:schemeClr val="tx1"/>
-                </a:solidFill>
-                <a:latin typeface="+mn-lt"/>
-                <a:ea typeface="+mn-ea"/>
-                <a:cs typeface="+mn-cs"/>
-              </a:defRPr>
-            </a:lvl7pPr>
-            <a:lvl8pPr marL="3200400" indent="0" algn="l" defTabSz="457200" rtl="0" eaLnBrk="1" latinLnBrk="0" hangingPunct="1">
-              <a:spcBef>
-                <a:spcPct val="20000"/>
-              </a:spcBef>
-              <a:buFont typeface="Arial"/>
-              <a:buNone/>
-              <a:defRPr sz="1600" b="1" kern="1200">
-                <a:solidFill>
-                  <a:schemeClr val="tx1"/>
-                </a:solidFill>
-                <a:latin typeface="+mn-lt"/>
-                <a:ea typeface="+mn-ea"/>
-                <a:cs typeface="+mn-cs"/>
-              </a:defRPr>
-            </a:lvl8pPr>
-            <a:lvl9pPr marL="3657600" indent="0" algn="l" defTabSz="457200" rtl="0" eaLnBrk="1" latinLnBrk="0" hangingPunct="1">
-              <a:spcBef>
-                <a:spcPct val="20000"/>
-              </a:spcBef>
-              <a:buFont typeface="Arial"/>
-              <a:buNone/>
-              <a:defRPr sz="1600" b="1" kern="1200">
-                <a:solidFill>
-                  <a:schemeClr val="tx1"/>
-                </a:solidFill>
-                <a:latin typeface="+mn-lt"/>
-                <a:ea typeface="+mn-ea"/>
-                <a:cs typeface="+mn-cs"/>
-              </a:defRPr>
-            </a:lvl9pPr>
-          </a:lstStyle>
-          <a:p>
-            <a:r>
-              <a:rPr lang="en-US" dirty="0"/>
-              <a:t>, eta=10</a:t>
-            </a:r>
-            <a:r>
-              <a:rPr lang="en-US" baseline="30000" dirty="0"/>
-              <a:t>-1</a:t>
-            </a:r>
-            <a:endParaRPr lang="en-US" dirty="0"/>
-          </a:p>
-        </p:txBody>
-      </p:sp>
-    </p:spTree>
-    <p:extLst>
-      <p:ext uri="{BB962C8B-B14F-4D97-AF65-F5344CB8AC3E}">
-        <p14:creationId xmlns:p14="http://schemas.microsoft.com/office/powerpoint/2010/main" val="2390558511"/>
-      </p:ext>
-    </p:extLst>
-  </p:cSld>
-  <p:clrMapOvr>
-    <a:masterClrMapping/>
-  </p:clrMapOvr>
-</p:sld>
-</file>
-
-<file path=ppt/slides/slide14.xml><?xml version="1.0" encoding="utf-8"?>
-<p:sld xmlns:a="http://schemas.openxmlformats.org/drawingml/2006/main" xmlns:r="http://schemas.openxmlformats.org/officeDocument/2006/relationships" xmlns:p="http://schemas.openxmlformats.org/presentationml/2006/main">
-  <p:cSld>
-    <p:spTree>
-      <p:nvGrpSpPr>
-        <p:cNvPr id="1" name="">
-          <a:extLst>
-            <a:ext uri="{FF2B5EF4-FFF2-40B4-BE49-F238E27FC236}">
-              <a16:creationId xmlns:a16="http://schemas.microsoft.com/office/drawing/2014/main" id="{9D01E167-F3FC-B578-2040-24EFC3BDCEA1}"/>
-            </a:ext>
-          </a:extLst>
-        </p:cNvPr>
-        <p:cNvGrpSpPr/>
-        <p:nvPr/>
-      </p:nvGrpSpPr>
-      <p:grpSpPr>
-        <a:xfrm>
-          <a:off x="0" y="0"/>
-          <a:ext cx="0" cy="0"/>
-          <a:chOff x="0" y="0"/>
-          <a:chExt cx="0" cy="0"/>
-        </a:xfrm>
-      </p:grpSpPr>
-      <p:sp>
-        <p:nvSpPr>
-          <p:cNvPr id="2" name="Title 1">
-            <a:extLst>
-              <a:ext uri="{FF2B5EF4-FFF2-40B4-BE49-F238E27FC236}">
-                <a16:creationId xmlns:a16="http://schemas.microsoft.com/office/drawing/2014/main" id="{03474B4A-9C22-8F99-DEF5-975F0677092F}"/>
-              </a:ext>
-            </a:extLst>
-          </p:cNvPr>
-          <p:cNvSpPr>
-            <a:spLocks noGrp="1"/>
-          </p:cNvSpPr>
-          <p:nvPr>
-            <p:ph type="title"/>
-          </p:nvPr>
-        </p:nvSpPr>
-        <p:spPr/>
-        <p:txBody>
-          <a:bodyPr/>
-          <a:lstStyle/>
-          <a:p>
-            <a:r>
-              <a:rPr lang="en-US" dirty="0"/>
-              <a:t>Energy offset (</a:t>
-            </a:r>
-            <a:r>
-              <a:rPr lang="en-US" dirty="0" err="1"/>
-              <a:t>romb</a:t>
-            </a:r>
-            <a:r>
-              <a:rPr lang="en-US" dirty="0"/>
-              <a:t>)</a:t>
-            </a:r>
-          </a:p>
-        </p:txBody>
-      </p:sp>
-      <p:sp>
-        <p:nvSpPr>
-          <p:cNvPr id="4" name="Text Placeholder 3">
-            <a:extLst>
-              <a:ext uri="{FF2B5EF4-FFF2-40B4-BE49-F238E27FC236}">
-                <a16:creationId xmlns:a16="http://schemas.microsoft.com/office/drawing/2014/main" id="{505FEBBD-86E8-F5A6-6B43-606F7D65364C}"/>
-              </a:ext>
-            </a:extLst>
-          </p:cNvPr>
-          <p:cNvSpPr>
-            <a:spLocks noGrp="1"/>
-          </p:cNvSpPr>
-          <p:nvPr>
-            <p:ph type="body" idx="1"/>
-          </p:nvPr>
-        </p:nvSpPr>
-        <p:spPr/>
-        <p:txBody>
-          <a:bodyPr/>
-          <a:lstStyle/>
-          <a:p>
-            <a:r>
-              <a:rPr lang="en-US" dirty="0"/>
-              <a:t>E=0 eV, NN=4, N=17</a:t>
-            </a:r>
-          </a:p>
-        </p:txBody>
-      </p:sp>
-      <p:pic>
-        <p:nvPicPr>
-          <p:cNvPr id="8" name="Content Placeholder 7">
-            <a:extLst>
-              <a:ext uri="{FF2B5EF4-FFF2-40B4-BE49-F238E27FC236}">
-                <a16:creationId xmlns:a16="http://schemas.microsoft.com/office/drawing/2014/main" id="{7AD8B44A-646C-BA76-0176-6F7A71AD1458}"/>
-              </a:ext>
-            </a:extLst>
-          </p:cNvPr>
-          <p:cNvPicPr>
-            <a:picLocks noGrp="1" noChangeAspect="1"/>
-          </p:cNvPicPr>
-          <p:nvPr>
-            <p:ph sz="half" idx="2"/>
-          </p:nvPr>
-        </p:nvPicPr>
-        <p:blipFill>
-          <a:blip r:embed="rId2"/>
-          <a:srcRect/>
-          <a:stretch/>
-        </p:blipFill>
-        <p:spPr>
-          <a:xfrm>
-            <a:off x="0" y="2306166"/>
-            <a:ext cx="9146530" cy="3896671"/>
-          </a:xfrm>
-          <a:prstGeom prst="rect">
-            <a:avLst/>
-          </a:prstGeom>
-        </p:spPr>
-      </p:pic>
-      <p:sp>
-        <p:nvSpPr>
-          <p:cNvPr id="9" name="Text Placeholder 3">
-            <a:extLst>
-              <a:ext uri="{FF2B5EF4-FFF2-40B4-BE49-F238E27FC236}">
-                <a16:creationId xmlns:a16="http://schemas.microsoft.com/office/drawing/2014/main" id="{3F3A7A9F-A278-6429-FEB8-45BA15784D7B}"/>
-              </a:ext>
-            </a:extLst>
-          </p:cNvPr>
-          <p:cNvSpPr txBox="1">
-            <a:spLocks/>
-          </p:cNvSpPr>
-          <p:nvPr/>
-        </p:nvSpPr>
-        <p:spPr>
-          <a:xfrm>
-            <a:off x="4497388" y="1535113"/>
-            <a:ext cx="4040188" cy="639762"/>
-          </a:xfrm>
-          <a:prstGeom prst="rect">
-            <a:avLst/>
-          </a:prstGeom>
-        </p:spPr>
-        <p:txBody>
-          <a:bodyPr vert="horz" lIns="91440" tIns="45720" rIns="91440" bIns="45720" rtlCol="0" anchor="b">
-            <a:normAutofit/>
-          </a:bodyPr>
-          <a:lstStyle>
-            <a:lvl1pPr marL="0" indent="0" algn="l" defTabSz="457200" rtl="0" eaLnBrk="1" latinLnBrk="0" hangingPunct="1">
-              <a:spcBef>
-                <a:spcPct val="20000"/>
-              </a:spcBef>
-              <a:buFont typeface="Arial"/>
-              <a:buNone/>
-              <a:defRPr sz="2400" b="1" kern="1200">
-                <a:solidFill>
-                  <a:schemeClr val="tx1"/>
-                </a:solidFill>
-                <a:latin typeface="+mn-lt"/>
-                <a:ea typeface="+mn-ea"/>
-                <a:cs typeface="+mn-cs"/>
-              </a:defRPr>
-            </a:lvl1pPr>
-            <a:lvl2pPr marL="457200" indent="0" algn="l" defTabSz="457200" rtl="0" eaLnBrk="1" latinLnBrk="0" hangingPunct="1">
-              <a:spcBef>
-                <a:spcPct val="20000"/>
-              </a:spcBef>
-              <a:buFont typeface="Arial"/>
-              <a:buNone/>
-              <a:defRPr sz="2000" b="1" kern="1200">
-                <a:solidFill>
-                  <a:schemeClr val="tx1"/>
-                </a:solidFill>
-                <a:latin typeface="+mn-lt"/>
-                <a:ea typeface="+mn-ea"/>
-                <a:cs typeface="+mn-cs"/>
-              </a:defRPr>
-            </a:lvl2pPr>
-            <a:lvl3pPr marL="914400" indent="0" algn="l" defTabSz="457200" rtl="0" eaLnBrk="1" latinLnBrk="0" hangingPunct="1">
-              <a:spcBef>
-                <a:spcPct val="20000"/>
-              </a:spcBef>
-              <a:buFont typeface="Arial"/>
-              <a:buNone/>
-              <a:defRPr sz="1800" b="1" kern="1200">
-                <a:solidFill>
-                  <a:schemeClr val="tx1"/>
-                </a:solidFill>
-                <a:latin typeface="+mn-lt"/>
-                <a:ea typeface="+mn-ea"/>
-                <a:cs typeface="+mn-cs"/>
-              </a:defRPr>
-            </a:lvl3pPr>
-            <a:lvl4pPr marL="1371600" indent="0" algn="l" defTabSz="457200" rtl="0" eaLnBrk="1" latinLnBrk="0" hangingPunct="1">
-              <a:spcBef>
-                <a:spcPct val="20000"/>
-              </a:spcBef>
-              <a:buFont typeface="Arial"/>
-              <a:buNone/>
-              <a:defRPr sz="1600" b="1" kern="1200">
-                <a:solidFill>
-                  <a:schemeClr val="tx1"/>
-                </a:solidFill>
-                <a:latin typeface="+mn-lt"/>
-                <a:ea typeface="+mn-ea"/>
-                <a:cs typeface="+mn-cs"/>
-              </a:defRPr>
-            </a:lvl4pPr>
-            <a:lvl5pPr marL="1828800" indent="0" algn="l" defTabSz="457200" rtl="0" eaLnBrk="1" latinLnBrk="0" hangingPunct="1">
-              <a:spcBef>
-                <a:spcPct val="20000"/>
-              </a:spcBef>
-              <a:buFont typeface="Arial"/>
-              <a:buNone/>
-              <a:defRPr sz="1600" b="1" kern="1200">
-                <a:solidFill>
-                  <a:schemeClr val="tx1"/>
-                </a:solidFill>
-                <a:latin typeface="+mn-lt"/>
-                <a:ea typeface="+mn-ea"/>
-                <a:cs typeface="+mn-cs"/>
-              </a:defRPr>
-            </a:lvl5pPr>
-            <a:lvl6pPr marL="2286000" indent="0" algn="l" defTabSz="457200" rtl="0" eaLnBrk="1" latinLnBrk="0" hangingPunct="1">
-              <a:spcBef>
-                <a:spcPct val="20000"/>
-              </a:spcBef>
-              <a:buFont typeface="Arial"/>
-              <a:buNone/>
-              <a:defRPr sz="1600" b="1" kern="1200">
-                <a:solidFill>
-                  <a:schemeClr val="tx1"/>
-                </a:solidFill>
-                <a:latin typeface="+mn-lt"/>
-                <a:ea typeface="+mn-ea"/>
-                <a:cs typeface="+mn-cs"/>
-              </a:defRPr>
-            </a:lvl6pPr>
-            <a:lvl7pPr marL="2743200" indent="0" algn="l" defTabSz="457200" rtl="0" eaLnBrk="1" latinLnBrk="0" hangingPunct="1">
-              <a:spcBef>
-                <a:spcPct val="20000"/>
-              </a:spcBef>
-              <a:buFont typeface="Arial"/>
-              <a:buNone/>
-              <a:defRPr sz="1600" b="1" kern="1200">
-                <a:solidFill>
-                  <a:schemeClr val="tx1"/>
-                </a:solidFill>
-                <a:latin typeface="+mn-lt"/>
-                <a:ea typeface="+mn-ea"/>
-                <a:cs typeface="+mn-cs"/>
-              </a:defRPr>
-            </a:lvl7pPr>
-            <a:lvl8pPr marL="3200400" indent="0" algn="l" defTabSz="457200" rtl="0" eaLnBrk="1" latinLnBrk="0" hangingPunct="1">
-              <a:spcBef>
-                <a:spcPct val="20000"/>
-              </a:spcBef>
-              <a:buFont typeface="Arial"/>
-              <a:buNone/>
-              <a:defRPr sz="1600" b="1" kern="1200">
-                <a:solidFill>
-                  <a:schemeClr val="tx1"/>
-                </a:solidFill>
-                <a:latin typeface="+mn-lt"/>
-                <a:ea typeface="+mn-ea"/>
-                <a:cs typeface="+mn-cs"/>
-              </a:defRPr>
-            </a:lvl8pPr>
-            <a:lvl9pPr marL="3657600" indent="0" algn="l" defTabSz="457200" rtl="0" eaLnBrk="1" latinLnBrk="0" hangingPunct="1">
-              <a:spcBef>
-                <a:spcPct val="20000"/>
-              </a:spcBef>
-              <a:buFont typeface="Arial"/>
-              <a:buNone/>
-              <a:defRPr sz="1600" b="1" kern="1200">
-                <a:solidFill>
-                  <a:schemeClr val="tx1"/>
-                </a:solidFill>
-                <a:latin typeface="+mn-lt"/>
-                <a:ea typeface="+mn-ea"/>
-                <a:cs typeface="+mn-cs"/>
-              </a:defRPr>
-            </a:lvl9pPr>
-          </a:lstStyle>
-          <a:p>
-            <a:r>
-              <a:rPr lang="en-US" dirty="0"/>
-              <a:t>, eta=10</a:t>
-            </a:r>
-            <a:r>
-              <a:rPr lang="en-US" baseline="30000" dirty="0"/>
-              <a:t>-3</a:t>
-            </a:r>
-            <a:endParaRPr lang="en-US" dirty="0"/>
-          </a:p>
-        </p:txBody>
-      </p:sp>
-    </p:spTree>
-    <p:extLst>
-      <p:ext uri="{BB962C8B-B14F-4D97-AF65-F5344CB8AC3E}">
-        <p14:creationId xmlns:p14="http://schemas.microsoft.com/office/powerpoint/2010/main" val="2399730314"/>
       </p:ext>
     </p:extLst>
   </p:cSld>
@@ -4548,7 +4663,7 @@
         <p:cNvPr id="1" name="">
           <a:extLst>
             <a:ext uri="{FF2B5EF4-FFF2-40B4-BE49-F238E27FC236}">
-              <a16:creationId xmlns:a16="http://schemas.microsoft.com/office/drawing/2014/main" id="{A3CED2D3-CBC5-91E3-700A-598810A65F7C}"/>
+              <a16:creationId xmlns:a16="http://schemas.microsoft.com/office/drawing/2014/main" id="{C37DC7BB-102D-3C36-6BDE-3B3399F3162D}"/>
             </a:ext>
           </a:extLst>
         </p:cNvPr>
@@ -4568,7 +4683,7 @@
           <p:cNvPr id="2" name="Title 1">
             <a:extLst>
               <a:ext uri="{FF2B5EF4-FFF2-40B4-BE49-F238E27FC236}">
-                <a16:creationId xmlns:a16="http://schemas.microsoft.com/office/drawing/2014/main" id="{6216A242-D235-196A-676A-34FEC50C7843}"/>
+                <a16:creationId xmlns:a16="http://schemas.microsoft.com/office/drawing/2014/main" id="{D26D9668-E1BD-B35C-BF77-8A8B1EB61D64}"/>
               </a:ext>
             </a:extLst>
           </p:cNvPr>
@@ -4604,7 +4719,7 @@
           <p:cNvPr id="4" name="Text Placeholder 3">
             <a:extLst>
               <a:ext uri="{FF2B5EF4-FFF2-40B4-BE49-F238E27FC236}">
-                <a16:creationId xmlns:a16="http://schemas.microsoft.com/office/drawing/2014/main" id="{CF8FE345-152D-225E-D073-2C82A444179E}"/>
+                <a16:creationId xmlns:a16="http://schemas.microsoft.com/office/drawing/2014/main" id="{98E3D7F0-F6A8-8EF8-18A6-25EF9EDA4F38}"/>
               </a:ext>
             </a:extLst>
           </p:cNvPr>
@@ -4622,7 +4737,15 @@
           <a:p>
             <a:r>
               <a:rPr lang="en-US" dirty="0"/>
-              <a:t>E=0 eV, NN=4, N=17</a:t>
+              <a:t>E=-0.1 eV, eta=10</a:t>
+            </a:r>
+            <a:r>
+              <a:rPr lang="en-US" baseline="30000" dirty="0"/>
+              <a:t>-5</a:t>
+            </a:r>
+            <a:r>
+              <a:rPr lang="en-US" dirty="0"/>
+              <a:t>, NN=4</a:t>
             </a:r>
           </a:p>
         </p:txBody>
@@ -4632,7 +4755,7 @@
           <p:cNvPr id="8" name="Content Placeholder 7">
             <a:extLst>
               <a:ext uri="{FF2B5EF4-FFF2-40B4-BE49-F238E27FC236}">
-                <a16:creationId xmlns:a16="http://schemas.microsoft.com/office/drawing/2014/main" id="{34AABC8B-C57A-FAF7-6FEE-9EF1F8722901}"/>
+                <a16:creationId xmlns:a16="http://schemas.microsoft.com/office/drawing/2014/main" id="{337F15C7-E3FC-614A-F349-5C27EECBCD58}"/>
               </a:ext>
             </a:extLst>
           </p:cNvPr>
@@ -4663,7 +4786,7 @@
           <p:cNvPr id="9" name="Text Placeholder 3">
             <a:extLst>
               <a:ext uri="{FF2B5EF4-FFF2-40B4-BE49-F238E27FC236}">
-                <a16:creationId xmlns:a16="http://schemas.microsoft.com/office/drawing/2014/main" id="{5DE76A9F-1AE0-DA6D-C356-A0738C7F6D67}"/>
+                <a16:creationId xmlns:a16="http://schemas.microsoft.com/office/drawing/2014/main" id="{5A25748D-A563-F57E-7E9D-E7A7B6AC1BC7}"/>
               </a:ext>
             </a:extLst>
           </p:cNvPr>
@@ -4825,20 +4948,15 @@
           <a:p>
             <a:r>
               <a:rPr lang="en-US" dirty="0"/>
-              <a:t>, eta=10</a:t>
-            </a:r>
-            <a:r>
-              <a:rPr lang="en-US" baseline="30000" dirty="0"/>
-              <a:t>-4</a:t>
-            </a:r>
-            <a:endParaRPr lang="en-US" dirty="0"/>
+              <a:t>N=21</a:t>
+            </a:r>
           </a:p>
         </p:txBody>
       </p:sp>
     </p:spTree>
     <p:extLst>
       <p:ext uri="{BB962C8B-B14F-4D97-AF65-F5344CB8AC3E}">
-        <p14:creationId xmlns:p14="http://schemas.microsoft.com/office/powerpoint/2010/main" val="3354941272"/>
+        <p14:creationId xmlns:p14="http://schemas.microsoft.com/office/powerpoint/2010/main" val="3509040017"/>
       </p:ext>
     </p:extLst>
   </p:cSld>
@@ -4856,7 +4974,7 @@
         <p:cNvPr id="1" name="">
           <a:extLst>
             <a:ext uri="{FF2B5EF4-FFF2-40B4-BE49-F238E27FC236}">
-              <a16:creationId xmlns:a16="http://schemas.microsoft.com/office/drawing/2014/main" id="{7B675C32-48C5-334C-E1B8-5564DFB7B283}"/>
+              <a16:creationId xmlns:a16="http://schemas.microsoft.com/office/drawing/2014/main" id="{F7AB8192-B0D8-F215-BA80-CC247370A472}"/>
             </a:ext>
           </a:extLst>
         </p:cNvPr>
@@ -4876,7 +4994,7 @@
           <p:cNvPr id="2" name="Title 1">
             <a:extLst>
               <a:ext uri="{FF2B5EF4-FFF2-40B4-BE49-F238E27FC236}">
-                <a16:creationId xmlns:a16="http://schemas.microsoft.com/office/drawing/2014/main" id="{DA5B665C-11C2-E486-B890-D50FF6B97F3D}"/>
+                <a16:creationId xmlns:a16="http://schemas.microsoft.com/office/drawing/2014/main" id="{B1D507E9-EC9B-36B9-EE5E-A5EE43B5B42F}"/>
               </a:ext>
             </a:extLst>
           </p:cNvPr>
@@ -4912,7 +5030,7 @@
           <p:cNvPr id="4" name="Text Placeholder 3">
             <a:extLst>
               <a:ext uri="{FF2B5EF4-FFF2-40B4-BE49-F238E27FC236}">
-                <a16:creationId xmlns:a16="http://schemas.microsoft.com/office/drawing/2014/main" id="{B6D28EAF-79CB-F27F-6D4A-E01DB1EF7915}"/>
+                <a16:creationId xmlns:a16="http://schemas.microsoft.com/office/drawing/2014/main" id="{4BC08E42-2611-BAAF-6734-9F7B7B517A11}"/>
               </a:ext>
             </a:extLst>
           </p:cNvPr>
@@ -4930,7 +5048,15 @@
           <a:p>
             <a:r>
               <a:rPr lang="en-US" dirty="0"/>
-              <a:t>E=0 eV, NN=4, N=17</a:t>
+              <a:t>E=-0.2 eV, eta=10</a:t>
+            </a:r>
+            <a:r>
+              <a:rPr lang="en-US" baseline="30000" dirty="0"/>
+              <a:t>-5</a:t>
+            </a:r>
+            <a:r>
+              <a:rPr lang="en-US" dirty="0"/>
+              <a:t>, NN=4</a:t>
             </a:r>
           </a:p>
         </p:txBody>
@@ -4940,7 +5066,7 @@
           <p:cNvPr id="8" name="Content Placeholder 7">
             <a:extLst>
               <a:ext uri="{FF2B5EF4-FFF2-40B4-BE49-F238E27FC236}">
-                <a16:creationId xmlns:a16="http://schemas.microsoft.com/office/drawing/2014/main" id="{FE70527B-2696-0816-C36D-819BF483AC80}"/>
+                <a16:creationId xmlns:a16="http://schemas.microsoft.com/office/drawing/2014/main" id="{63E0FD9C-50CB-DB40-DFE7-F85F8BF57998}"/>
               </a:ext>
             </a:extLst>
           </p:cNvPr>
@@ -4971,7 +5097,7 @@
           <p:cNvPr id="9" name="Text Placeholder 3">
             <a:extLst>
               <a:ext uri="{FF2B5EF4-FFF2-40B4-BE49-F238E27FC236}">
-                <a16:creationId xmlns:a16="http://schemas.microsoft.com/office/drawing/2014/main" id="{4BAB0CB9-695D-2509-A678-582F4AAEE41D}"/>
+                <a16:creationId xmlns:a16="http://schemas.microsoft.com/office/drawing/2014/main" id="{ADBC34AB-0A8B-F37E-0372-D3A50F85D3CB}"/>
               </a:ext>
             </a:extLst>
           </p:cNvPr>
@@ -5133,20 +5259,15 @@
           <a:p>
             <a:r>
               <a:rPr lang="en-US" dirty="0"/>
-              <a:t>, eta=10</a:t>
-            </a:r>
-            <a:r>
-              <a:rPr lang="en-US" baseline="30000" dirty="0"/>
-              <a:t>-5</a:t>
-            </a:r>
-            <a:endParaRPr lang="en-US" dirty="0"/>
+              <a:t>N=21</a:t>
+            </a:r>
           </a:p>
         </p:txBody>
       </p:sp>
     </p:spTree>
     <p:extLst>
       <p:ext uri="{BB962C8B-B14F-4D97-AF65-F5344CB8AC3E}">
-        <p14:creationId xmlns:p14="http://schemas.microsoft.com/office/powerpoint/2010/main" val="4179202776"/>
+        <p14:creationId xmlns:p14="http://schemas.microsoft.com/office/powerpoint/2010/main" val="1759428073"/>
       </p:ext>
     </p:extLst>
   </p:cSld>
@@ -5157,6 +5278,983 @@
 </file>
 
 <file path=ppt/slides/slide17.xml><?xml version="1.0" encoding="utf-8"?>
+<p:sld xmlns:a="http://schemas.openxmlformats.org/drawingml/2006/main" xmlns:r="http://schemas.openxmlformats.org/officeDocument/2006/relationships" xmlns:p="http://schemas.openxmlformats.org/presentationml/2006/main">
+  <p:cSld>
+    <p:spTree>
+      <p:nvGrpSpPr>
+        <p:cNvPr id="1" name="">
+          <a:extLst>
+            <a:ext uri="{FF2B5EF4-FFF2-40B4-BE49-F238E27FC236}">
+              <a16:creationId xmlns:a16="http://schemas.microsoft.com/office/drawing/2014/main" id="{5B4234CB-74B3-8ED8-CCAB-46A2387D7313}"/>
+            </a:ext>
+          </a:extLst>
+        </p:cNvPr>
+        <p:cNvGrpSpPr/>
+        <p:nvPr/>
+      </p:nvGrpSpPr>
+      <p:grpSpPr>
+        <a:xfrm>
+          <a:off x="0" y="0"/>
+          <a:ext cx="0" cy="0"/>
+          <a:chOff x="0" y="0"/>
+          <a:chExt cx="0" cy="0"/>
+        </a:xfrm>
+      </p:grpSpPr>
+      <p:sp>
+        <p:nvSpPr>
+          <p:cNvPr id="2" name="Title 1">
+            <a:extLst>
+              <a:ext uri="{FF2B5EF4-FFF2-40B4-BE49-F238E27FC236}">
+                <a16:creationId xmlns:a16="http://schemas.microsoft.com/office/drawing/2014/main" id="{DF136EB6-938E-FC18-EE13-B330A77175ED}"/>
+              </a:ext>
+            </a:extLst>
+          </p:cNvPr>
+          <p:cNvSpPr>
+            <a:spLocks noGrp="1"/>
+          </p:cNvSpPr>
+          <p:nvPr>
+            <p:ph type="title"/>
+          </p:nvPr>
+        </p:nvSpPr>
+        <p:spPr/>
+        <p:txBody>
+          <a:bodyPr/>
+          <a:lstStyle/>
+          <a:p>
+            <a:r>
+              <a:rPr lang="en-US" dirty="0"/>
+              <a:t>Energy offset (</a:t>
+            </a:r>
+            <a:r>
+              <a:rPr lang="en-US" dirty="0" err="1"/>
+              <a:t>romb</a:t>
+            </a:r>
+            <a:r>
+              <a:rPr lang="en-US" dirty="0"/>
+              <a:t>)</a:t>
+            </a:r>
+          </a:p>
+        </p:txBody>
+      </p:sp>
+      <p:sp>
+        <p:nvSpPr>
+          <p:cNvPr id="4" name="Text Placeholder 3">
+            <a:extLst>
+              <a:ext uri="{FF2B5EF4-FFF2-40B4-BE49-F238E27FC236}">
+                <a16:creationId xmlns:a16="http://schemas.microsoft.com/office/drawing/2014/main" id="{B0ABF242-0C66-98B4-07D8-030DD406C1F0}"/>
+              </a:ext>
+            </a:extLst>
+          </p:cNvPr>
+          <p:cNvSpPr>
+            <a:spLocks noGrp="1"/>
+          </p:cNvSpPr>
+          <p:nvPr>
+            <p:ph type="body" idx="1"/>
+          </p:nvPr>
+        </p:nvSpPr>
+        <p:spPr/>
+        <p:txBody>
+          <a:bodyPr/>
+          <a:lstStyle/>
+          <a:p>
+            <a:r>
+              <a:rPr lang="en-US" dirty="0"/>
+              <a:t>E=-0.3 eV, eta=10</a:t>
+            </a:r>
+            <a:r>
+              <a:rPr lang="en-US" baseline="30000" dirty="0"/>
+              <a:t>-5</a:t>
+            </a:r>
+            <a:r>
+              <a:rPr lang="en-US" dirty="0"/>
+              <a:t>, NN=4</a:t>
+            </a:r>
+          </a:p>
+        </p:txBody>
+      </p:sp>
+      <p:pic>
+        <p:nvPicPr>
+          <p:cNvPr id="8" name="Content Placeholder 7">
+            <a:extLst>
+              <a:ext uri="{FF2B5EF4-FFF2-40B4-BE49-F238E27FC236}">
+                <a16:creationId xmlns:a16="http://schemas.microsoft.com/office/drawing/2014/main" id="{D61B81EA-3EE2-AA57-5F6E-E614A0A5178B}"/>
+              </a:ext>
+            </a:extLst>
+          </p:cNvPr>
+          <p:cNvPicPr>
+            <a:picLocks noGrp="1" noChangeAspect="1"/>
+          </p:cNvPicPr>
+          <p:nvPr>
+            <p:ph sz="half" idx="2"/>
+          </p:nvPr>
+        </p:nvPicPr>
+        <p:blipFill>
+          <a:blip r:embed="rId2"/>
+          <a:srcRect/>
+          <a:stretch/>
+        </p:blipFill>
+        <p:spPr>
+          <a:xfrm>
+            <a:off x="0" y="2306166"/>
+            <a:ext cx="9146530" cy="3896671"/>
+          </a:xfrm>
+          <a:prstGeom prst="rect">
+            <a:avLst/>
+          </a:prstGeom>
+        </p:spPr>
+      </p:pic>
+      <p:sp>
+        <p:nvSpPr>
+          <p:cNvPr id="9" name="Text Placeholder 3">
+            <a:extLst>
+              <a:ext uri="{FF2B5EF4-FFF2-40B4-BE49-F238E27FC236}">
+                <a16:creationId xmlns:a16="http://schemas.microsoft.com/office/drawing/2014/main" id="{EEF4D610-70D8-6BAE-BB5F-62FCF7A94401}"/>
+              </a:ext>
+            </a:extLst>
+          </p:cNvPr>
+          <p:cNvSpPr txBox="1">
+            <a:spLocks/>
+          </p:cNvSpPr>
+          <p:nvPr/>
+        </p:nvSpPr>
+        <p:spPr>
+          <a:xfrm>
+            <a:off x="4497388" y="1535113"/>
+            <a:ext cx="4040188" cy="639762"/>
+          </a:xfrm>
+          <a:prstGeom prst="rect">
+            <a:avLst/>
+          </a:prstGeom>
+        </p:spPr>
+        <p:txBody>
+          <a:bodyPr vert="horz" lIns="91440" tIns="45720" rIns="91440" bIns="45720" rtlCol="0" anchor="b">
+            <a:normAutofit/>
+          </a:bodyPr>
+          <a:lstStyle>
+            <a:lvl1pPr marL="0" indent="0" algn="l" defTabSz="457200" rtl="0" eaLnBrk="1" latinLnBrk="0" hangingPunct="1">
+              <a:spcBef>
+                <a:spcPct val="20000"/>
+              </a:spcBef>
+              <a:buFont typeface="Arial"/>
+              <a:buNone/>
+              <a:defRPr sz="2400" b="1" kern="1200">
+                <a:solidFill>
+                  <a:schemeClr val="tx1"/>
+                </a:solidFill>
+                <a:latin typeface="+mn-lt"/>
+                <a:ea typeface="+mn-ea"/>
+                <a:cs typeface="+mn-cs"/>
+              </a:defRPr>
+            </a:lvl1pPr>
+            <a:lvl2pPr marL="457200" indent="0" algn="l" defTabSz="457200" rtl="0" eaLnBrk="1" latinLnBrk="0" hangingPunct="1">
+              <a:spcBef>
+                <a:spcPct val="20000"/>
+              </a:spcBef>
+              <a:buFont typeface="Arial"/>
+              <a:buNone/>
+              <a:defRPr sz="2000" b="1" kern="1200">
+                <a:solidFill>
+                  <a:schemeClr val="tx1"/>
+                </a:solidFill>
+                <a:latin typeface="+mn-lt"/>
+                <a:ea typeface="+mn-ea"/>
+                <a:cs typeface="+mn-cs"/>
+              </a:defRPr>
+            </a:lvl2pPr>
+            <a:lvl3pPr marL="914400" indent="0" algn="l" defTabSz="457200" rtl="0" eaLnBrk="1" latinLnBrk="0" hangingPunct="1">
+              <a:spcBef>
+                <a:spcPct val="20000"/>
+              </a:spcBef>
+              <a:buFont typeface="Arial"/>
+              <a:buNone/>
+              <a:defRPr sz="1800" b="1" kern="1200">
+                <a:solidFill>
+                  <a:schemeClr val="tx1"/>
+                </a:solidFill>
+                <a:latin typeface="+mn-lt"/>
+                <a:ea typeface="+mn-ea"/>
+                <a:cs typeface="+mn-cs"/>
+              </a:defRPr>
+            </a:lvl3pPr>
+            <a:lvl4pPr marL="1371600" indent="0" algn="l" defTabSz="457200" rtl="0" eaLnBrk="1" latinLnBrk="0" hangingPunct="1">
+              <a:spcBef>
+                <a:spcPct val="20000"/>
+              </a:spcBef>
+              <a:buFont typeface="Arial"/>
+              <a:buNone/>
+              <a:defRPr sz="1600" b="1" kern="1200">
+                <a:solidFill>
+                  <a:schemeClr val="tx1"/>
+                </a:solidFill>
+                <a:latin typeface="+mn-lt"/>
+                <a:ea typeface="+mn-ea"/>
+                <a:cs typeface="+mn-cs"/>
+              </a:defRPr>
+            </a:lvl4pPr>
+            <a:lvl5pPr marL="1828800" indent="0" algn="l" defTabSz="457200" rtl="0" eaLnBrk="1" latinLnBrk="0" hangingPunct="1">
+              <a:spcBef>
+                <a:spcPct val="20000"/>
+              </a:spcBef>
+              <a:buFont typeface="Arial"/>
+              <a:buNone/>
+              <a:defRPr sz="1600" b="1" kern="1200">
+                <a:solidFill>
+                  <a:schemeClr val="tx1"/>
+                </a:solidFill>
+                <a:latin typeface="+mn-lt"/>
+                <a:ea typeface="+mn-ea"/>
+                <a:cs typeface="+mn-cs"/>
+              </a:defRPr>
+            </a:lvl5pPr>
+            <a:lvl6pPr marL="2286000" indent="0" algn="l" defTabSz="457200" rtl="0" eaLnBrk="1" latinLnBrk="0" hangingPunct="1">
+              <a:spcBef>
+                <a:spcPct val="20000"/>
+              </a:spcBef>
+              <a:buFont typeface="Arial"/>
+              <a:buNone/>
+              <a:defRPr sz="1600" b="1" kern="1200">
+                <a:solidFill>
+                  <a:schemeClr val="tx1"/>
+                </a:solidFill>
+                <a:latin typeface="+mn-lt"/>
+                <a:ea typeface="+mn-ea"/>
+                <a:cs typeface="+mn-cs"/>
+              </a:defRPr>
+            </a:lvl6pPr>
+            <a:lvl7pPr marL="2743200" indent="0" algn="l" defTabSz="457200" rtl="0" eaLnBrk="1" latinLnBrk="0" hangingPunct="1">
+              <a:spcBef>
+                <a:spcPct val="20000"/>
+              </a:spcBef>
+              <a:buFont typeface="Arial"/>
+              <a:buNone/>
+              <a:defRPr sz="1600" b="1" kern="1200">
+                <a:solidFill>
+                  <a:schemeClr val="tx1"/>
+                </a:solidFill>
+                <a:latin typeface="+mn-lt"/>
+                <a:ea typeface="+mn-ea"/>
+                <a:cs typeface="+mn-cs"/>
+              </a:defRPr>
+            </a:lvl7pPr>
+            <a:lvl8pPr marL="3200400" indent="0" algn="l" defTabSz="457200" rtl="0" eaLnBrk="1" latinLnBrk="0" hangingPunct="1">
+              <a:spcBef>
+                <a:spcPct val="20000"/>
+              </a:spcBef>
+              <a:buFont typeface="Arial"/>
+              <a:buNone/>
+              <a:defRPr sz="1600" b="1" kern="1200">
+                <a:solidFill>
+                  <a:schemeClr val="tx1"/>
+                </a:solidFill>
+                <a:latin typeface="+mn-lt"/>
+                <a:ea typeface="+mn-ea"/>
+                <a:cs typeface="+mn-cs"/>
+              </a:defRPr>
+            </a:lvl8pPr>
+            <a:lvl9pPr marL="3657600" indent="0" algn="l" defTabSz="457200" rtl="0" eaLnBrk="1" latinLnBrk="0" hangingPunct="1">
+              <a:spcBef>
+                <a:spcPct val="20000"/>
+              </a:spcBef>
+              <a:buFont typeface="Arial"/>
+              <a:buNone/>
+              <a:defRPr sz="1600" b="1" kern="1200">
+                <a:solidFill>
+                  <a:schemeClr val="tx1"/>
+                </a:solidFill>
+                <a:latin typeface="+mn-lt"/>
+                <a:ea typeface="+mn-ea"/>
+                <a:cs typeface="+mn-cs"/>
+              </a:defRPr>
+            </a:lvl9pPr>
+          </a:lstStyle>
+          <a:p>
+            <a:r>
+              <a:rPr lang="en-US" dirty="0"/>
+              <a:t>N=21</a:t>
+            </a:r>
+          </a:p>
+        </p:txBody>
+      </p:sp>
+    </p:spTree>
+    <p:extLst>
+      <p:ext uri="{BB962C8B-B14F-4D97-AF65-F5344CB8AC3E}">
+        <p14:creationId xmlns:p14="http://schemas.microsoft.com/office/powerpoint/2010/main" val="2796271331"/>
+      </p:ext>
+    </p:extLst>
+  </p:cSld>
+  <p:clrMapOvr>
+    <a:masterClrMapping/>
+  </p:clrMapOvr>
+</p:sld>
+</file>
+
+<file path=ppt/slides/slide18.xml><?xml version="1.0" encoding="utf-8"?>
+<p:sld xmlns:a="http://schemas.openxmlformats.org/drawingml/2006/main" xmlns:r="http://schemas.openxmlformats.org/officeDocument/2006/relationships" xmlns:p="http://schemas.openxmlformats.org/presentationml/2006/main">
+  <p:cSld>
+    <p:spTree>
+      <p:nvGrpSpPr>
+        <p:cNvPr id="1" name="">
+          <a:extLst>
+            <a:ext uri="{FF2B5EF4-FFF2-40B4-BE49-F238E27FC236}">
+              <a16:creationId xmlns:a16="http://schemas.microsoft.com/office/drawing/2014/main" id="{6D8EFF0A-5E17-3374-30EA-3AA5235E5EA2}"/>
+            </a:ext>
+          </a:extLst>
+        </p:cNvPr>
+        <p:cNvGrpSpPr/>
+        <p:nvPr/>
+      </p:nvGrpSpPr>
+      <p:grpSpPr>
+        <a:xfrm>
+          <a:off x="0" y="0"/>
+          <a:ext cx="0" cy="0"/>
+          <a:chOff x="0" y="0"/>
+          <a:chExt cx="0" cy="0"/>
+        </a:xfrm>
+      </p:grpSpPr>
+      <p:sp>
+        <p:nvSpPr>
+          <p:cNvPr id="2" name="Title 1">
+            <a:extLst>
+              <a:ext uri="{FF2B5EF4-FFF2-40B4-BE49-F238E27FC236}">
+                <a16:creationId xmlns:a16="http://schemas.microsoft.com/office/drawing/2014/main" id="{D9D84576-D5DB-B968-0194-426AFA6E179F}"/>
+              </a:ext>
+            </a:extLst>
+          </p:cNvPr>
+          <p:cNvSpPr>
+            <a:spLocks noGrp="1"/>
+          </p:cNvSpPr>
+          <p:nvPr>
+            <p:ph type="title"/>
+          </p:nvPr>
+        </p:nvSpPr>
+        <p:spPr/>
+        <p:txBody>
+          <a:bodyPr/>
+          <a:lstStyle/>
+          <a:p>
+            <a:r>
+              <a:rPr lang="en-US" dirty="0"/>
+              <a:t>Energy offset (</a:t>
+            </a:r>
+            <a:r>
+              <a:rPr lang="en-US" dirty="0" err="1"/>
+              <a:t>romb</a:t>
+            </a:r>
+            <a:r>
+              <a:rPr lang="en-US" dirty="0"/>
+              <a:t>)</a:t>
+            </a:r>
+          </a:p>
+        </p:txBody>
+      </p:sp>
+      <p:sp>
+        <p:nvSpPr>
+          <p:cNvPr id="4" name="Text Placeholder 3">
+            <a:extLst>
+              <a:ext uri="{FF2B5EF4-FFF2-40B4-BE49-F238E27FC236}">
+                <a16:creationId xmlns:a16="http://schemas.microsoft.com/office/drawing/2014/main" id="{18744942-C1CB-0A2A-20D3-272959F4A175}"/>
+              </a:ext>
+            </a:extLst>
+          </p:cNvPr>
+          <p:cNvSpPr>
+            <a:spLocks noGrp="1"/>
+          </p:cNvSpPr>
+          <p:nvPr>
+            <p:ph type="body" idx="1"/>
+          </p:nvPr>
+        </p:nvSpPr>
+        <p:spPr/>
+        <p:txBody>
+          <a:bodyPr/>
+          <a:lstStyle/>
+          <a:p>
+            <a:r>
+              <a:rPr lang="en-US" dirty="0"/>
+              <a:t>E=-0.4 eV, eta=10</a:t>
+            </a:r>
+            <a:r>
+              <a:rPr lang="en-US" baseline="30000" dirty="0"/>
+              <a:t>-5</a:t>
+            </a:r>
+            <a:r>
+              <a:rPr lang="en-US" dirty="0"/>
+              <a:t>, NN=4</a:t>
+            </a:r>
+          </a:p>
+        </p:txBody>
+      </p:sp>
+      <p:pic>
+        <p:nvPicPr>
+          <p:cNvPr id="8" name="Content Placeholder 7">
+            <a:extLst>
+              <a:ext uri="{FF2B5EF4-FFF2-40B4-BE49-F238E27FC236}">
+                <a16:creationId xmlns:a16="http://schemas.microsoft.com/office/drawing/2014/main" id="{37C34F27-0254-9AD6-4283-9FEC47F3AA3F}"/>
+              </a:ext>
+            </a:extLst>
+          </p:cNvPr>
+          <p:cNvPicPr>
+            <a:picLocks noGrp="1" noChangeAspect="1"/>
+          </p:cNvPicPr>
+          <p:nvPr>
+            <p:ph sz="half" idx="2"/>
+          </p:nvPr>
+        </p:nvPicPr>
+        <p:blipFill>
+          <a:blip r:embed="rId2"/>
+          <a:srcRect/>
+          <a:stretch/>
+        </p:blipFill>
+        <p:spPr>
+          <a:xfrm>
+            <a:off x="0" y="2306166"/>
+            <a:ext cx="9146530" cy="3896671"/>
+          </a:xfrm>
+          <a:prstGeom prst="rect">
+            <a:avLst/>
+          </a:prstGeom>
+        </p:spPr>
+      </p:pic>
+      <p:sp>
+        <p:nvSpPr>
+          <p:cNvPr id="9" name="Text Placeholder 3">
+            <a:extLst>
+              <a:ext uri="{FF2B5EF4-FFF2-40B4-BE49-F238E27FC236}">
+                <a16:creationId xmlns:a16="http://schemas.microsoft.com/office/drawing/2014/main" id="{A52EEBF9-616B-CC79-7B10-F8EFFE3EEA26}"/>
+              </a:ext>
+            </a:extLst>
+          </p:cNvPr>
+          <p:cNvSpPr txBox="1">
+            <a:spLocks/>
+          </p:cNvSpPr>
+          <p:nvPr/>
+        </p:nvSpPr>
+        <p:spPr>
+          <a:xfrm>
+            <a:off x="4497388" y="1535113"/>
+            <a:ext cx="4040188" cy="639762"/>
+          </a:xfrm>
+          <a:prstGeom prst="rect">
+            <a:avLst/>
+          </a:prstGeom>
+        </p:spPr>
+        <p:txBody>
+          <a:bodyPr vert="horz" lIns="91440" tIns="45720" rIns="91440" bIns="45720" rtlCol="0" anchor="b">
+            <a:normAutofit/>
+          </a:bodyPr>
+          <a:lstStyle>
+            <a:lvl1pPr marL="0" indent="0" algn="l" defTabSz="457200" rtl="0" eaLnBrk="1" latinLnBrk="0" hangingPunct="1">
+              <a:spcBef>
+                <a:spcPct val="20000"/>
+              </a:spcBef>
+              <a:buFont typeface="Arial"/>
+              <a:buNone/>
+              <a:defRPr sz="2400" b="1" kern="1200">
+                <a:solidFill>
+                  <a:schemeClr val="tx1"/>
+                </a:solidFill>
+                <a:latin typeface="+mn-lt"/>
+                <a:ea typeface="+mn-ea"/>
+                <a:cs typeface="+mn-cs"/>
+              </a:defRPr>
+            </a:lvl1pPr>
+            <a:lvl2pPr marL="457200" indent="0" algn="l" defTabSz="457200" rtl="0" eaLnBrk="1" latinLnBrk="0" hangingPunct="1">
+              <a:spcBef>
+                <a:spcPct val="20000"/>
+              </a:spcBef>
+              <a:buFont typeface="Arial"/>
+              <a:buNone/>
+              <a:defRPr sz="2000" b="1" kern="1200">
+                <a:solidFill>
+                  <a:schemeClr val="tx1"/>
+                </a:solidFill>
+                <a:latin typeface="+mn-lt"/>
+                <a:ea typeface="+mn-ea"/>
+                <a:cs typeface="+mn-cs"/>
+              </a:defRPr>
+            </a:lvl2pPr>
+            <a:lvl3pPr marL="914400" indent="0" algn="l" defTabSz="457200" rtl="0" eaLnBrk="1" latinLnBrk="0" hangingPunct="1">
+              <a:spcBef>
+                <a:spcPct val="20000"/>
+              </a:spcBef>
+              <a:buFont typeface="Arial"/>
+              <a:buNone/>
+              <a:defRPr sz="1800" b="1" kern="1200">
+                <a:solidFill>
+                  <a:schemeClr val="tx1"/>
+                </a:solidFill>
+                <a:latin typeface="+mn-lt"/>
+                <a:ea typeface="+mn-ea"/>
+                <a:cs typeface="+mn-cs"/>
+              </a:defRPr>
+            </a:lvl3pPr>
+            <a:lvl4pPr marL="1371600" indent="0" algn="l" defTabSz="457200" rtl="0" eaLnBrk="1" latinLnBrk="0" hangingPunct="1">
+              <a:spcBef>
+                <a:spcPct val="20000"/>
+              </a:spcBef>
+              <a:buFont typeface="Arial"/>
+              <a:buNone/>
+              <a:defRPr sz="1600" b="1" kern="1200">
+                <a:solidFill>
+                  <a:schemeClr val="tx1"/>
+                </a:solidFill>
+                <a:latin typeface="+mn-lt"/>
+                <a:ea typeface="+mn-ea"/>
+                <a:cs typeface="+mn-cs"/>
+              </a:defRPr>
+            </a:lvl4pPr>
+            <a:lvl5pPr marL="1828800" indent="0" algn="l" defTabSz="457200" rtl="0" eaLnBrk="1" latinLnBrk="0" hangingPunct="1">
+              <a:spcBef>
+                <a:spcPct val="20000"/>
+              </a:spcBef>
+              <a:buFont typeface="Arial"/>
+              <a:buNone/>
+              <a:defRPr sz="1600" b="1" kern="1200">
+                <a:solidFill>
+                  <a:schemeClr val="tx1"/>
+                </a:solidFill>
+                <a:latin typeface="+mn-lt"/>
+                <a:ea typeface="+mn-ea"/>
+                <a:cs typeface="+mn-cs"/>
+              </a:defRPr>
+            </a:lvl5pPr>
+            <a:lvl6pPr marL="2286000" indent="0" algn="l" defTabSz="457200" rtl="0" eaLnBrk="1" latinLnBrk="0" hangingPunct="1">
+              <a:spcBef>
+                <a:spcPct val="20000"/>
+              </a:spcBef>
+              <a:buFont typeface="Arial"/>
+              <a:buNone/>
+              <a:defRPr sz="1600" b="1" kern="1200">
+                <a:solidFill>
+                  <a:schemeClr val="tx1"/>
+                </a:solidFill>
+                <a:latin typeface="+mn-lt"/>
+                <a:ea typeface="+mn-ea"/>
+                <a:cs typeface="+mn-cs"/>
+              </a:defRPr>
+            </a:lvl6pPr>
+            <a:lvl7pPr marL="2743200" indent="0" algn="l" defTabSz="457200" rtl="0" eaLnBrk="1" latinLnBrk="0" hangingPunct="1">
+              <a:spcBef>
+                <a:spcPct val="20000"/>
+              </a:spcBef>
+              <a:buFont typeface="Arial"/>
+              <a:buNone/>
+              <a:defRPr sz="1600" b="1" kern="1200">
+                <a:solidFill>
+                  <a:schemeClr val="tx1"/>
+                </a:solidFill>
+                <a:latin typeface="+mn-lt"/>
+                <a:ea typeface="+mn-ea"/>
+                <a:cs typeface="+mn-cs"/>
+              </a:defRPr>
+            </a:lvl7pPr>
+            <a:lvl8pPr marL="3200400" indent="0" algn="l" defTabSz="457200" rtl="0" eaLnBrk="1" latinLnBrk="0" hangingPunct="1">
+              <a:spcBef>
+                <a:spcPct val="20000"/>
+              </a:spcBef>
+              <a:buFont typeface="Arial"/>
+              <a:buNone/>
+              <a:defRPr sz="1600" b="1" kern="1200">
+                <a:solidFill>
+                  <a:schemeClr val="tx1"/>
+                </a:solidFill>
+                <a:latin typeface="+mn-lt"/>
+                <a:ea typeface="+mn-ea"/>
+                <a:cs typeface="+mn-cs"/>
+              </a:defRPr>
+            </a:lvl8pPr>
+            <a:lvl9pPr marL="3657600" indent="0" algn="l" defTabSz="457200" rtl="0" eaLnBrk="1" latinLnBrk="0" hangingPunct="1">
+              <a:spcBef>
+                <a:spcPct val="20000"/>
+              </a:spcBef>
+              <a:buFont typeface="Arial"/>
+              <a:buNone/>
+              <a:defRPr sz="1600" b="1" kern="1200">
+                <a:solidFill>
+                  <a:schemeClr val="tx1"/>
+                </a:solidFill>
+                <a:latin typeface="+mn-lt"/>
+                <a:ea typeface="+mn-ea"/>
+                <a:cs typeface="+mn-cs"/>
+              </a:defRPr>
+            </a:lvl9pPr>
+          </a:lstStyle>
+          <a:p>
+            <a:r>
+              <a:rPr lang="en-US" dirty="0"/>
+              <a:t>N=21</a:t>
+            </a:r>
+          </a:p>
+        </p:txBody>
+      </p:sp>
+    </p:spTree>
+    <p:extLst>
+      <p:ext uri="{BB962C8B-B14F-4D97-AF65-F5344CB8AC3E}">
+        <p14:creationId xmlns:p14="http://schemas.microsoft.com/office/powerpoint/2010/main" val="3598557022"/>
+      </p:ext>
+    </p:extLst>
+  </p:cSld>
+  <p:clrMapOvr>
+    <a:masterClrMapping/>
+  </p:clrMapOvr>
+</p:sld>
+</file>
+
+<file path=ppt/slides/slide19.xml><?xml version="1.0" encoding="utf-8"?>
+<p:sld xmlns:a="http://schemas.openxmlformats.org/drawingml/2006/main" xmlns:r="http://schemas.openxmlformats.org/officeDocument/2006/relationships" xmlns:p="http://schemas.openxmlformats.org/presentationml/2006/main">
+  <p:cSld>
+    <p:spTree>
+      <p:nvGrpSpPr>
+        <p:cNvPr id="1" name="">
+          <a:extLst>
+            <a:ext uri="{FF2B5EF4-FFF2-40B4-BE49-F238E27FC236}">
+              <a16:creationId xmlns:a16="http://schemas.microsoft.com/office/drawing/2014/main" id="{F7E1A86F-8E71-9794-047C-7B2847B417F7}"/>
+            </a:ext>
+          </a:extLst>
+        </p:cNvPr>
+        <p:cNvGrpSpPr/>
+        <p:nvPr/>
+      </p:nvGrpSpPr>
+      <p:grpSpPr>
+        <a:xfrm>
+          <a:off x="0" y="0"/>
+          <a:ext cx="0" cy="0"/>
+          <a:chOff x="0" y="0"/>
+          <a:chExt cx="0" cy="0"/>
+        </a:xfrm>
+      </p:grpSpPr>
+      <p:sp>
+        <p:nvSpPr>
+          <p:cNvPr id="2" name="Title 1">
+            <a:extLst>
+              <a:ext uri="{FF2B5EF4-FFF2-40B4-BE49-F238E27FC236}">
+                <a16:creationId xmlns:a16="http://schemas.microsoft.com/office/drawing/2014/main" id="{CFFCC085-69E8-4CC1-4BC7-D1FCD207C4B2}"/>
+              </a:ext>
+            </a:extLst>
+          </p:cNvPr>
+          <p:cNvSpPr>
+            <a:spLocks noGrp="1"/>
+          </p:cNvSpPr>
+          <p:nvPr>
+            <p:ph type="title"/>
+          </p:nvPr>
+        </p:nvSpPr>
+        <p:spPr/>
+        <p:txBody>
+          <a:bodyPr>
+            <a:normAutofit fontScale="90000"/>
+          </a:bodyPr>
+          <a:lstStyle/>
+          <a:p>
+            <a:r>
+              <a:rPr lang="en-US" dirty="0"/>
+              <a:t>Energy offset (</a:t>
+            </a:r>
+            <a:r>
+              <a:rPr lang="en-US" dirty="0" err="1"/>
+              <a:t>romb</a:t>
+            </a:r>
+            <a:r>
+              <a:rPr lang="en-US" dirty="0"/>
+              <a:t>)</a:t>
+            </a:r>
+            <a:br>
+              <a:rPr lang="en-US" dirty="0"/>
+            </a:br>
+            <a:r>
+              <a:rPr lang="en-US" dirty="0"/>
+              <a:t>Using higher eta</a:t>
+            </a:r>
+          </a:p>
+        </p:txBody>
+      </p:sp>
+      <p:sp>
+        <p:nvSpPr>
+          <p:cNvPr id="4" name="Text Placeholder 3">
+            <a:extLst>
+              <a:ext uri="{FF2B5EF4-FFF2-40B4-BE49-F238E27FC236}">
+                <a16:creationId xmlns:a16="http://schemas.microsoft.com/office/drawing/2014/main" id="{A3DA5CD0-5F99-1BFF-4643-A7CCA67286D9}"/>
+              </a:ext>
+            </a:extLst>
+          </p:cNvPr>
+          <p:cNvSpPr>
+            <a:spLocks noGrp="1"/>
+          </p:cNvSpPr>
+          <p:nvPr>
+            <p:ph type="body" idx="1"/>
+          </p:nvPr>
+        </p:nvSpPr>
+        <p:spPr/>
+        <p:txBody>
+          <a:bodyPr/>
+          <a:lstStyle/>
+          <a:p>
+            <a:r>
+              <a:rPr lang="en-US" dirty="0"/>
+              <a:t>E=-0.4 eV, eta=10</a:t>
+            </a:r>
+            <a:r>
+              <a:rPr lang="en-US" baseline="30000" dirty="0"/>
+              <a:t>-1</a:t>
+            </a:r>
+            <a:r>
+              <a:rPr lang="en-US" dirty="0"/>
+              <a:t>, NN=4</a:t>
+            </a:r>
+          </a:p>
+        </p:txBody>
+      </p:sp>
+      <p:pic>
+        <p:nvPicPr>
+          <p:cNvPr id="8" name="Content Placeholder 7">
+            <a:extLst>
+              <a:ext uri="{FF2B5EF4-FFF2-40B4-BE49-F238E27FC236}">
+                <a16:creationId xmlns:a16="http://schemas.microsoft.com/office/drawing/2014/main" id="{C241CEF6-3CB0-DDE2-C03B-DE69C77CCC69}"/>
+              </a:ext>
+            </a:extLst>
+          </p:cNvPr>
+          <p:cNvPicPr>
+            <a:picLocks noGrp="1" noChangeAspect="1"/>
+          </p:cNvPicPr>
+          <p:nvPr>
+            <p:ph sz="half" idx="2"/>
+          </p:nvPr>
+        </p:nvPicPr>
+        <p:blipFill>
+          <a:blip r:embed="rId2"/>
+          <a:srcRect/>
+          <a:stretch/>
+        </p:blipFill>
+        <p:spPr>
+          <a:xfrm>
+            <a:off x="0" y="2306166"/>
+            <a:ext cx="9146530" cy="3896671"/>
+          </a:xfrm>
+          <a:prstGeom prst="rect">
+            <a:avLst/>
+          </a:prstGeom>
+        </p:spPr>
+      </p:pic>
+      <p:sp>
+        <p:nvSpPr>
+          <p:cNvPr id="9" name="Text Placeholder 3">
+            <a:extLst>
+              <a:ext uri="{FF2B5EF4-FFF2-40B4-BE49-F238E27FC236}">
+                <a16:creationId xmlns:a16="http://schemas.microsoft.com/office/drawing/2014/main" id="{F6660491-38DC-1618-051D-854D6AD3A3C6}"/>
+              </a:ext>
+            </a:extLst>
+          </p:cNvPr>
+          <p:cNvSpPr txBox="1">
+            <a:spLocks/>
+          </p:cNvSpPr>
+          <p:nvPr/>
+        </p:nvSpPr>
+        <p:spPr>
+          <a:xfrm>
+            <a:off x="4497388" y="1535113"/>
+            <a:ext cx="4040188" cy="639762"/>
+          </a:xfrm>
+          <a:prstGeom prst="rect">
+            <a:avLst/>
+          </a:prstGeom>
+        </p:spPr>
+        <p:txBody>
+          <a:bodyPr vert="horz" lIns="91440" tIns="45720" rIns="91440" bIns="45720" rtlCol="0" anchor="b">
+            <a:normAutofit/>
+          </a:bodyPr>
+          <a:lstStyle>
+            <a:lvl1pPr marL="0" indent="0" algn="l" defTabSz="457200" rtl="0" eaLnBrk="1" latinLnBrk="0" hangingPunct="1">
+              <a:spcBef>
+                <a:spcPct val="20000"/>
+              </a:spcBef>
+              <a:buFont typeface="Arial"/>
+              <a:buNone/>
+              <a:defRPr sz="2400" b="1" kern="1200">
+                <a:solidFill>
+                  <a:schemeClr val="tx1"/>
+                </a:solidFill>
+                <a:latin typeface="+mn-lt"/>
+                <a:ea typeface="+mn-ea"/>
+                <a:cs typeface="+mn-cs"/>
+              </a:defRPr>
+            </a:lvl1pPr>
+            <a:lvl2pPr marL="457200" indent="0" algn="l" defTabSz="457200" rtl="0" eaLnBrk="1" latinLnBrk="0" hangingPunct="1">
+              <a:spcBef>
+                <a:spcPct val="20000"/>
+              </a:spcBef>
+              <a:buFont typeface="Arial"/>
+              <a:buNone/>
+              <a:defRPr sz="2000" b="1" kern="1200">
+                <a:solidFill>
+                  <a:schemeClr val="tx1"/>
+                </a:solidFill>
+                <a:latin typeface="+mn-lt"/>
+                <a:ea typeface="+mn-ea"/>
+                <a:cs typeface="+mn-cs"/>
+              </a:defRPr>
+            </a:lvl2pPr>
+            <a:lvl3pPr marL="914400" indent="0" algn="l" defTabSz="457200" rtl="0" eaLnBrk="1" latinLnBrk="0" hangingPunct="1">
+              <a:spcBef>
+                <a:spcPct val="20000"/>
+              </a:spcBef>
+              <a:buFont typeface="Arial"/>
+              <a:buNone/>
+              <a:defRPr sz="1800" b="1" kern="1200">
+                <a:solidFill>
+                  <a:schemeClr val="tx1"/>
+                </a:solidFill>
+                <a:latin typeface="+mn-lt"/>
+                <a:ea typeface="+mn-ea"/>
+                <a:cs typeface="+mn-cs"/>
+              </a:defRPr>
+            </a:lvl3pPr>
+            <a:lvl4pPr marL="1371600" indent="0" algn="l" defTabSz="457200" rtl="0" eaLnBrk="1" latinLnBrk="0" hangingPunct="1">
+              <a:spcBef>
+                <a:spcPct val="20000"/>
+              </a:spcBef>
+              <a:buFont typeface="Arial"/>
+              <a:buNone/>
+              <a:defRPr sz="1600" b="1" kern="1200">
+                <a:solidFill>
+                  <a:schemeClr val="tx1"/>
+                </a:solidFill>
+                <a:latin typeface="+mn-lt"/>
+                <a:ea typeface="+mn-ea"/>
+                <a:cs typeface="+mn-cs"/>
+              </a:defRPr>
+            </a:lvl4pPr>
+            <a:lvl5pPr marL="1828800" indent="0" algn="l" defTabSz="457200" rtl="0" eaLnBrk="1" latinLnBrk="0" hangingPunct="1">
+              <a:spcBef>
+                <a:spcPct val="20000"/>
+              </a:spcBef>
+              <a:buFont typeface="Arial"/>
+              <a:buNone/>
+              <a:defRPr sz="1600" b="1" kern="1200">
+                <a:solidFill>
+                  <a:schemeClr val="tx1"/>
+                </a:solidFill>
+                <a:latin typeface="+mn-lt"/>
+                <a:ea typeface="+mn-ea"/>
+                <a:cs typeface="+mn-cs"/>
+              </a:defRPr>
+            </a:lvl5pPr>
+            <a:lvl6pPr marL="2286000" indent="0" algn="l" defTabSz="457200" rtl="0" eaLnBrk="1" latinLnBrk="0" hangingPunct="1">
+              <a:spcBef>
+                <a:spcPct val="20000"/>
+              </a:spcBef>
+              <a:buFont typeface="Arial"/>
+              <a:buNone/>
+              <a:defRPr sz="1600" b="1" kern="1200">
+                <a:solidFill>
+                  <a:schemeClr val="tx1"/>
+                </a:solidFill>
+                <a:latin typeface="+mn-lt"/>
+                <a:ea typeface="+mn-ea"/>
+                <a:cs typeface="+mn-cs"/>
+              </a:defRPr>
+            </a:lvl6pPr>
+            <a:lvl7pPr marL="2743200" indent="0" algn="l" defTabSz="457200" rtl="0" eaLnBrk="1" latinLnBrk="0" hangingPunct="1">
+              <a:spcBef>
+                <a:spcPct val="20000"/>
+              </a:spcBef>
+              <a:buFont typeface="Arial"/>
+              <a:buNone/>
+              <a:defRPr sz="1600" b="1" kern="1200">
+                <a:solidFill>
+                  <a:schemeClr val="tx1"/>
+                </a:solidFill>
+                <a:latin typeface="+mn-lt"/>
+                <a:ea typeface="+mn-ea"/>
+                <a:cs typeface="+mn-cs"/>
+              </a:defRPr>
+            </a:lvl7pPr>
+            <a:lvl8pPr marL="3200400" indent="0" algn="l" defTabSz="457200" rtl="0" eaLnBrk="1" latinLnBrk="0" hangingPunct="1">
+              <a:spcBef>
+                <a:spcPct val="20000"/>
+              </a:spcBef>
+              <a:buFont typeface="Arial"/>
+              <a:buNone/>
+              <a:defRPr sz="1600" b="1" kern="1200">
+                <a:solidFill>
+                  <a:schemeClr val="tx1"/>
+                </a:solidFill>
+                <a:latin typeface="+mn-lt"/>
+                <a:ea typeface="+mn-ea"/>
+                <a:cs typeface="+mn-cs"/>
+              </a:defRPr>
+            </a:lvl8pPr>
+            <a:lvl9pPr marL="3657600" indent="0" algn="l" defTabSz="457200" rtl="0" eaLnBrk="1" latinLnBrk="0" hangingPunct="1">
+              <a:spcBef>
+                <a:spcPct val="20000"/>
+              </a:spcBef>
+              <a:buFont typeface="Arial"/>
+              <a:buNone/>
+              <a:defRPr sz="1600" b="1" kern="1200">
+                <a:solidFill>
+                  <a:schemeClr val="tx1"/>
+                </a:solidFill>
+                <a:latin typeface="+mn-lt"/>
+                <a:ea typeface="+mn-ea"/>
+                <a:cs typeface="+mn-cs"/>
+              </a:defRPr>
+            </a:lvl9pPr>
+          </a:lstStyle>
+          <a:p>
+            <a:r>
+              <a:rPr lang="en-US" dirty="0"/>
+              <a:t>N=21</a:t>
+            </a:r>
+          </a:p>
+        </p:txBody>
+      </p:sp>
+      <p:sp>
+        <p:nvSpPr>
+          <p:cNvPr id="3" name="TextBox 2">
+            <a:extLst>
+              <a:ext uri="{FF2B5EF4-FFF2-40B4-BE49-F238E27FC236}">
+                <a16:creationId xmlns:a16="http://schemas.microsoft.com/office/drawing/2014/main" id="{A4FDD119-9B9F-3D46-0940-014B3E276621}"/>
+              </a:ext>
+            </a:extLst>
+          </p:cNvPr>
+          <p:cNvSpPr txBox="1"/>
+          <p:nvPr/>
+        </p:nvSpPr>
+        <p:spPr>
+          <a:xfrm>
+            <a:off x="4930219" y="6033155"/>
+            <a:ext cx="3935180" cy="369332"/>
+          </a:xfrm>
+          <a:prstGeom prst="rect">
+            <a:avLst/>
+          </a:prstGeom>
+          <a:noFill/>
+        </p:spPr>
+        <p:txBody>
+          <a:bodyPr wrap="none" rtlCol="0">
+            <a:spAutoFit/>
+          </a:bodyPr>
+          <a:lstStyle/>
+          <a:p>
+            <a:r>
+              <a:rPr lang="en-US" dirty="0"/>
+              <a:t>Little to no difference between energies</a:t>
+            </a:r>
+          </a:p>
+        </p:txBody>
+      </p:sp>
+    </p:spTree>
+    <p:extLst>
+      <p:ext uri="{BB962C8B-B14F-4D97-AF65-F5344CB8AC3E}">
+        <p14:creationId xmlns:p14="http://schemas.microsoft.com/office/powerpoint/2010/main" val="3530547875"/>
+      </p:ext>
+    </p:extLst>
+  </p:cSld>
+  <p:clrMapOvr>
+    <a:masterClrMapping/>
+  </p:clrMapOvr>
+</p:sld>
+</file>
+
+<file path=ppt/slides/slide2.xml><?xml version="1.0" encoding="utf-8"?>
 <p:sld xmlns:a="http://schemas.openxmlformats.org/drawingml/2006/main" xmlns:r="http://schemas.openxmlformats.org/officeDocument/2006/relationships" xmlns:p="http://schemas.openxmlformats.org/presentationml/2006/main">
   <p:cSld>
     <p:spTree>
@@ -5175,13 +6273,7 @@
       </p:grpSpPr>
       <p:sp>
         <p:nvSpPr>
-          <p:cNvPr id="2" name="Title 1">
-            <a:extLst>
-              <a:ext uri="{FF2B5EF4-FFF2-40B4-BE49-F238E27FC236}">
-                <a16:creationId xmlns:a16="http://schemas.microsoft.com/office/drawing/2014/main" id="{55A63F3B-6BEB-D82A-1F4C-172651A703A5}"/>
-              </a:ext>
-            </a:extLst>
-          </p:cNvPr>
+          <p:cNvPr id="2" name="Title 1"/>
           <p:cNvSpPr>
             <a:spLocks noGrp="1"/>
           </p:cNvSpPr>
@@ -5189,62 +6281,23 @@
             <p:ph type="title"/>
           </p:nvPr>
         </p:nvSpPr>
-        <p:spPr>
-          <a:xfrm>
-            <a:off x="142195" y="257045"/>
-            <a:ext cx="3869703" cy="1143000"/>
-          </a:xfrm>
-        </p:spPr>
-        <p:txBody>
-          <a:bodyPr/>
-          <a:lstStyle/>
-          <a:p>
-            <a:r>
-              <a:rPr lang="en-US" dirty="0"/>
-              <a:t>Performance</a:t>
-            </a:r>
-          </a:p>
-        </p:txBody>
-      </p:sp>
-      <p:pic>
-        <p:nvPicPr>
-          <p:cNvPr id="9" name="Picture 8">
-            <a:extLst>
-              <a:ext uri="{FF2B5EF4-FFF2-40B4-BE49-F238E27FC236}">
-                <a16:creationId xmlns:a16="http://schemas.microsoft.com/office/drawing/2014/main" id="{DFF678BA-A7DB-02AE-44FB-9BCDE3510EF4}"/>
-              </a:ext>
-            </a:extLst>
-          </p:cNvPr>
-          <p:cNvPicPr>
-            <a:picLocks noChangeAspect="1"/>
-          </p:cNvPicPr>
-          <p:nvPr/>
-        </p:nvPicPr>
-        <p:blipFill>
-          <a:blip r:embed="rId2"/>
-          <a:stretch>
-            <a:fillRect/>
-          </a:stretch>
-        </p:blipFill>
-        <p:spPr>
-          <a:xfrm>
-            <a:off x="3891360" y="1543639"/>
-            <a:ext cx="5252640" cy="5246016"/>
-          </a:xfrm>
-          <a:prstGeom prst="rect">
-            <a:avLst/>
-          </a:prstGeom>
-        </p:spPr>
-      </p:pic>
-      <p:sp>
-        <p:nvSpPr>
-          <p:cNvPr id="11" name="Content Placeholder 10">
-            <a:extLst>
-              <a:ext uri="{FF2B5EF4-FFF2-40B4-BE49-F238E27FC236}">
-                <a16:creationId xmlns:a16="http://schemas.microsoft.com/office/drawing/2014/main" id="{470DF74A-373A-484C-9D5D-C93849128FAE}"/>
-              </a:ext>
-            </a:extLst>
-          </p:cNvPr>
+        <p:spPr/>
+        <p:txBody>
+          <a:bodyPr/>
+          <a:lstStyle/>
+          <a:p>
+            <a:pPr marL="0" lvl="0" indent="0">
+              <a:buNone/>
+            </a:pPr>
+            <a:r>
+              <a:t>Primitive unitcell tiling</a:t>
+            </a:r>
+          </a:p>
+        </p:txBody>
+      </p:sp>
+      <p:sp>
+        <p:nvSpPr>
+          <p:cNvPr id="3" name="Content Placeholder 2"/>
           <p:cNvSpPr>
             <a:spLocks noGrp="1"/>
           </p:cNvSpPr>
@@ -5252,26 +6305,25 @@
             <p:ph idx="1"/>
           </p:nvPr>
         </p:nvSpPr>
-        <p:spPr>
-          <a:xfrm>
-            <a:off x="457200" y="1600200"/>
-            <a:ext cx="3030718" cy="2566447"/>
-          </a:xfrm>
-        </p:spPr>
-        <p:txBody>
-          <a:bodyPr/>
-          <a:lstStyle/>
-          <a:p>
-            <a:endParaRPr lang="en-US" dirty="0"/>
+        <p:spPr/>
+        <p:txBody>
+          <a:bodyPr/>
+          <a:lstStyle/>
+          <a:p>
+            <a:pPr lvl="1"/>
+            <a:r>
+              <a:t>For interactive plot: </a:t>
+            </a:r>
+            <a:r>
+              <a:rPr>
+                <a:hlinkClick r:id="rId2"/>
+              </a:rPr>
+              <a:t>bastian-explore-rse.streamlit.app</a:t>
+            </a:r>
           </a:p>
         </p:txBody>
       </p:sp>
     </p:spTree>
-    <p:extLst>
-      <p:ext uri="{BB962C8B-B14F-4D97-AF65-F5344CB8AC3E}">
-        <p14:creationId xmlns:p14="http://schemas.microsoft.com/office/powerpoint/2010/main" val="797662212"/>
-      </p:ext>
-    </p:extLst>
   </p:cSld>
   <p:clrMapOvr>
     <a:masterClrMapping/>
@@ -5279,7 +6331,7 @@
 </p:sld>
 </file>
 
-<file path=ppt/slides/slide18.xml><?xml version="1.0" encoding="utf-8"?>
+<file path=ppt/slides/slide20.xml><?xml version="1.0" encoding="utf-8"?>
 <p:sld xmlns:a="http://schemas.openxmlformats.org/drawingml/2006/main" xmlns:r="http://schemas.openxmlformats.org/officeDocument/2006/relationships" xmlns:p="http://schemas.openxmlformats.org/presentationml/2006/main">
   <p:cSld>
     <p:spTree>
@@ -5301,6 +6353,1114 @@
           <p:cNvPr id="7" name="Title 6">
             <a:extLst>
               <a:ext uri="{FF2B5EF4-FFF2-40B4-BE49-F238E27FC236}">
+                <a16:creationId xmlns:a16="http://schemas.microsoft.com/office/drawing/2014/main" id="{4AC3D201-B5FA-60C8-E5E6-2A323F7EDBD6}"/>
+              </a:ext>
+            </a:extLst>
+          </p:cNvPr>
+          <p:cNvSpPr>
+            <a:spLocks noGrp="1"/>
+          </p:cNvSpPr>
+          <p:nvPr>
+            <p:ph type="ctrTitle"/>
+          </p:nvPr>
+        </p:nvSpPr>
+        <p:spPr/>
+        <p:txBody>
+          <a:bodyPr/>
+          <a:lstStyle/>
+          <a:p>
+            <a:r>
+              <a:rPr lang="en-US" dirty="0"/>
+              <a:t>Armchair vs zig-zag (N=12)</a:t>
+            </a:r>
+          </a:p>
+        </p:txBody>
+      </p:sp>
+      <p:sp>
+        <p:nvSpPr>
+          <p:cNvPr id="8" name="Subtitle 7">
+            <a:extLst>
+              <a:ext uri="{FF2B5EF4-FFF2-40B4-BE49-F238E27FC236}">
+                <a16:creationId xmlns:a16="http://schemas.microsoft.com/office/drawing/2014/main" id="{32303070-4748-BAA5-03C1-F155A420A80A}"/>
+              </a:ext>
+            </a:extLst>
+          </p:cNvPr>
+          <p:cNvSpPr>
+            <a:spLocks noGrp="1"/>
+          </p:cNvSpPr>
+          <p:nvPr>
+            <p:ph type="subTitle" idx="1"/>
+          </p:nvPr>
+        </p:nvSpPr>
+        <p:spPr/>
+        <p:txBody>
+          <a:bodyPr/>
+          <a:lstStyle/>
+          <a:p>
+            <a:endParaRPr lang="en-US"/>
+          </a:p>
+        </p:txBody>
+      </p:sp>
+    </p:spTree>
+    <p:extLst>
+      <p:ext uri="{BB962C8B-B14F-4D97-AF65-F5344CB8AC3E}">
+        <p14:creationId xmlns:p14="http://schemas.microsoft.com/office/powerpoint/2010/main" val="3195349523"/>
+      </p:ext>
+    </p:extLst>
+  </p:cSld>
+  <p:clrMapOvr>
+    <a:masterClrMapping/>
+  </p:clrMapOvr>
+</p:sld>
+</file>
+
+<file path=ppt/slides/slide21.xml><?xml version="1.0" encoding="utf-8"?>
+<p:sld xmlns:a="http://schemas.openxmlformats.org/drawingml/2006/main" xmlns:r="http://schemas.openxmlformats.org/officeDocument/2006/relationships" xmlns:p="http://schemas.openxmlformats.org/presentationml/2006/main">
+  <p:cSld>
+    <p:spTree>
+      <p:nvGrpSpPr>
+        <p:cNvPr id="1" name="">
+          <a:extLst>
+            <a:ext uri="{FF2B5EF4-FFF2-40B4-BE49-F238E27FC236}">
+              <a16:creationId xmlns:a16="http://schemas.microsoft.com/office/drawing/2014/main" id="{161A7DCA-4F07-7ECD-F109-EC39A8590155}"/>
+            </a:ext>
+          </a:extLst>
+        </p:cNvPr>
+        <p:cNvGrpSpPr/>
+        <p:nvPr/>
+      </p:nvGrpSpPr>
+      <p:grpSpPr>
+        <a:xfrm>
+          <a:off x="0" y="0"/>
+          <a:ext cx="0" cy="0"/>
+          <a:chOff x="0" y="0"/>
+          <a:chExt cx="0" cy="0"/>
+        </a:xfrm>
+      </p:grpSpPr>
+      <p:sp>
+        <p:nvSpPr>
+          <p:cNvPr id="2" name="Title 1">
+            <a:extLst>
+              <a:ext uri="{FF2B5EF4-FFF2-40B4-BE49-F238E27FC236}">
+                <a16:creationId xmlns:a16="http://schemas.microsoft.com/office/drawing/2014/main" id="{5805C681-4249-E5C9-281B-7AC6663A4BDD}"/>
+              </a:ext>
+            </a:extLst>
+          </p:cNvPr>
+          <p:cNvSpPr>
+            <a:spLocks noGrp="1"/>
+          </p:cNvSpPr>
+          <p:nvPr>
+            <p:ph type="title"/>
+          </p:nvPr>
+        </p:nvSpPr>
+        <p:spPr/>
+        <p:txBody>
+          <a:bodyPr/>
+          <a:lstStyle/>
+          <a:p>
+            <a:r>
+              <a:rPr lang="en-US" dirty="0"/>
+              <a:t>Armchair vs zigzag</a:t>
+            </a:r>
+          </a:p>
+        </p:txBody>
+      </p:sp>
+      <p:sp>
+        <p:nvSpPr>
+          <p:cNvPr id="3" name="Text Placeholder 2">
+            <a:extLst>
+              <a:ext uri="{FF2B5EF4-FFF2-40B4-BE49-F238E27FC236}">
+                <a16:creationId xmlns:a16="http://schemas.microsoft.com/office/drawing/2014/main" id="{3C4A062D-3B13-DFE4-0068-81ED0DE2C5D9}"/>
+              </a:ext>
+            </a:extLst>
+          </p:cNvPr>
+          <p:cNvSpPr>
+            <a:spLocks noGrp="1"/>
+          </p:cNvSpPr>
+          <p:nvPr>
+            <p:ph type="body" idx="1"/>
+          </p:nvPr>
+        </p:nvSpPr>
+        <p:spPr/>
+        <p:txBody>
+          <a:bodyPr/>
+          <a:lstStyle/>
+          <a:p>
+            <a:r>
+              <a:rPr lang="en-US" dirty="0"/>
+              <a:t>E=0 eV, N=12, eta=10</a:t>
+            </a:r>
+            <a:r>
+              <a:rPr lang="en-US" baseline="30000" dirty="0"/>
+              <a:t>-1</a:t>
+            </a:r>
+            <a:endParaRPr lang="en-US" dirty="0"/>
+          </a:p>
+        </p:txBody>
+      </p:sp>
+      <p:pic>
+        <p:nvPicPr>
+          <p:cNvPr id="8" name="Content Placeholder 7">
+            <a:extLst>
+              <a:ext uri="{FF2B5EF4-FFF2-40B4-BE49-F238E27FC236}">
+                <a16:creationId xmlns:a16="http://schemas.microsoft.com/office/drawing/2014/main" id="{38819D05-C7A1-52E8-0003-FB1AAA9574F3}"/>
+              </a:ext>
+            </a:extLst>
+          </p:cNvPr>
+          <p:cNvPicPr>
+            <a:picLocks noGrp="1" noChangeAspect="1"/>
+          </p:cNvPicPr>
+          <p:nvPr>
+            <p:ph sz="half" idx="2"/>
+          </p:nvPr>
+        </p:nvPicPr>
+        <p:blipFill>
+          <a:blip r:embed="rId2"/>
+          <a:srcRect/>
+          <a:stretch/>
+        </p:blipFill>
+        <p:spPr>
+          <a:xfrm>
+            <a:off x="500423" y="2283283"/>
+            <a:ext cx="7993930" cy="4570249"/>
+          </a:xfrm>
+          <a:prstGeom prst="rect">
+            <a:avLst/>
+          </a:prstGeom>
+        </p:spPr>
+      </p:pic>
+    </p:spTree>
+    <p:extLst>
+      <p:ext uri="{BB962C8B-B14F-4D97-AF65-F5344CB8AC3E}">
+        <p14:creationId xmlns:p14="http://schemas.microsoft.com/office/powerpoint/2010/main" val="885272265"/>
+      </p:ext>
+    </p:extLst>
+  </p:cSld>
+  <p:clrMapOvr>
+    <a:masterClrMapping/>
+  </p:clrMapOvr>
+</p:sld>
+</file>
+
+<file path=ppt/slides/slide22.xml><?xml version="1.0" encoding="utf-8"?>
+<p:sld xmlns:a="http://schemas.openxmlformats.org/drawingml/2006/main" xmlns:r="http://schemas.openxmlformats.org/officeDocument/2006/relationships" xmlns:p="http://schemas.openxmlformats.org/presentationml/2006/main">
+  <p:cSld>
+    <p:spTree>
+      <p:nvGrpSpPr>
+        <p:cNvPr id="1" name="">
+          <a:extLst>
+            <a:ext uri="{FF2B5EF4-FFF2-40B4-BE49-F238E27FC236}">
+              <a16:creationId xmlns:a16="http://schemas.microsoft.com/office/drawing/2014/main" id="{CBE969C1-2B0A-6B69-5D60-60B15FC32BE2}"/>
+            </a:ext>
+          </a:extLst>
+        </p:cNvPr>
+        <p:cNvGrpSpPr/>
+        <p:nvPr/>
+      </p:nvGrpSpPr>
+      <p:grpSpPr>
+        <a:xfrm>
+          <a:off x="0" y="0"/>
+          <a:ext cx="0" cy="0"/>
+          <a:chOff x="0" y="0"/>
+          <a:chExt cx="0" cy="0"/>
+        </a:xfrm>
+      </p:grpSpPr>
+      <p:sp>
+        <p:nvSpPr>
+          <p:cNvPr id="2" name="Title 1">
+            <a:extLst>
+              <a:ext uri="{FF2B5EF4-FFF2-40B4-BE49-F238E27FC236}">
+                <a16:creationId xmlns:a16="http://schemas.microsoft.com/office/drawing/2014/main" id="{86D8CF1C-C7D2-0D18-A5EF-4AE6B6D9B534}"/>
+              </a:ext>
+            </a:extLst>
+          </p:cNvPr>
+          <p:cNvSpPr>
+            <a:spLocks noGrp="1"/>
+          </p:cNvSpPr>
+          <p:nvPr>
+            <p:ph type="title"/>
+          </p:nvPr>
+        </p:nvSpPr>
+        <p:spPr/>
+        <p:txBody>
+          <a:bodyPr/>
+          <a:lstStyle/>
+          <a:p>
+            <a:r>
+              <a:rPr lang="en-US" dirty="0"/>
+              <a:t>Armchair vs zigzag</a:t>
+            </a:r>
+          </a:p>
+        </p:txBody>
+      </p:sp>
+      <p:sp>
+        <p:nvSpPr>
+          <p:cNvPr id="3" name="Text Placeholder 2">
+            <a:extLst>
+              <a:ext uri="{FF2B5EF4-FFF2-40B4-BE49-F238E27FC236}">
+                <a16:creationId xmlns:a16="http://schemas.microsoft.com/office/drawing/2014/main" id="{B81F7AEB-0B72-1E29-C7AE-7BDDAC29EE88}"/>
+              </a:ext>
+            </a:extLst>
+          </p:cNvPr>
+          <p:cNvSpPr>
+            <a:spLocks noGrp="1"/>
+          </p:cNvSpPr>
+          <p:nvPr>
+            <p:ph type="body" idx="1"/>
+          </p:nvPr>
+        </p:nvSpPr>
+        <p:spPr/>
+        <p:txBody>
+          <a:bodyPr/>
+          <a:lstStyle/>
+          <a:p>
+            <a:r>
+              <a:rPr lang="en-US" dirty="0"/>
+              <a:t>E=0 eV, N=12, eta=10</a:t>
+            </a:r>
+            <a:r>
+              <a:rPr lang="en-US" baseline="30000" dirty="0"/>
+              <a:t>-3</a:t>
+            </a:r>
+            <a:endParaRPr lang="en-US" dirty="0"/>
+          </a:p>
+        </p:txBody>
+      </p:sp>
+      <p:pic>
+        <p:nvPicPr>
+          <p:cNvPr id="8" name="Content Placeholder 7">
+            <a:extLst>
+              <a:ext uri="{FF2B5EF4-FFF2-40B4-BE49-F238E27FC236}">
+                <a16:creationId xmlns:a16="http://schemas.microsoft.com/office/drawing/2014/main" id="{153B756B-FB12-F779-74F7-D0E4239DDA67}"/>
+              </a:ext>
+            </a:extLst>
+          </p:cNvPr>
+          <p:cNvPicPr>
+            <a:picLocks noGrp="1" noChangeAspect="1"/>
+          </p:cNvPicPr>
+          <p:nvPr>
+            <p:ph sz="half" idx="2"/>
+          </p:nvPr>
+        </p:nvPicPr>
+        <p:blipFill>
+          <a:blip r:embed="rId2"/>
+          <a:srcRect/>
+          <a:stretch/>
+        </p:blipFill>
+        <p:spPr>
+          <a:xfrm>
+            <a:off x="500423" y="2283283"/>
+            <a:ext cx="7993930" cy="4570249"/>
+          </a:xfrm>
+          <a:prstGeom prst="rect">
+            <a:avLst/>
+          </a:prstGeom>
+        </p:spPr>
+      </p:pic>
+    </p:spTree>
+    <p:extLst>
+      <p:ext uri="{BB962C8B-B14F-4D97-AF65-F5344CB8AC3E}">
+        <p14:creationId xmlns:p14="http://schemas.microsoft.com/office/powerpoint/2010/main" val="3832255315"/>
+      </p:ext>
+    </p:extLst>
+  </p:cSld>
+  <p:clrMapOvr>
+    <a:masterClrMapping/>
+  </p:clrMapOvr>
+</p:sld>
+</file>
+
+<file path=ppt/slides/slide23.xml><?xml version="1.0" encoding="utf-8"?>
+<p:sld xmlns:a="http://schemas.openxmlformats.org/drawingml/2006/main" xmlns:r="http://schemas.openxmlformats.org/officeDocument/2006/relationships" xmlns:p="http://schemas.openxmlformats.org/presentationml/2006/main">
+  <p:cSld>
+    <p:spTree>
+      <p:nvGrpSpPr>
+        <p:cNvPr id="1" name="">
+          <a:extLst>
+            <a:ext uri="{FF2B5EF4-FFF2-40B4-BE49-F238E27FC236}">
+              <a16:creationId xmlns:a16="http://schemas.microsoft.com/office/drawing/2014/main" id="{F82CABF4-AF11-BC62-10F9-ED5DCDAFF170}"/>
+            </a:ext>
+          </a:extLst>
+        </p:cNvPr>
+        <p:cNvGrpSpPr/>
+        <p:nvPr/>
+      </p:nvGrpSpPr>
+      <p:grpSpPr>
+        <a:xfrm>
+          <a:off x="0" y="0"/>
+          <a:ext cx="0" cy="0"/>
+          <a:chOff x="0" y="0"/>
+          <a:chExt cx="0" cy="0"/>
+        </a:xfrm>
+      </p:grpSpPr>
+      <p:sp>
+        <p:nvSpPr>
+          <p:cNvPr id="2" name="Title 1">
+            <a:extLst>
+              <a:ext uri="{FF2B5EF4-FFF2-40B4-BE49-F238E27FC236}">
+                <a16:creationId xmlns:a16="http://schemas.microsoft.com/office/drawing/2014/main" id="{1CF4DE44-5411-9A84-7392-3CBA35259AF7}"/>
+              </a:ext>
+            </a:extLst>
+          </p:cNvPr>
+          <p:cNvSpPr>
+            <a:spLocks noGrp="1"/>
+          </p:cNvSpPr>
+          <p:nvPr>
+            <p:ph type="title"/>
+          </p:nvPr>
+        </p:nvSpPr>
+        <p:spPr/>
+        <p:txBody>
+          <a:bodyPr/>
+          <a:lstStyle/>
+          <a:p>
+            <a:r>
+              <a:rPr lang="en-US" dirty="0"/>
+              <a:t>Armchair vs zigzag</a:t>
+            </a:r>
+          </a:p>
+        </p:txBody>
+      </p:sp>
+      <p:sp>
+        <p:nvSpPr>
+          <p:cNvPr id="3" name="Text Placeholder 2">
+            <a:extLst>
+              <a:ext uri="{FF2B5EF4-FFF2-40B4-BE49-F238E27FC236}">
+                <a16:creationId xmlns:a16="http://schemas.microsoft.com/office/drawing/2014/main" id="{D42B1CF9-AAD4-54E2-346C-F1664288A241}"/>
+              </a:ext>
+            </a:extLst>
+          </p:cNvPr>
+          <p:cNvSpPr>
+            <a:spLocks noGrp="1"/>
+          </p:cNvSpPr>
+          <p:nvPr>
+            <p:ph type="body" idx="1"/>
+          </p:nvPr>
+        </p:nvSpPr>
+        <p:spPr/>
+        <p:txBody>
+          <a:bodyPr/>
+          <a:lstStyle/>
+          <a:p>
+            <a:r>
+              <a:rPr lang="en-US" dirty="0"/>
+              <a:t>E=0 eV, N=12, eta=10</a:t>
+            </a:r>
+            <a:r>
+              <a:rPr lang="en-US" baseline="30000" dirty="0"/>
+              <a:t>-5</a:t>
+            </a:r>
+            <a:endParaRPr lang="en-US" dirty="0"/>
+          </a:p>
+        </p:txBody>
+      </p:sp>
+      <p:pic>
+        <p:nvPicPr>
+          <p:cNvPr id="8" name="Content Placeholder 7">
+            <a:extLst>
+              <a:ext uri="{FF2B5EF4-FFF2-40B4-BE49-F238E27FC236}">
+                <a16:creationId xmlns:a16="http://schemas.microsoft.com/office/drawing/2014/main" id="{6D4D30D6-EBED-C04D-CB28-FA8982927DE9}"/>
+              </a:ext>
+            </a:extLst>
+          </p:cNvPr>
+          <p:cNvPicPr>
+            <a:picLocks noGrp="1" noChangeAspect="1"/>
+          </p:cNvPicPr>
+          <p:nvPr>
+            <p:ph sz="half" idx="2"/>
+          </p:nvPr>
+        </p:nvPicPr>
+        <p:blipFill>
+          <a:blip r:embed="rId2"/>
+          <a:srcRect/>
+          <a:stretch/>
+        </p:blipFill>
+        <p:spPr>
+          <a:xfrm>
+            <a:off x="500423" y="2283283"/>
+            <a:ext cx="7993930" cy="4570249"/>
+          </a:xfrm>
+          <a:prstGeom prst="rect">
+            <a:avLst/>
+          </a:prstGeom>
+        </p:spPr>
+      </p:pic>
+    </p:spTree>
+    <p:extLst>
+      <p:ext uri="{BB962C8B-B14F-4D97-AF65-F5344CB8AC3E}">
+        <p14:creationId xmlns:p14="http://schemas.microsoft.com/office/powerpoint/2010/main" val="1378727748"/>
+      </p:ext>
+    </p:extLst>
+  </p:cSld>
+  <p:clrMapOvr>
+    <a:masterClrMapping/>
+  </p:clrMapOvr>
+</p:sld>
+</file>
+
+<file path=ppt/slides/slide24.xml><?xml version="1.0" encoding="utf-8"?>
+<p:sld xmlns:a="http://schemas.openxmlformats.org/drawingml/2006/main" xmlns:r="http://schemas.openxmlformats.org/officeDocument/2006/relationships" xmlns:p="http://schemas.openxmlformats.org/presentationml/2006/main">
+  <p:cSld>
+    <p:spTree>
+      <p:nvGrpSpPr>
+        <p:cNvPr id="1" name="">
+          <a:extLst>
+            <a:ext uri="{FF2B5EF4-FFF2-40B4-BE49-F238E27FC236}">
+              <a16:creationId xmlns:a16="http://schemas.microsoft.com/office/drawing/2014/main" id="{28DA9E54-8B12-CF4B-1059-F4B325B411BD}"/>
+            </a:ext>
+          </a:extLst>
+        </p:cNvPr>
+        <p:cNvGrpSpPr/>
+        <p:nvPr/>
+      </p:nvGrpSpPr>
+      <p:grpSpPr>
+        <a:xfrm>
+          <a:off x="0" y="0"/>
+          <a:ext cx="0" cy="0"/>
+          <a:chOff x="0" y="0"/>
+          <a:chExt cx="0" cy="0"/>
+        </a:xfrm>
+      </p:grpSpPr>
+      <p:sp>
+        <p:nvSpPr>
+          <p:cNvPr id="2" name="Title 1">
+            <a:extLst>
+              <a:ext uri="{FF2B5EF4-FFF2-40B4-BE49-F238E27FC236}">
+                <a16:creationId xmlns:a16="http://schemas.microsoft.com/office/drawing/2014/main" id="{A5A248E9-4EFC-518B-02EB-6C2E85CA71EE}"/>
+              </a:ext>
+            </a:extLst>
+          </p:cNvPr>
+          <p:cNvSpPr>
+            <a:spLocks noGrp="1"/>
+          </p:cNvSpPr>
+          <p:nvPr>
+            <p:ph type="title"/>
+          </p:nvPr>
+        </p:nvSpPr>
+        <p:spPr/>
+        <p:txBody>
+          <a:bodyPr/>
+          <a:lstStyle/>
+          <a:p>
+            <a:r>
+              <a:rPr lang="en-US" dirty="0"/>
+              <a:t>All Armchair</a:t>
+            </a:r>
+          </a:p>
+        </p:txBody>
+      </p:sp>
+      <p:sp>
+        <p:nvSpPr>
+          <p:cNvPr id="3" name="Text Placeholder 2">
+            <a:extLst>
+              <a:ext uri="{FF2B5EF4-FFF2-40B4-BE49-F238E27FC236}">
+                <a16:creationId xmlns:a16="http://schemas.microsoft.com/office/drawing/2014/main" id="{AA1883E2-0090-80F2-76D0-F7E43795DAB7}"/>
+              </a:ext>
+            </a:extLst>
+          </p:cNvPr>
+          <p:cNvSpPr>
+            <a:spLocks noGrp="1"/>
+          </p:cNvSpPr>
+          <p:nvPr>
+            <p:ph type="body" idx="1"/>
+          </p:nvPr>
+        </p:nvSpPr>
+        <p:spPr/>
+        <p:txBody>
+          <a:bodyPr/>
+          <a:lstStyle/>
+          <a:p>
+            <a:r>
+              <a:rPr lang="en-US" dirty="0"/>
+              <a:t>N=12, eta=10</a:t>
+            </a:r>
+            <a:r>
+              <a:rPr lang="en-US" baseline="30000" dirty="0"/>
+              <a:t>-5</a:t>
+            </a:r>
+            <a:endParaRPr lang="en-US" dirty="0"/>
+          </a:p>
+        </p:txBody>
+      </p:sp>
+      <p:pic>
+        <p:nvPicPr>
+          <p:cNvPr id="8" name="Content Placeholder 7">
+            <a:extLst>
+              <a:ext uri="{FF2B5EF4-FFF2-40B4-BE49-F238E27FC236}">
+                <a16:creationId xmlns:a16="http://schemas.microsoft.com/office/drawing/2014/main" id="{48DADCF8-764B-ECD6-A7CC-746CA976B1E2}"/>
+              </a:ext>
+            </a:extLst>
+          </p:cNvPr>
+          <p:cNvPicPr>
+            <a:picLocks noGrp="1" noChangeAspect="1"/>
+          </p:cNvPicPr>
+          <p:nvPr>
+            <p:ph sz="half" idx="2"/>
+          </p:nvPr>
+        </p:nvPicPr>
+        <p:blipFill>
+          <a:blip r:embed="rId2"/>
+          <a:srcRect/>
+          <a:stretch/>
+        </p:blipFill>
+        <p:spPr>
+          <a:xfrm>
+            <a:off x="0" y="2902852"/>
+            <a:ext cx="9103005" cy="3243423"/>
+          </a:xfrm>
+          <a:prstGeom prst="rect">
+            <a:avLst/>
+          </a:prstGeom>
+        </p:spPr>
+      </p:pic>
+    </p:spTree>
+    <p:extLst>
+      <p:ext uri="{BB962C8B-B14F-4D97-AF65-F5344CB8AC3E}">
+        <p14:creationId xmlns:p14="http://schemas.microsoft.com/office/powerpoint/2010/main" val="3536873047"/>
+      </p:ext>
+    </p:extLst>
+  </p:cSld>
+  <p:clrMapOvr>
+    <a:masterClrMapping/>
+  </p:clrMapOvr>
+</p:sld>
+</file>
+
+<file path=ppt/slides/slide25.xml><?xml version="1.0" encoding="utf-8"?>
+<p:sld xmlns:a="http://schemas.openxmlformats.org/drawingml/2006/main" xmlns:r="http://schemas.openxmlformats.org/officeDocument/2006/relationships" xmlns:p="http://schemas.openxmlformats.org/presentationml/2006/main">
+  <p:cSld>
+    <p:spTree>
+      <p:nvGrpSpPr>
+        <p:cNvPr id="1" name="">
+          <a:extLst>
+            <a:ext uri="{FF2B5EF4-FFF2-40B4-BE49-F238E27FC236}">
+              <a16:creationId xmlns:a16="http://schemas.microsoft.com/office/drawing/2014/main" id="{A9E31D98-818D-0F2A-91E2-709DF7007F00}"/>
+            </a:ext>
+          </a:extLst>
+        </p:cNvPr>
+        <p:cNvGrpSpPr/>
+        <p:nvPr/>
+      </p:nvGrpSpPr>
+      <p:grpSpPr>
+        <a:xfrm>
+          <a:off x="0" y="0"/>
+          <a:ext cx="0" cy="0"/>
+          <a:chOff x="0" y="0"/>
+          <a:chExt cx="0" cy="0"/>
+        </a:xfrm>
+      </p:grpSpPr>
+      <p:sp>
+        <p:nvSpPr>
+          <p:cNvPr id="2" name="Title 1">
+            <a:extLst>
+              <a:ext uri="{FF2B5EF4-FFF2-40B4-BE49-F238E27FC236}">
+                <a16:creationId xmlns:a16="http://schemas.microsoft.com/office/drawing/2014/main" id="{77314861-B230-8C3C-F921-D50938CA8100}"/>
+              </a:ext>
+            </a:extLst>
+          </p:cNvPr>
+          <p:cNvSpPr>
+            <a:spLocks noGrp="1"/>
+          </p:cNvSpPr>
+          <p:nvPr>
+            <p:ph type="title"/>
+          </p:nvPr>
+        </p:nvSpPr>
+        <p:spPr/>
+        <p:txBody>
+          <a:bodyPr/>
+          <a:lstStyle/>
+          <a:p>
+            <a:r>
+              <a:rPr lang="en-US" dirty="0"/>
+              <a:t>All Armchair</a:t>
+            </a:r>
+          </a:p>
+        </p:txBody>
+      </p:sp>
+      <p:sp>
+        <p:nvSpPr>
+          <p:cNvPr id="3" name="Text Placeholder 2">
+            <a:extLst>
+              <a:ext uri="{FF2B5EF4-FFF2-40B4-BE49-F238E27FC236}">
+                <a16:creationId xmlns:a16="http://schemas.microsoft.com/office/drawing/2014/main" id="{902515C5-6CD4-1309-D11A-747D3DC535A2}"/>
+              </a:ext>
+            </a:extLst>
+          </p:cNvPr>
+          <p:cNvSpPr>
+            <a:spLocks noGrp="1"/>
+          </p:cNvSpPr>
+          <p:nvPr>
+            <p:ph type="body" idx="1"/>
+          </p:nvPr>
+        </p:nvSpPr>
+        <p:spPr/>
+        <p:txBody>
+          <a:bodyPr/>
+          <a:lstStyle/>
+          <a:p>
+            <a:r>
+              <a:rPr lang="en-US" dirty="0"/>
+              <a:t>N=12, eta=10</a:t>
+            </a:r>
+            <a:r>
+              <a:rPr lang="en-US" baseline="30000" dirty="0"/>
+              <a:t>-5</a:t>
+            </a:r>
+            <a:endParaRPr lang="en-US" dirty="0"/>
+          </a:p>
+        </p:txBody>
+      </p:sp>
+      <p:pic>
+        <p:nvPicPr>
+          <p:cNvPr id="8" name="Content Placeholder 7">
+            <a:extLst>
+              <a:ext uri="{FF2B5EF4-FFF2-40B4-BE49-F238E27FC236}">
+                <a16:creationId xmlns:a16="http://schemas.microsoft.com/office/drawing/2014/main" id="{0196FC5F-E311-E238-53F5-C2DE23F53ADE}"/>
+              </a:ext>
+            </a:extLst>
+          </p:cNvPr>
+          <p:cNvPicPr>
+            <a:picLocks noGrp="1" noChangeAspect="1"/>
+          </p:cNvPicPr>
+          <p:nvPr>
+            <p:ph sz="half" idx="2"/>
+          </p:nvPr>
+        </p:nvPicPr>
+        <p:blipFill>
+          <a:blip r:embed="rId2"/>
+          <a:srcRect/>
+          <a:stretch/>
+        </p:blipFill>
+        <p:spPr>
+          <a:xfrm>
+            <a:off x="0" y="2902852"/>
+            <a:ext cx="9103005" cy="3243423"/>
+          </a:xfrm>
+          <a:prstGeom prst="rect">
+            <a:avLst/>
+          </a:prstGeom>
+        </p:spPr>
+      </p:pic>
+    </p:spTree>
+    <p:extLst>
+      <p:ext uri="{BB962C8B-B14F-4D97-AF65-F5344CB8AC3E}">
+        <p14:creationId xmlns:p14="http://schemas.microsoft.com/office/powerpoint/2010/main" val="2073317681"/>
+      </p:ext>
+    </p:extLst>
+  </p:cSld>
+  <p:clrMapOvr>
+    <a:masterClrMapping/>
+  </p:clrMapOvr>
+</p:sld>
+</file>
+
+<file path=ppt/slides/slide26.xml><?xml version="1.0" encoding="utf-8"?>
+<p:sld xmlns:a="http://schemas.openxmlformats.org/drawingml/2006/main" xmlns:r="http://schemas.openxmlformats.org/officeDocument/2006/relationships" xmlns:p="http://schemas.openxmlformats.org/presentationml/2006/main">
+  <p:cSld>
+    <p:spTree>
+      <p:nvGrpSpPr>
+        <p:cNvPr id="1" name="">
+          <a:extLst>
+            <a:ext uri="{FF2B5EF4-FFF2-40B4-BE49-F238E27FC236}">
+              <a16:creationId xmlns:a16="http://schemas.microsoft.com/office/drawing/2014/main" id="{9E95FED2-13F2-3BA1-4096-41235377D582}"/>
+            </a:ext>
+          </a:extLst>
+        </p:cNvPr>
+        <p:cNvGrpSpPr/>
+        <p:nvPr/>
+      </p:nvGrpSpPr>
+      <p:grpSpPr>
+        <a:xfrm>
+          <a:off x="0" y="0"/>
+          <a:ext cx="0" cy="0"/>
+          <a:chOff x="0" y="0"/>
+          <a:chExt cx="0" cy="0"/>
+        </a:xfrm>
+      </p:grpSpPr>
+      <p:sp>
+        <p:nvSpPr>
+          <p:cNvPr id="2" name="Title 1">
+            <a:extLst>
+              <a:ext uri="{FF2B5EF4-FFF2-40B4-BE49-F238E27FC236}">
+                <a16:creationId xmlns:a16="http://schemas.microsoft.com/office/drawing/2014/main" id="{83444D43-EE3A-9D6A-60F0-CF67159329DA}"/>
+              </a:ext>
+            </a:extLst>
+          </p:cNvPr>
+          <p:cNvSpPr>
+            <a:spLocks noGrp="1"/>
+          </p:cNvSpPr>
+          <p:nvPr>
+            <p:ph type="title"/>
+          </p:nvPr>
+        </p:nvSpPr>
+        <p:spPr/>
+        <p:txBody>
+          <a:bodyPr/>
+          <a:lstStyle/>
+          <a:p>
+            <a:r>
+              <a:rPr lang="en-US" dirty="0"/>
+              <a:t>All Armchair</a:t>
+            </a:r>
+          </a:p>
+        </p:txBody>
+      </p:sp>
+      <p:sp>
+        <p:nvSpPr>
+          <p:cNvPr id="3" name="Text Placeholder 2">
+            <a:extLst>
+              <a:ext uri="{FF2B5EF4-FFF2-40B4-BE49-F238E27FC236}">
+                <a16:creationId xmlns:a16="http://schemas.microsoft.com/office/drawing/2014/main" id="{A38178A1-638D-8A5A-C1EF-4FF81C375D19}"/>
+              </a:ext>
+            </a:extLst>
+          </p:cNvPr>
+          <p:cNvSpPr>
+            <a:spLocks noGrp="1"/>
+          </p:cNvSpPr>
+          <p:nvPr>
+            <p:ph type="body" idx="1"/>
+          </p:nvPr>
+        </p:nvSpPr>
+        <p:spPr/>
+        <p:txBody>
+          <a:bodyPr/>
+          <a:lstStyle/>
+          <a:p>
+            <a:r>
+              <a:rPr lang="en-US" dirty="0"/>
+              <a:t>N=12, eta=10</a:t>
+            </a:r>
+            <a:r>
+              <a:rPr lang="en-US" baseline="30000" dirty="0"/>
+              <a:t>-5</a:t>
+            </a:r>
+            <a:endParaRPr lang="en-US" dirty="0"/>
+          </a:p>
+        </p:txBody>
+      </p:sp>
+      <p:pic>
+        <p:nvPicPr>
+          <p:cNvPr id="8" name="Content Placeholder 7">
+            <a:extLst>
+              <a:ext uri="{FF2B5EF4-FFF2-40B4-BE49-F238E27FC236}">
+                <a16:creationId xmlns:a16="http://schemas.microsoft.com/office/drawing/2014/main" id="{0B85919D-76F9-A3CF-F8B4-590487B93676}"/>
+              </a:ext>
+            </a:extLst>
+          </p:cNvPr>
+          <p:cNvPicPr>
+            <a:picLocks noGrp="1" noChangeAspect="1"/>
+          </p:cNvPicPr>
+          <p:nvPr>
+            <p:ph sz="half" idx="2"/>
+          </p:nvPr>
+        </p:nvPicPr>
+        <p:blipFill>
+          <a:blip r:embed="rId2"/>
+          <a:stretch>
+            <a:fillRect/>
+          </a:stretch>
+        </p:blipFill>
+        <p:spPr>
+          <a:xfrm>
+            <a:off x="0" y="2902852"/>
+            <a:ext cx="9103005" cy="3243423"/>
+          </a:xfrm>
+          <a:prstGeom prst="rect">
+            <a:avLst/>
+          </a:prstGeom>
+        </p:spPr>
+      </p:pic>
+    </p:spTree>
+    <p:extLst>
+      <p:ext uri="{BB962C8B-B14F-4D97-AF65-F5344CB8AC3E}">
+        <p14:creationId xmlns:p14="http://schemas.microsoft.com/office/powerpoint/2010/main" val="2277612821"/>
+      </p:ext>
+    </p:extLst>
+  </p:cSld>
+  <p:clrMapOvr>
+    <a:masterClrMapping/>
+  </p:clrMapOvr>
+</p:sld>
+</file>
+
+<file path=ppt/slides/slide27.xml><?xml version="1.0" encoding="utf-8"?>
+<p:sld xmlns:a="http://schemas.openxmlformats.org/drawingml/2006/main" xmlns:r="http://schemas.openxmlformats.org/officeDocument/2006/relationships" xmlns:p="http://schemas.openxmlformats.org/presentationml/2006/main">
+  <p:cSld>
+    <p:spTree>
+      <p:nvGrpSpPr>
+        <p:cNvPr id="1" name="">
+          <a:extLst>
+            <a:ext uri="{FF2B5EF4-FFF2-40B4-BE49-F238E27FC236}">
+              <a16:creationId xmlns:a16="http://schemas.microsoft.com/office/drawing/2014/main" id="{EB6AFDE8-0FE5-4F62-AE0E-E06AA5CFFC5A}"/>
+            </a:ext>
+          </a:extLst>
+        </p:cNvPr>
+        <p:cNvGrpSpPr/>
+        <p:nvPr/>
+      </p:nvGrpSpPr>
+      <p:grpSpPr>
+        <a:xfrm>
+          <a:off x="0" y="0"/>
+          <a:ext cx="0" cy="0"/>
+          <a:chOff x="0" y="0"/>
+          <a:chExt cx="0" cy="0"/>
+        </a:xfrm>
+      </p:grpSpPr>
+      <p:sp>
+        <p:nvSpPr>
+          <p:cNvPr id="2" name="Title 1">
+            <a:extLst>
+              <a:ext uri="{FF2B5EF4-FFF2-40B4-BE49-F238E27FC236}">
+                <a16:creationId xmlns:a16="http://schemas.microsoft.com/office/drawing/2014/main" id="{DDCFDBA9-ECAF-3470-299F-BD2D1A1FDBED}"/>
+              </a:ext>
+            </a:extLst>
+          </p:cNvPr>
+          <p:cNvSpPr>
+            <a:spLocks noGrp="1"/>
+          </p:cNvSpPr>
+          <p:nvPr>
+            <p:ph type="title"/>
+          </p:nvPr>
+        </p:nvSpPr>
+        <p:spPr/>
+        <p:txBody>
+          <a:bodyPr/>
+          <a:lstStyle/>
+          <a:p>
+            <a:r>
+              <a:rPr lang="en-US" dirty="0"/>
+              <a:t>All Armchair</a:t>
+            </a:r>
+          </a:p>
+        </p:txBody>
+      </p:sp>
+      <p:sp>
+        <p:nvSpPr>
+          <p:cNvPr id="3" name="Text Placeholder 2">
+            <a:extLst>
+              <a:ext uri="{FF2B5EF4-FFF2-40B4-BE49-F238E27FC236}">
+                <a16:creationId xmlns:a16="http://schemas.microsoft.com/office/drawing/2014/main" id="{CF627ABC-7A92-947C-7E6F-4DD2048B3223}"/>
+              </a:ext>
+            </a:extLst>
+          </p:cNvPr>
+          <p:cNvSpPr>
+            <a:spLocks noGrp="1"/>
+          </p:cNvSpPr>
+          <p:nvPr>
+            <p:ph type="body" idx="1"/>
+          </p:nvPr>
+        </p:nvSpPr>
+        <p:spPr/>
+        <p:txBody>
+          <a:bodyPr/>
+          <a:lstStyle/>
+          <a:p>
+            <a:r>
+              <a:rPr lang="en-US" dirty="0"/>
+              <a:t>N=12, eta=10</a:t>
+            </a:r>
+            <a:r>
+              <a:rPr lang="en-US" baseline="30000" dirty="0"/>
+              <a:t>-3</a:t>
+            </a:r>
+            <a:endParaRPr lang="en-US" dirty="0"/>
+          </a:p>
+        </p:txBody>
+      </p:sp>
+      <p:pic>
+        <p:nvPicPr>
+          <p:cNvPr id="8" name="Content Placeholder 7">
+            <a:extLst>
+              <a:ext uri="{FF2B5EF4-FFF2-40B4-BE49-F238E27FC236}">
+                <a16:creationId xmlns:a16="http://schemas.microsoft.com/office/drawing/2014/main" id="{0804B40F-DBAB-79E7-1922-8EE3E6BAAEA6}"/>
+              </a:ext>
+            </a:extLst>
+          </p:cNvPr>
+          <p:cNvPicPr>
+            <a:picLocks noGrp="1" noChangeAspect="1"/>
+          </p:cNvPicPr>
+          <p:nvPr>
+            <p:ph sz="half" idx="2"/>
+          </p:nvPr>
+        </p:nvPicPr>
+        <p:blipFill>
+          <a:blip r:embed="rId2"/>
+          <a:srcRect/>
+          <a:stretch/>
+        </p:blipFill>
+        <p:spPr>
+          <a:xfrm>
+            <a:off x="0" y="2902852"/>
+            <a:ext cx="9103005" cy="3243423"/>
+          </a:xfrm>
+          <a:prstGeom prst="rect">
+            <a:avLst/>
+          </a:prstGeom>
+        </p:spPr>
+      </p:pic>
+    </p:spTree>
+    <p:extLst>
+      <p:ext uri="{BB962C8B-B14F-4D97-AF65-F5344CB8AC3E}">
+        <p14:creationId xmlns:p14="http://schemas.microsoft.com/office/powerpoint/2010/main" val="697533465"/>
+      </p:ext>
+    </p:extLst>
+  </p:cSld>
+  <p:clrMapOvr>
+    <a:masterClrMapping/>
+  </p:clrMapOvr>
+</p:sld>
+</file>
+
+<file path=ppt/slides/slide28.xml><?xml version="1.0" encoding="utf-8"?>
+<p:sld xmlns:a="http://schemas.openxmlformats.org/drawingml/2006/main" xmlns:r="http://schemas.openxmlformats.org/officeDocument/2006/relationships" xmlns:p="http://schemas.openxmlformats.org/presentationml/2006/main">
+  <p:cSld>
+    <p:spTree>
+      <p:nvGrpSpPr>
+        <p:cNvPr id="1" name="">
+          <a:extLst>
+            <a:ext uri="{FF2B5EF4-FFF2-40B4-BE49-F238E27FC236}">
+              <a16:creationId xmlns:a16="http://schemas.microsoft.com/office/drawing/2014/main" id="{6E813674-B985-F4DC-D9A8-2A90425D6CFF}"/>
+            </a:ext>
+          </a:extLst>
+        </p:cNvPr>
+        <p:cNvGrpSpPr/>
+        <p:nvPr/>
+      </p:nvGrpSpPr>
+      <p:grpSpPr>
+        <a:xfrm>
+          <a:off x="0" y="0"/>
+          <a:ext cx="0" cy="0"/>
+          <a:chOff x="0" y="0"/>
+          <a:chExt cx="0" cy="0"/>
+        </a:xfrm>
+      </p:grpSpPr>
+      <p:sp>
+        <p:nvSpPr>
+          <p:cNvPr id="2" name="Title 1">
+            <a:extLst>
+              <a:ext uri="{FF2B5EF4-FFF2-40B4-BE49-F238E27FC236}">
+                <a16:creationId xmlns:a16="http://schemas.microsoft.com/office/drawing/2014/main" id="{2D43770A-EA76-798C-492E-5DFE4B8CF480}"/>
+              </a:ext>
+            </a:extLst>
+          </p:cNvPr>
+          <p:cNvSpPr>
+            <a:spLocks noGrp="1"/>
+          </p:cNvSpPr>
+          <p:nvPr>
+            <p:ph type="title"/>
+          </p:nvPr>
+        </p:nvSpPr>
+        <p:spPr/>
+        <p:txBody>
+          <a:bodyPr/>
+          <a:lstStyle/>
+          <a:p>
+            <a:r>
+              <a:rPr lang="en-US" dirty="0"/>
+              <a:t>All Armchair</a:t>
+            </a:r>
+          </a:p>
+        </p:txBody>
+      </p:sp>
+      <p:sp>
+        <p:nvSpPr>
+          <p:cNvPr id="3" name="Text Placeholder 2">
+            <a:extLst>
+              <a:ext uri="{FF2B5EF4-FFF2-40B4-BE49-F238E27FC236}">
+                <a16:creationId xmlns:a16="http://schemas.microsoft.com/office/drawing/2014/main" id="{643D4E7A-913D-4B78-E0EE-4D7EB20CF67B}"/>
+              </a:ext>
+            </a:extLst>
+          </p:cNvPr>
+          <p:cNvSpPr>
+            <a:spLocks noGrp="1"/>
+          </p:cNvSpPr>
+          <p:nvPr>
+            <p:ph type="body" idx="1"/>
+          </p:nvPr>
+        </p:nvSpPr>
+        <p:spPr/>
+        <p:txBody>
+          <a:bodyPr/>
+          <a:lstStyle/>
+          <a:p>
+            <a:r>
+              <a:rPr lang="en-US" dirty="0"/>
+              <a:t>N=12, eta=10</a:t>
+            </a:r>
+            <a:r>
+              <a:rPr lang="en-US" baseline="30000" dirty="0"/>
+              <a:t>-1</a:t>
+            </a:r>
+            <a:endParaRPr lang="en-US" dirty="0"/>
+          </a:p>
+        </p:txBody>
+      </p:sp>
+      <p:pic>
+        <p:nvPicPr>
+          <p:cNvPr id="8" name="Content Placeholder 7">
+            <a:extLst>
+              <a:ext uri="{FF2B5EF4-FFF2-40B4-BE49-F238E27FC236}">
+                <a16:creationId xmlns:a16="http://schemas.microsoft.com/office/drawing/2014/main" id="{3453E816-378A-EEB9-2EA2-92E8B3FEC37D}"/>
+              </a:ext>
+            </a:extLst>
+          </p:cNvPr>
+          <p:cNvPicPr>
+            <a:picLocks noGrp="1" noChangeAspect="1"/>
+          </p:cNvPicPr>
+          <p:nvPr>
+            <p:ph sz="half" idx="2"/>
+          </p:nvPr>
+        </p:nvPicPr>
+        <p:blipFill>
+          <a:blip r:embed="rId2"/>
+          <a:srcRect/>
+          <a:stretch/>
+        </p:blipFill>
+        <p:spPr>
+          <a:xfrm>
+            <a:off x="0" y="2902852"/>
+            <a:ext cx="9103005" cy="3243423"/>
+          </a:xfrm>
+          <a:prstGeom prst="rect">
+            <a:avLst/>
+          </a:prstGeom>
+        </p:spPr>
+      </p:pic>
+    </p:spTree>
+    <p:extLst>
+      <p:ext uri="{BB962C8B-B14F-4D97-AF65-F5344CB8AC3E}">
+        <p14:creationId xmlns:p14="http://schemas.microsoft.com/office/powerpoint/2010/main" val="3466302985"/>
+      </p:ext>
+    </p:extLst>
+  </p:cSld>
+  <p:clrMapOvr>
+    <a:masterClrMapping/>
+  </p:clrMapOvr>
+</p:sld>
+</file>
+
+<file path=ppt/slides/slide29.xml><?xml version="1.0" encoding="utf-8"?>
+<p:sld xmlns:a="http://schemas.openxmlformats.org/drawingml/2006/main" xmlns:r="http://schemas.openxmlformats.org/officeDocument/2006/relationships" xmlns:p="http://schemas.openxmlformats.org/presentationml/2006/main" show="0">
+  <p:cSld>
+    <p:spTree>
+      <p:nvGrpSpPr>
+        <p:cNvPr id="1" name=""/>
+        <p:cNvGrpSpPr/>
+        <p:nvPr/>
+      </p:nvGrpSpPr>
+      <p:grpSpPr>
+        <a:xfrm>
+          <a:off x="0" y="0"/>
+          <a:ext cx="0" cy="0"/>
+          <a:chOff x="0" y="0"/>
+          <a:chExt cx="0" cy="0"/>
+        </a:xfrm>
+      </p:grpSpPr>
+      <p:sp>
+        <p:nvSpPr>
+          <p:cNvPr id="7" name="Title 6">
+            <a:extLst>
+              <a:ext uri="{FF2B5EF4-FFF2-40B4-BE49-F238E27FC236}">
                 <a16:creationId xmlns:a16="http://schemas.microsoft.com/office/drawing/2014/main" id="{442990F7-FDA5-0C94-A608-69F719BA7ADF}"/>
               </a:ext>
             </a:extLst>
@@ -5362,8 +7522,101 @@
 </p:sld>
 </file>
 
-<file path=ppt/slides/slide19.xml><?xml version="1.0" encoding="utf-8"?>
+<file path=ppt/slides/slide3.xml><?xml version="1.0" encoding="utf-8"?>
 <p:sld xmlns:a="http://schemas.openxmlformats.org/drawingml/2006/main" xmlns:r="http://schemas.openxmlformats.org/officeDocument/2006/relationships" xmlns:p="http://schemas.openxmlformats.org/presentationml/2006/main">
+  <p:cSld>
+    <p:spTree>
+      <p:nvGrpSpPr>
+        <p:cNvPr id="1" name=""/>
+        <p:cNvGrpSpPr/>
+        <p:nvPr/>
+      </p:nvGrpSpPr>
+      <p:grpSpPr>
+        <a:xfrm>
+          <a:off x="0" y="0"/>
+          <a:ext cx="0" cy="0"/>
+          <a:chOff x="0" y="0"/>
+          <a:chExt cx="0" cy="0"/>
+        </a:xfrm>
+      </p:grpSpPr>
+      <p:sp>
+        <p:nvSpPr>
+          <p:cNvPr id="2" name="Title 1">
+            <a:extLst>
+              <a:ext uri="{FF2B5EF4-FFF2-40B4-BE49-F238E27FC236}">
+                <a16:creationId xmlns:a16="http://schemas.microsoft.com/office/drawing/2014/main" id="{55A63F3B-6BEB-D82A-1F4C-172651A703A5}"/>
+              </a:ext>
+            </a:extLst>
+          </p:cNvPr>
+          <p:cNvSpPr>
+            <a:spLocks noGrp="1"/>
+          </p:cNvSpPr>
+          <p:nvPr>
+            <p:ph type="title"/>
+          </p:nvPr>
+        </p:nvSpPr>
+        <p:spPr>
+          <a:xfrm>
+            <a:off x="142195" y="96789"/>
+            <a:ext cx="3869703" cy="1143000"/>
+          </a:xfrm>
+        </p:spPr>
+        <p:txBody>
+          <a:bodyPr/>
+          <a:lstStyle/>
+          <a:p>
+            <a:r>
+              <a:rPr lang="en-US" dirty="0"/>
+              <a:t>Performance</a:t>
+            </a:r>
+          </a:p>
+        </p:txBody>
+      </p:sp>
+      <p:pic>
+        <p:nvPicPr>
+          <p:cNvPr id="9" name="Picture 8">
+            <a:extLst>
+              <a:ext uri="{FF2B5EF4-FFF2-40B4-BE49-F238E27FC236}">
+                <a16:creationId xmlns:a16="http://schemas.microsoft.com/office/drawing/2014/main" id="{DFF678BA-A7DB-02AE-44FB-9BCDE3510EF4}"/>
+              </a:ext>
+            </a:extLst>
+          </p:cNvPr>
+          <p:cNvPicPr>
+            <a:picLocks noChangeAspect="1"/>
+          </p:cNvPicPr>
+          <p:nvPr/>
+        </p:nvPicPr>
+        <p:blipFill>
+          <a:blip r:embed="rId2"/>
+          <a:stretch>
+            <a:fillRect/>
+          </a:stretch>
+        </p:blipFill>
+        <p:spPr>
+          <a:xfrm>
+            <a:off x="2077045" y="1110268"/>
+            <a:ext cx="5747201" cy="5739953"/>
+          </a:xfrm>
+          <a:prstGeom prst="rect">
+            <a:avLst/>
+          </a:prstGeom>
+        </p:spPr>
+      </p:pic>
+    </p:spTree>
+    <p:extLst>
+      <p:ext uri="{BB962C8B-B14F-4D97-AF65-F5344CB8AC3E}">
+        <p14:creationId xmlns:p14="http://schemas.microsoft.com/office/powerpoint/2010/main" val="797662212"/>
+      </p:ext>
+    </p:extLst>
+  </p:cSld>
+  <p:clrMapOvr>
+    <a:masterClrMapping/>
+  </p:clrMapOvr>
+</p:sld>
+</file>
+
+<file path=ppt/slides/slide30.xml><?xml version="1.0" encoding="utf-8"?>
+<p:sld xmlns:a="http://schemas.openxmlformats.org/drawingml/2006/main" xmlns:r="http://schemas.openxmlformats.org/officeDocument/2006/relationships" xmlns:p="http://schemas.openxmlformats.org/presentationml/2006/main" show="0">
   <p:cSld>
     <p:spTree>
       <p:nvGrpSpPr>
@@ -5697,85 +7950,8 @@
 </p:sld>
 </file>
 
-<file path=ppt/slides/slide2.xml><?xml version="1.0" encoding="utf-8"?>
-<p:sld xmlns:a="http://schemas.openxmlformats.org/drawingml/2006/main" xmlns:r="http://schemas.openxmlformats.org/officeDocument/2006/relationships" xmlns:p="http://schemas.openxmlformats.org/presentationml/2006/main">
-  <p:cSld>
-    <p:spTree>
-      <p:nvGrpSpPr>
-        <p:cNvPr id="1" name=""/>
-        <p:cNvGrpSpPr/>
-        <p:nvPr/>
-      </p:nvGrpSpPr>
-      <p:grpSpPr>
-        <a:xfrm>
-          <a:off x="0" y="0"/>
-          <a:ext cx="0" cy="0"/>
-          <a:chOff x="0" y="0"/>
-          <a:chExt cx="0" cy="0"/>
-        </a:xfrm>
-      </p:grpSpPr>
-      <p:sp>
-        <p:nvSpPr>
-          <p:cNvPr id="2" name="Title 1"/>
-          <p:cNvSpPr>
-            <a:spLocks noGrp="1"/>
-          </p:cNvSpPr>
-          <p:nvPr>
-            <p:ph type="title"/>
-          </p:nvPr>
-        </p:nvSpPr>
-        <p:spPr/>
-        <p:txBody>
-          <a:bodyPr/>
-          <a:lstStyle/>
-          <a:p>
-            <a:pPr marL="0" lvl="0" indent="0">
-              <a:buNone/>
-            </a:pPr>
-            <a:r>
-              <a:t>Primitive unitcell tiling</a:t>
-            </a:r>
-          </a:p>
-        </p:txBody>
-      </p:sp>
-      <p:sp>
-        <p:nvSpPr>
-          <p:cNvPr id="3" name="Content Placeholder 2"/>
-          <p:cNvSpPr>
-            <a:spLocks noGrp="1"/>
-          </p:cNvSpPr>
-          <p:nvPr>
-            <p:ph idx="1"/>
-          </p:nvPr>
-        </p:nvSpPr>
-        <p:spPr/>
-        <p:txBody>
-          <a:bodyPr/>
-          <a:lstStyle/>
-          <a:p>
-            <a:pPr lvl="1"/>
-            <a:r>
-              <a:t>For interactive plot: </a:t>
-            </a:r>
-            <a:r>
-              <a:rPr>
-                <a:hlinkClick r:id="rId2"/>
-              </a:rPr>
-              <a:t>bastian-explore-rse.streamlit.app</a:t>
-            </a:r>
-          </a:p>
-        </p:txBody>
-      </p:sp>
-    </p:spTree>
-  </p:cSld>
-  <p:clrMapOvr>
-    <a:masterClrMapping/>
-  </p:clrMapOvr>
-</p:sld>
-</file>
-
-<file path=ppt/slides/slide20.xml><?xml version="1.0" encoding="utf-8"?>
-<p:sld xmlns:a="http://schemas.openxmlformats.org/drawingml/2006/main" xmlns:r="http://schemas.openxmlformats.org/officeDocument/2006/relationships" xmlns:p="http://schemas.openxmlformats.org/presentationml/2006/main">
+<file path=ppt/slides/slide31.xml><?xml version="1.0" encoding="utf-8"?>
+<p:sld xmlns:a="http://schemas.openxmlformats.org/drawingml/2006/main" xmlns:r="http://schemas.openxmlformats.org/officeDocument/2006/relationships" xmlns:p="http://schemas.openxmlformats.org/presentationml/2006/main" show="0">
   <p:cSld>
     <p:spTree>
       <p:nvGrpSpPr>
@@ -5902,8 +8078,8 @@
 </p:sld>
 </file>
 
-<file path=ppt/slides/slide21.xml><?xml version="1.0" encoding="utf-8"?>
-<p:sld xmlns:a="http://schemas.openxmlformats.org/drawingml/2006/main" xmlns:r="http://schemas.openxmlformats.org/officeDocument/2006/relationships" xmlns:p="http://schemas.openxmlformats.org/presentationml/2006/main">
+<file path=ppt/slides/slide32.xml><?xml version="1.0" encoding="utf-8"?>
+<p:sld xmlns:a="http://schemas.openxmlformats.org/drawingml/2006/main" xmlns:r="http://schemas.openxmlformats.org/officeDocument/2006/relationships" xmlns:p="http://schemas.openxmlformats.org/presentationml/2006/main" show="0">
   <p:cSld>
     <p:spTree>
       <p:nvGrpSpPr>
@@ -6030,8 +8206,8 @@
 </p:sld>
 </file>
 
-<file path=ppt/slides/slide22.xml><?xml version="1.0" encoding="utf-8"?>
-<p:sld xmlns:a="http://schemas.openxmlformats.org/drawingml/2006/main" xmlns:r="http://schemas.openxmlformats.org/officeDocument/2006/relationships" xmlns:p="http://schemas.openxmlformats.org/presentationml/2006/main">
+<file path=ppt/slides/slide33.xml><?xml version="1.0" encoding="utf-8"?>
+<p:sld xmlns:a="http://schemas.openxmlformats.org/drawingml/2006/main" xmlns:r="http://schemas.openxmlformats.org/officeDocument/2006/relationships" xmlns:p="http://schemas.openxmlformats.org/presentationml/2006/main" show="0">
   <p:cSld>
     <p:spTree>
       <p:nvGrpSpPr>
@@ -6158,8 +8334,8 @@
 </p:sld>
 </file>
 
-<file path=ppt/slides/slide23.xml><?xml version="1.0" encoding="utf-8"?>
-<p:sld xmlns:a="http://schemas.openxmlformats.org/drawingml/2006/main" xmlns:r="http://schemas.openxmlformats.org/officeDocument/2006/relationships" xmlns:p="http://schemas.openxmlformats.org/presentationml/2006/main">
+<file path=ppt/slides/slide34.xml><?xml version="1.0" encoding="utf-8"?>
+<p:sld xmlns:a="http://schemas.openxmlformats.org/drawingml/2006/main" xmlns:r="http://schemas.openxmlformats.org/officeDocument/2006/relationships" xmlns:p="http://schemas.openxmlformats.org/presentationml/2006/main" show="0">
   <p:cSld>
     <p:spTree>
       <p:nvGrpSpPr>
@@ -6286,8 +8462,8 @@
 </p:sld>
 </file>
 
-<file path=ppt/slides/slide24.xml><?xml version="1.0" encoding="utf-8"?>
-<p:sld xmlns:a="http://schemas.openxmlformats.org/drawingml/2006/main" xmlns:r="http://schemas.openxmlformats.org/officeDocument/2006/relationships" xmlns:p="http://schemas.openxmlformats.org/presentationml/2006/main">
+<file path=ppt/slides/slide35.xml><?xml version="1.0" encoding="utf-8"?>
+<p:sld xmlns:a="http://schemas.openxmlformats.org/drawingml/2006/main" xmlns:r="http://schemas.openxmlformats.org/officeDocument/2006/relationships" xmlns:p="http://schemas.openxmlformats.org/presentationml/2006/main" show="0">
   <p:cSld>
     <p:spTree>
       <p:nvGrpSpPr>
@@ -6415,7 +8591,7 @@
 </p:sld>
 </file>
 
-<file path=ppt/slides/slide25.xml><?xml version="1.0" encoding="utf-8"?>
+<file path=ppt/slides/slide4.xml><?xml version="1.0" encoding="utf-8"?>
 <p:sld xmlns:a="http://schemas.openxmlformats.org/drawingml/2006/main" xmlns:r="http://schemas.openxmlformats.org/officeDocument/2006/relationships" xmlns:p="http://schemas.openxmlformats.org/presentationml/2006/main">
   <p:cSld>
     <p:spTree>
@@ -6434,18 +8610,18 @@
       </p:grpSpPr>
       <p:sp>
         <p:nvSpPr>
-          <p:cNvPr id="7" name="Title 6">
-            <a:extLst>
-              <a:ext uri="{FF2B5EF4-FFF2-40B4-BE49-F238E27FC236}">
-                <a16:creationId xmlns:a16="http://schemas.microsoft.com/office/drawing/2014/main" id="{4AC3D201-B5FA-60C8-E5E6-2A323F7EDBD6}"/>
-              </a:ext>
-            </a:extLst>
-          </p:cNvPr>
-          <p:cNvSpPr>
-            <a:spLocks noGrp="1"/>
-          </p:cNvSpPr>
-          <p:nvPr>
-            <p:ph type="ctrTitle"/>
+          <p:cNvPr id="2" name="Title 1">
+            <a:extLst>
+              <a:ext uri="{FF2B5EF4-FFF2-40B4-BE49-F238E27FC236}">
+                <a16:creationId xmlns:a16="http://schemas.microsoft.com/office/drawing/2014/main" id="{4B1702E7-0814-97CC-5AAA-C756B334633A}"/>
+              </a:ext>
+            </a:extLst>
+          </p:cNvPr>
+          <p:cNvSpPr>
+            <a:spLocks noGrp="1"/>
+          </p:cNvSpPr>
+          <p:nvPr>
+            <p:ph type="title"/>
           </p:nvPr>
         </p:nvSpPr>
         <p:spPr/>
@@ -6455,25 +8631,33 @@
           <a:p>
             <a:r>
               <a:rPr lang="en-US" dirty="0"/>
-              <a:t>Armchair vs zig-zag (N=12)</a:t>
-            </a:r>
-          </a:p>
-        </p:txBody>
-      </p:sp>
-      <p:sp>
-        <p:nvSpPr>
-          <p:cNvPr id="8" name="Subtitle 7">
-            <a:extLst>
-              <a:ext uri="{FF2B5EF4-FFF2-40B4-BE49-F238E27FC236}">
-                <a16:creationId xmlns:a16="http://schemas.microsoft.com/office/drawing/2014/main" id="{32303070-4748-BAA5-03C1-F155A420A80A}"/>
-              </a:ext>
-            </a:extLst>
-          </p:cNvPr>
-          <p:cNvSpPr>
-            <a:spLocks noGrp="1"/>
-          </p:cNvSpPr>
-          <p:nvPr>
-            <p:ph type="subTitle" idx="1"/>
+              <a:t>Default (</a:t>
+            </a:r>
+            <a:r>
+              <a:rPr lang="en-US" dirty="0" err="1"/>
+              <a:t>romb</a:t>
+            </a:r>
+            <a:r>
+              <a:rPr lang="en-US" dirty="0"/>
+              <a:t>), Increasing eta</a:t>
+            </a:r>
+          </a:p>
+        </p:txBody>
+      </p:sp>
+      <p:sp>
+        <p:nvSpPr>
+          <p:cNvPr id="4" name="Text Placeholder 3">
+            <a:extLst>
+              <a:ext uri="{FF2B5EF4-FFF2-40B4-BE49-F238E27FC236}">
+                <a16:creationId xmlns:a16="http://schemas.microsoft.com/office/drawing/2014/main" id="{CD31E74C-F5D3-C601-3558-B4E1990CFC9C}"/>
+              </a:ext>
+            </a:extLst>
+          </p:cNvPr>
+          <p:cNvSpPr>
+            <a:spLocks noGrp="1"/>
+          </p:cNvSpPr>
+          <p:nvPr>
+            <p:ph type="body" idx="1"/>
           </p:nvPr>
         </p:nvSpPr>
         <p:spPr/>
@@ -6481,104 +8665,18 @@
           <a:bodyPr/>
           <a:lstStyle/>
           <a:p>
-            <a:endParaRPr lang="en-US"/>
-          </a:p>
-        </p:txBody>
-      </p:sp>
-    </p:spTree>
-    <p:extLst>
-      <p:ext uri="{BB962C8B-B14F-4D97-AF65-F5344CB8AC3E}">
-        <p14:creationId xmlns:p14="http://schemas.microsoft.com/office/powerpoint/2010/main" val="3195349523"/>
-      </p:ext>
-    </p:extLst>
-  </p:cSld>
-  <p:clrMapOvr>
-    <a:masterClrMapping/>
-  </p:clrMapOvr>
-</p:sld>
-</file>
-
-<file path=ppt/slides/slide26.xml><?xml version="1.0" encoding="utf-8"?>
-<p:sld xmlns:a="http://schemas.openxmlformats.org/drawingml/2006/main" xmlns:r="http://schemas.openxmlformats.org/officeDocument/2006/relationships" xmlns:p="http://schemas.openxmlformats.org/presentationml/2006/main">
-  <p:cSld>
-    <p:spTree>
-      <p:nvGrpSpPr>
-        <p:cNvPr id="1" name="">
-          <a:extLst>
-            <a:ext uri="{FF2B5EF4-FFF2-40B4-BE49-F238E27FC236}">
-              <a16:creationId xmlns:a16="http://schemas.microsoft.com/office/drawing/2014/main" id="{A2F92920-C10C-FF22-1FAA-91D6B5B9DEA3}"/>
-            </a:ext>
-          </a:extLst>
-        </p:cNvPr>
-        <p:cNvGrpSpPr/>
-        <p:nvPr/>
-      </p:nvGrpSpPr>
-      <p:grpSpPr>
-        <a:xfrm>
-          <a:off x="0" y="0"/>
-          <a:ext cx="0" cy="0"/>
-          <a:chOff x="0" y="0"/>
-          <a:chExt cx="0" cy="0"/>
-        </a:xfrm>
-      </p:grpSpPr>
-      <p:sp>
-        <p:nvSpPr>
-          <p:cNvPr id="2" name="Title 1">
-            <a:extLst>
-              <a:ext uri="{FF2B5EF4-FFF2-40B4-BE49-F238E27FC236}">
-                <a16:creationId xmlns:a16="http://schemas.microsoft.com/office/drawing/2014/main" id="{F9E22F95-68CC-F06C-669E-83768889BCE9}"/>
-              </a:ext>
-            </a:extLst>
-          </p:cNvPr>
-          <p:cNvSpPr>
-            <a:spLocks noGrp="1"/>
-          </p:cNvSpPr>
-          <p:nvPr>
-            <p:ph type="title"/>
-          </p:nvPr>
-        </p:nvSpPr>
-        <p:spPr/>
-        <p:txBody>
-          <a:bodyPr/>
-          <a:lstStyle/>
-          <a:p>
             <a:r>
               <a:rPr lang="en-US" dirty="0"/>
-              <a:t>Armchair vs zigzag</a:t>
-            </a:r>
-          </a:p>
-        </p:txBody>
-      </p:sp>
-      <p:sp>
-        <p:nvSpPr>
-          <p:cNvPr id="3" name="Text Placeholder 2">
-            <a:extLst>
-              <a:ext uri="{FF2B5EF4-FFF2-40B4-BE49-F238E27FC236}">
-                <a16:creationId xmlns:a16="http://schemas.microsoft.com/office/drawing/2014/main" id="{F5FD684C-80F2-3C0D-89E5-98A469C84245}"/>
-              </a:ext>
-            </a:extLst>
-          </p:cNvPr>
-          <p:cNvSpPr>
-            <a:spLocks noGrp="1"/>
-          </p:cNvSpPr>
-          <p:nvPr>
-            <p:ph type="body" idx="1"/>
-          </p:nvPr>
-        </p:nvSpPr>
-        <p:spPr/>
-        <p:txBody>
-          <a:bodyPr/>
-          <a:lstStyle/>
-          <a:p>
-            <a:r>
-              <a:rPr lang="en-US" dirty="0"/>
-              <a:t>E=0 eV, N=12, eta=10</a:t>
+              <a:t>E=0 eV, eta=10</a:t>
             </a:r>
             <a:r>
               <a:rPr lang="en-US" baseline="30000" dirty="0"/>
               <a:t>-1</a:t>
             </a:r>
-            <a:endParaRPr lang="en-US" dirty="0"/>
+            <a:r>
+              <a:rPr lang="en-US" dirty="0"/>
+              <a:t>, NN=2</a:t>
+            </a:r>
           </a:p>
         </p:txBody>
       </p:sp>
@@ -6587,959 +8685,7 @@
           <p:cNvPr id="8" name="Content Placeholder 7">
             <a:extLst>
               <a:ext uri="{FF2B5EF4-FFF2-40B4-BE49-F238E27FC236}">
-                <a16:creationId xmlns:a16="http://schemas.microsoft.com/office/drawing/2014/main" id="{838C61AC-F557-BC10-7A2F-B0F16317D1A7}"/>
-              </a:ext>
-            </a:extLst>
-          </p:cNvPr>
-          <p:cNvPicPr>
-            <a:picLocks noGrp="1" noChangeAspect="1"/>
-          </p:cNvPicPr>
-          <p:nvPr>
-            <p:ph sz="half" idx="2"/>
-          </p:nvPr>
-        </p:nvPicPr>
-        <p:blipFill>
-          <a:blip r:embed="rId2"/>
-          <a:srcRect/>
-          <a:stretch/>
-        </p:blipFill>
-        <p:spPr>
-          <a:xfrm>
-            <a:off x="500423" y="2283283"/>
-            <a:ext cx="7993930" cy="4570249"/>
-          </a:xfrm>
-          <a:prstGeom prst="rect">
-            <a:avLst/>
-          </a:prstGeom>
-        </p:spPr>
-      </p:pic>
-    </p:spTree>
-    <p:extLst>
-      <p:ext uri="{BB962C8B-B14F-4D97-AF65-F5344CB8AC3E}">
-        <p14:creationId xmlns:p14="http://schemas.microsoft.com/office/powerpoint/2010/main" val="3272173800"/>
-      </p:ext>
-    </p:extLst>
-  </p:cSld>
-  <p:clrMapOvr>
-    <a:masterClrMapping/>
-  </p:clrMapOvr>
-</p:sld>
-</file>
-
-<file path=ppt/slides/slide27.xml><?xml version="1.0" encoding="utf-8"?>
-<p:sld xmlns:a="http://schemas.openxmlformats.org/drawingml/2006/main" xmlns:r="http://schemas.openxmlformats.org/officeDocument/2006/relationships" xmlns:p="http://schemas.openxmlformats.org/presentationml/2006/main">
-  <p:cSld>
-    <p:spTree>
-      <p:nvGrpSpPr>
-        <p:cNvPr id="1" name="">
-          <a:extLst>
-            <a:ext uri="{FF2B5EF4-FFF2-40B4-BE49-F238E27FC236}">
-              <a16:creationId xmlns:a16="http://schemas.microsoft.com/office/drawing/2014/main" id="{A1FB4AB8-F968-240F-B5F1-16A4B190C970}"/>
-            </a:ext>
-          </a:extLst>
-        </p:cNvPr>
-        <p:cNvGrpSpPr/>
-        <p:nvPr/>
-      </p:nvGrpSpPr>
-      <p:grpSpPr>
-        <a:xfrm>
-          <a:off x="0" y="0"/>
-          <a:ext cx="0" cy="0"/>
-          <a:chOff x="0" y="0"/>
-          <a:chExt cx="0" cy="0"/>
-        </a:xfrm>
-      </p:grpSpPr>
-      <p:sp>
-        <p:nvSpPr>
-          <p:cNvPr id="2" name="Title 1">
-            <a:extLst>
-              <a:ext uri="{FF2B5EF4-FFF2-40B4-BE49-F238E27FC236}">
-                <a16:creationId xmlns:a16="http://schemas.microsoft.com/office/drawing/2014/main" id="{2B4117E4-112E-0BF2-BF3E-180C36D203BD}"/>
-              </a:ext>
-            </a:extLst>
-          </p:cNvPr>
-          <p:cNvSpPr>
-            <a:spLocks noGrp="1"/>
-          </p:cNvSpPr>
-          <p:nvPr>
-            <p:ph type="title"/>
-          </p:nvPr>
-        </p:nvSpPr>
-        <p:spPr/>
-        <p:txBody>
-          <a:bodyPr/>
-          <a:lstStyle/>
-          <a:p>
-            <a:r>
-              <a:rPr lang="en-US" dirty="0"/>
-              <a:t>Armchair vs zigzag</a:t>
-            </a:r>
-          </a:p>
-        </p:txBody>
-      </p:sp>
-      <p:sp>
-        <p:nvSpPr>
-          <p:cNvPr id="3" name="Text Placeholder 2">
-            <a:extLst>
-              <a:ext uri="{FF2B5EF4-FFF2-40B4-BE49-F238E27FC236}">
-                <a16:creationId xmlns:a16="http://schemas.microsoft.com/office/drawing/2014/main" id="{00D2D745-B147-ABF8-4CB3-2C640269413F}"/>
-              </a:ext>
-            </a:extLst>
-          </p:cNvPr>
-          <p:cNvSpPr>
-            <a:spLocks noGrp="1"/>
-          </p:cNvSpPr>
-          <p:nvPr>
-            <p:ph type="body" idx="1"/>
-          </p:nvPr>
-        </p:nvSpPr>
-        <p:spPr/>
-        <p:txBody>
-          <a:bodyPr/>
-          <a:lstStyle/>
-          <a:p>
-            <a:r>
-              <a:rPr lang="en-US" dirty="0"/>
-              <a:t>E=0 eV, N=12, eta=10</a:t>
-            </a:r>
-            <a:r>
-              <a:rPr lang="en-US" baseline="30000" dirty="0"/>
-              <a:t>-2</a:t>
-            </a:r>
-            <a:endParaRPr lang="en-US" dirty="0"/>
-          </a:p>
-        </p:txBody>
-      </p:sp>
-      <p:pic>
-        <p:nvPicPr>
-          <p:cNvPr id="8" name="Content Placeholder 7">
-            <a:extLst>
-              <a:ext uri="{FF2B5EF4-FFF2-40B4-BE49-F238E27FC236}">
-                <a16:creationId xmlns:a16="http://schemas.microsoft.com/office/drawing/2014/main" id="{E455E437-0CEA-2B3C-6810-7E4C46FFE784}"/>
-              </a:ext>
-            </a:extLst>
-          </p:cNvPr>
-          <p:cNvPicPr>
-            <a:picLocks noGrp="1" noChangeAspect="1"/>
-          </p:cNvPicPr>
-          <p:nvPr>
-            <p:ph sz="half" idx="2"/>
-          </p:nvPr>
-        </p:nvPicPr>
-        <p:blipFill>
-          <a:blip r:embed="rId2"/>
-          <a:srcRect/>
-          <a:stretch/>
-        </p:blipFill>
-        <p:spPr>
-          <a:xfrm>
-            <a:off x="500423" y="2283283"/>
-            <a:ext cx="7993930" cy="4570249"/>
-          </a:xfrm>
-          <a:prstGeom prst="rect">
-            <a:avLst/>
-          </a:prstGeom>
-        </p:spPr>
-      </p:pic>
-    </p:spTree>
-    <p:extLst>
-      <p:ext uri="{BB962C8B-B14F-4D97-AF65-F5344CB8AC3E}">
-        <p14:creationId xmlns:p14="http://schemas.microsoft.com/office/powerpoint/2010/main" val="691443624"/>
-      </p:ext>
-    </p:extLst>
-  </p:cSld>
-  <p:clrMapOvr>
-    <a:masterClrMapping/>
-  </p:clrMapOvr>
-</p:sld>
-</file>
-
-<file path=ppt/slides/slide28.xml><?xml version="1.0" encoding="utf-8"?>
-<p:sld xmlns:a="http://schemas.openxmlformats.org/drawingml/2006/main" xmlns:r="http://schemas.openxmlformats.org/officeDocument/2006/relationships" xmlns:p="http://schemas.openxmlformats.org/presentationml/2006/main">
-  <p:cSld>
-    <p:spTree>
-      <p:nvGrpSpPr>
-        <p:cNvPr id="1" name="">
-          <a:extLst>
-            <a:ext uri="{FF2B5EF4-FFF2-40B4-BE49-F238E27FC236}">
-              <a16:creationId xmlns:a16="http://schemas.microsoft.com/office/drawing/2014/main" id="{C4AD047D-F24D-F699-E718-191B951B4C87}"/>
-            </a:ext>
-          </a:extLst>
-        </p:cNvPr>
-        <p:cNvGrpSpPr/>
-        <p:nvPr/>
-      </p:nvGrpSpPr>
-      <p:grpSpPr>
-        <a:xfrm>
-          <a:off x="0" y="0"/>
-          <a:ext cx="0" cy="0"/>
-          <a:chOff x="0" y="0"/>
-          <a:chExt cx="0" cy="0"/>
-        </a:xfrm>
-      </p:grpSpPr>
-      <p:sp>
-        <p:nvSpPr>
-          <p:cNvPr id="2" name="Title 1">
-            <a:extLst>
-              <a:ext uri="{FF2B5EF4-FFF2-40B4-BE49-F238E27FC236}">
-                <a16:creationId xmlns:a16="http://schemas.microsoft.com/office/drawing/2014/main" id="{586ED33A-8360-D160-B404-1FB095AD9A6D}"/>
-              </a:ext>
-            </a:extLst>
-          </p:cNvPr>
-          <p:cNvSpPr>
-            <a:spLocks noGrp="1"/>
-          </p:cNvSpPr>
-          <p:nvPr>
-            <p:ph type="title"/>
-          </p:nvPr>
-        </p:nvSpPr>
-        <p:spPr/>
-        <p:txBody>
-          <a:bodyPr/>
-          <a:lstStyle/>
-          <a:p>
-            <a:r>
-              <a:rPr lang="en-US" dirty="0"/>
-              <a:t>Armchair vs zigzag</a:t>
-            </a:r>
-          </a:p>
-        </p:txBody>
-      </p:sp>
-      <p:sp>
-        <p:nvSpPr>
-          <p:cNvPr id="3" name="Text Placeholder 2">
-            <a:extLst>
-              <a:ext uri="{FF2B5EF4-FFF2-40B4-BE49-F238E27FC236}">
-                <a16:creationId xmlns:a16="http://schemas.microsoft.com/office/drawing/2014/main" id="{2C077DB9-9C7B-8C2D-FA39-C25F70DDEB95}"/>
-              </a:ext>
-            </a:extLst>
-          </p:cNvPr>
-          <p:cNvSpPr>
-            <a:spLocks noGrp="1"/>
-          </p:cNvSpPr>
-          <p:nvPr>
-            <p:ph type="body" idx="1"/>
-          </p:nvPr>
-        </p:nvSpPr>
-        <p:spPr/>
-        <p:txBody>
-          <a:bodyPr/>
-          <a:lstStyle/>
-          <a:p>
-            <a:r>
-              <a:rPr lang="en-US" dirty="0"/>
-              <a:t>E=0 eV, N=12, eta=10</a:t>
-            </a:r>
-            <a:r>
-              <a:rPr lang="en-US" baseline="30000" dirty="0"/>
-              <a:t>-3</a:t>
-            </a:r>
-            <a:endParaRPr lang="en-US" dirty="0"/>
-          </a:p>
-        </p:txBody>
-      </p:sp>
-      <p:pic>
-        <p:nvPicPr>
-          <p:cNvPr id="8" name="Content Placeholder 7">
-            <a:extLst>
-              <a:ext uri="{FF2B5EF4-FFF2-40B4-BE49-F238E27FC236}">
-                <a16:creationId xmlns:a16="http://schemas.microsoft.com/office/drawing/2014/main" id="{03384C14-A0D2-0AD0-C881-E6353C2B9616}"/>
-              </a:ext>
-            </a:extLst>
-          </p:cNvPr>
-          <p:cNvPicPr>
-            <a:picLocks noGrp="1" noChangeAspect="1"/>
-          </p:cNvPicPr>
-          <p:nvPr>
-            <p:ph sz="half" idx="2"/>
-          </p:nvPr>
-        </p:nvPicPr>
-        <p:blipFill>
-          <a:blip r:embed="rId2"/>
-          <a:srcRect/>
-          <a:stretch/>
-        </p:blipFill>
-        <p:spPr>
-          <a:xfrm>
-            <a:off x="500423" y="2283283"/>
-            <a:ext cx="7993930" cy="4570249"/>
-          </a:xfrm>
-          <a:prstGeom prst="rect">
-            <a:avLst/>
-          </a:prstGeom>
-        </p:spPr>
-      </p:pic>
-    </p:spTree>
-    <p:extLst>
-      <p:ext uri="{BB962C8B-B14F-4D97-AF65-F5344CB8AC3E}">
-        <p14:creationId xmlns:p14="http://schemas.microsoft.com/office/powerpoint/2010/main" val="402229321"/>
-      </p:ext>
-    </p:extLst>
-  </p:cSld>
-  <p:clrMapOvr>
-    <a:masterClrMapping/>
-  </p:clrMapOvr>
-</p:sld>
-</file>
-
-<file path=ppt/slides/slide29.xml><?xml version="1.0" encoding="utf-8"?>
-<p:sld xmlns:a="http://schemas.openxmlformats.org/drawingml/2006/main" xmlns:r="http://schemas.openxmlformats.org/officeDocument/2006/relationships" xmlns:p="http://schemas.openxmlformats.org/presentationml/2006/main">
-  <p:cSld>
-    <p:spTree>
-      <p:nvGrpSpPr>
-        <p:cNvPr id="1" name="">
-          <a:extLst>
-            <a:ext uri="{FF2B5EF4-FFF2-40B4-BE49-F238E27FC236}">
-              <a16:creationId xmlns:a16="http://schemas.microsoft.com/office/drawing/2014/main" id="{CBE969C1-2B0A-6B69-5D60-60B15FC32BE2}"/>
-            </a:ext>
-          </a:extLst>
-        </p:cNvPr>
-        <p:cNvGrpSpPr/>
-        <p:nvPr/>
-      </p:nvGrpSpPr>
-      <p:grpSpPr>
-        <a:xfrm>
-          <a:off x="0" y="0"/>
-          <a:ext cx="0" cy="0"/>
-          <a:chOff x="0" y="0"/>
-          <a:chExt cx="0" cy="0"/>
-        </a:xfrm>
-      </p:grpSpPr>
-      <p:sp>
-        <p:nvSpPr>
-          <p:cNvPr id="2" name="Title 1">
-            <a:extLst>
-              <a:ext uri="{FF2B5EF4-FFF2-40B4-BE49-F238E27FC236}">
-                <a16:creationId xmlns:a16="http://schemas.microsoft.com/office/drawing/2014/main" id="{86D8CF1C-C7D2-0D18-A5EF-4AE6B6D9B534}"/>
-              </a:ext>
-            </a:extLst>
-          </p:cNvPr>
-          <p:cNvSpPr>
-            <a:spLocks noGrp="1"/>
-          </p:cNvSpPr>
-          <p:nvPr>
-            <p:ph type="title"/>
-          </p:nvPr>
-        </p:nvSpPr>
-        <p:spPr/>
-        <p:txBody>
-          <a:bodyPr/>
-          <a:lstStyle/>
-          <a:p>
-            <a:r>
-              <a:rPr lang="en-US" dirty="0"/>
-              <a:t>Armchair vs zigzag</a:t>
-            </a:r>
-          </a:p>
-        </p:txBody>
-      </p:sp>
-      <p:sp>
-        <p:nvSpPr>
-          <p:cNvPr id="3" name="Text Placeholder 2">
-            <a:extLst>
-              <a:ext uri="{FF2B5EF4-FFF2-40B4-BE49-F238E27FC236}">
-                <a16:creationId xmlns:a16="http://schemas.microsoft.com/office/drawing/2014/main" id="{B81F7AEB-0B72-1E29-C7AE-7BDDAC29EE88}"/>
-              </a:ext>
-            </a:extLst>
-          </p:cNvPr>
-          <p:cNvSpPr>
-            <a:spLocks noGrp="1"/>
-          </p:cNvSpPr>
-          <p:nvPr>
-            <p:ph type="body" idx="1"/>
-          </p:nvPr>
-        </p:nvSpPr>
-        <p:spPr/>
-        <p:txBody>
-          <a:bodyPr/>
-          <a:lstStyle/>
-          <a:p>
-            <a:r>
-              <a:rPr lang="en-US" dirty="0"/>
-              <a:t>E=0 eV, N=12, eta=10</a:t>
-            </a:r>
-            <a:r>
-              <a:rPr lang="en-US" baseline="30000" dirty="0"/>
-              <a:t>-4</a:t>
-            </a:r>
-            <a:endParaRPr lang="en-US" dirty="0"/>
-          </a:p>
-        </p:txBody>
-      </p:sp>
-      <p:pic>
-        <p:nvPicPr>
-          <p:cNvPr id="8" name="Content Placeholder 7">
-            <a:extLst>
-              <a:ext uri="{FF2B5EF4-FFF2-40B4-BE49-F238E27FC236}">
-                <a16:creationId xmlns:a16="http://schemas.microsoft.com/office/drawing/2014/main" id="{153B756B-FB12-F779-74F7-D0E4239DDA67}"/>
-              </a:ext>
-            </a:extLst>
-          </p:cNvPr>
-          <p:cNvPicPr>
-            <a:picLocks noGrp="1" noChangeAspect="1"/>
-          </p:cNvPicPr>
-          <p:nvPr>
-            <p:ph sz="half" idx="2"/>
-          </p:nvPr>
-        </p:nvPicPr>
-        <p:blipFill>
-          <a:blip r:embed="rId2"/>
-          <a:srcRect/>
-          <a:stretch/>
-        </p:blipFill>
-        <p:spPr>
-          <a:xfrm>
-            <a:off x="500423" y="2283283"/>
-            <a:ext cx="7993930" cy="4570249"/>
-          </a:xfrm>
-          <a:prstGeom prst="rect">
-            <a:avLst/>
-          </a:prstGeom>
-        </p:spPr>
-      </p:pic>
-    </p:spTree>
-    <p:extLst>
-      <p:ext uri="{BB962C8B-B14F-4D97-AF65-F5344CB8AC3E}">
-        <p14:creationId xmlns:p14="http://schemas.microsoft.com/office/powerpoint/2010/main" val="3832255315"/>
-      </p:ext>
-    </p:extLst>
-  </p:cSld>
-  <p:clrMapOvr>
-    <a:masterClrMapping/>
-  </p:clrMapOvr>
-</p:sld>
-</file>
-
-<file path=ppt/slides/slide3.xml><?xml version="1.0" encoding="utf-8"?>
-<p:sld xmlns:a="http://schemas.openxmlformats.org/drawingml/2006/main" xmlns:r="http://schemas.openxmlformats.org/officeDocument/2006/relationships" xmlns:p="http://schemas.openxmlformats.org/presentationml/2006/main">
-  <p:cSld>
-    <p:spTree>
-      <p:nvGrpSpPr>
-        <p:cNvPr id="1" name=""/>
-        <p:cNvGrpSpPr/>
-        <p:nvPr/>
-      </p:nvGrpSpPr>
-      <p:grpSpPr>
-        <a:xfrm>
-          <a:off x="0" y="0"/>
-          <a:ext cx="0" cy="0"/>
-          <a:chOff x="0" y="0"/>
-          <a:chExt cx="0" cy="0"/>
-        </a:xfrm>
-      </p:grpSpPr>
-      <p:sp>
-        <p:nvSpPr>
-          <p:cNvPr id="2" name="Title 1">
-            <a:extLst>
-              <a:ext uri="{FF2B5EF4-FFF2-40B4-BE49-F238E27FC236}">
-                <a16:creationId xmlns:a16="http://schemas.microsoft.com/office/drawing/2014/main" id="{4B1702E7-0814-97CC-5AAA-C756B334633A}"/>
-              </a:ext>
-            </a:extLst>
-          </p:cNvPr>
-          <p:cNvSpPr>
-            <a:spLocks noGrp="1"/>
-          </p:cNvSpPr>
-          <p:nvPr>
-            <p:ph type="title"/>
-          </p:nvPr>
-        </p:nvSpPr>
-        <p:spPr/>
-        <p:txBody>
-          <a:bodyPr/>
-          <a:lstStyle/>
-          <a:p>
-            <a:r>
-              <a:rPr lang="en-US" dirty="0"/>
-              <a:t>Default (</a:t>
-            </a:r>
-            <a:r>
-              <a:rPr lang="en-US" dirty="0" err="1"/>
-              <a:t>romb</a:t>
-            </a:r>
-            <a:r>
-              <a:rPr lang="en-US" dirty="0"/>
-              <a:t>)</a:t>
-            </a:r>
-          </a:p>
-        </p:txBody>
-      </p:sp>
-      <p:sp>
-        <p:nvSpPr>
-          <p:cNvPr id="4" name="Text Placeholder 3">
-            <a:extLst>
-              <a:ext uri="{FF2B5EF4-FFF2-40B4-BE49-F238E27FC236}">
-                <a16:creationId xmlns:a16="http://schemas.microsoft.com/office/drawing/2014/main" id="{CD31E74C-F5D3-C601-3558-B4E1990CFC9C}"/>
-              </a:ext>
-            </a:extLst>
-          </p:cNvPr>
-          <p:cNvSpPr>
-            <a:spLocks noGrp="1"/>
-          </p:cNvSpPr>
-          <p:nvPr>
-            <p:ph type="body" idx="1"/>
-          </p:nvPr>
-        </p:nvSpPr>
-        <p:spPr/>
-        <p:txBody>
-          <a:bodyPr/>
-          <a:lstStyle/>
-          <a:p>
-            <a:r>
-              <a:rPr lang="en-US" dirty="0"/>
-              <a:t>E=0 eV, eta=10</a:t>
-            </a:r>
-            <a:r>
-              <a:rPr lang="en-US" baseline="30000" dirty="0"/>
-              <a:t>-3</a:t>
-            </a:r>
-            <a:r>
-              <a:rPr lang="en-US" dirty="0"/>
-              <a:t>, NN=4</a:t>
-            </a:r>
-          </a:p>
-        </p:txBody>
-      </p:sp>
-      <p:pic>
-        <p:nvPicPr>
-          <p:cNvPr id="8" name="Content Placeholder 7">
-            <a:extLst>
-              <a:ext uri="{FF2B5EF4-FFF2-40B4-BE49-F238E27FC236}">
                 <a16:creationId xmlns:a16="http://schemas.microsoft.com/office/drawing/2014/main" id="{B1562E6A-1925-0D87-854D-F65FCD37C91F}"/>
-              </a:ext>
-            </a:extLst>
-          </p:cNvPr>
-          <p:cNvPicPr>
-            <a:picLocks noGrp="1" noChangeAspect="1"/>
-          </p:cNvPicPr>
-          <p:nvPr>
-            <p:ph sz="half" idx="2"/>
-          </p:nvPr>
-        </p:nvPicPr>
-        <p:blipFill>
-          <a:blip r:embed="rId2"/>
-          <a:stretch>
-            <a:fillRect/>
-          </a:stretch>
-        </p:blipFill>
-        <p:spPr>
-          <a:xfrm>
-            <a:off x="0" y="2306166"/>
-            <a:ext cx="9146530" cy="3896671"/>
-          </a:xfrm>
-          <a:prstGeom prst="rect">
-            <a:avLst/>
-          </a:prstGeom>
-        </p:spPr>
-      </p:pic>
-      <p:sp>
-        <p:nvSpPr>
-          <p:cNvPr id="9" name="Text Placeholder 3">
-            <a:extLst>
-              <a:ext uri="{FF2B5EF4-FFF2-40B4-BE49-F238E27FC236}">
-                <a16:creationId xmlns:a16="http://schemas.microsoft.com/office/drawing/2014/main" id="{5469C602-6024-6716-3551-B4DFAA4E5C24}"/>
-              </a:ext>
-            </a:extLst>
-          </p:cNvPr>
-          <p:cNvSpPr txBox="1">
-            <a:spLocks/>
-          </p:cNvSpPr>
-          <p:nvPr/>
-        </p:nvSpPr>
-        <p:spPr>
-          <a:xfrm>
-            <a:off x="4497388" y="1535113"/>
-            <a:ext cx="4040188" cy="639762"/>
-          </a:xfrm>
-          <a:prstGeom prst="rect">
-            <a:avLst/>
-          </a:prstGeom>
-        </p:spPr>
-        <p:txBody>
-          <a:bodyPr vert="horz" lIns="91440" tIns="45720" rIns="91440" bIns="45720" rtlCol="0" anchor="b">
-            <a:normAutofit/>
-          </a:bodyPr>
-          <a:lstStyle>
-            <a:lvl1pPr marL="0" indent="0" algn="l" defTabSz="457200" rtl="0" eaLnBrk="1" latinLnBrk="0" hangingPunct="1">
-              <a:spcBef>
-                <a:spcPct val="20000"/>
-              </a:spcBef>
-              <a:buFont typeface="Arial"/>
-              <a:buNone/>
-              <a:defRPr sz="2400" b="1" kern="1200">
-                <a:solidFill>
-                  <a:schemeClr val="tx1"/>
-                </a:solidFill>
-                <a:latin typeface="+mn-lt"/>
-                <a:ea typeface="+mn-ea"/>
-                <a:cs typeface="+mn-cs"/>
-              </a:defRPr>
-            </a:lvl1pPr>
-            <a:lvl2pPr marL="457200" indent="0" algn="l" defTabSz="457200" rtl="0" eaLnBrk="1" latinLnBrk="0" hangingPunct="1">
-              <a:spcBef>
-                <a:spcPct val="20000"/>
-              </a:spcBef>
-              <a:buFont typeface="Arial"/>
-              <a:buNone/>
-              <a:defRPr sz="2000" b="1" kern="1200">
-                <a:solidFill>
-                  <a:schemeClr val="tx1"/>
-                </a:solidFill>
-                <a:latin typeface="+mn-lt"/>
-                <a:ea typeface="+mn-ea"/>
-                <a:cs typeface="+mn-cs"/>
-              </a:defRPr>
-            </a:lvl2pPr>
-            <a:lvl3pPr marL="914400" indent="0" algn="l" defTabSz="457200" rtl="0" eaLnBrk="1" latinLnBrk="0" hangingPunct="1">
-              <a:spcBef>
-                <a:spcPct val="20000"/>
-              </a:spcBef>
-              <a:buFont typeface="Arial"/>
-              <a:buNone/>
-              <a:defRPr sz="1800" b="1" kern="1200">
-                <a:solidFill>
-                  <a:schemeClr val="tx1"/>
-                </a:solidFill>
-                <a:latin typeface="+mn-lt"/>
-                <a:ea typeface="+mn-ea"/>
-                <a:cs typeface="+mn-cs"/>
-              </a:defRPr>
-            </a:lvl3pPr>
-            <a:lvl4pPr marL="1371600" indent="0" algn="l" defTabSz="457200" rtl="0" eaLnBrk="1" latinLnBrk="0" hangingPunct="1">
-              <a:spcBef>
-                <a:spcPct val="20000"/>
-              </a:spcBef>
-              <a:buFont typeface="Arial"/>
-              <a:buNone/>
-              <a:defRPr sz="1600" b="1" kern="1200">
-                <a:solidFill>
-                  <a:schemeClr val="tx1"/>
-                </a:solidFill>
-                <a:latin typeface="+mn-lt"/>
-                <a:ea typeface="+mn-ea"/>
-                <a:cs typeface="+mn-cs"/>
-              </a:defRPr>
-            </a:lvl4pPr>
-            <a:lvl5pPr marL="1828800" indent="0" algn="l" defTabSz="457200" rtl="0" eaLnBrk="1" latinLnBrk="0" hangingPunct="1">
-              <a:spcBef>
-                <a:spcPct val="20000"/>
-              </a:spcBef>
-              <a:buFont typeface="Arial"/>
-              <a:buNone/>
-              <a:defRPr sz="1600" b="1" kern="1200">
-                <a:solidFill>
-                  <a:schemeClr val="tx1"/>
-                </a:solidFill>
-                <a:latin typeface="+mn-lt"/>
-                <a:ea typeface="+mn-ea"/>
-                <a:cs typeface="+mn-cs"/>
-              </a:defRPr>
-            </a:lvl5pPr>
-            <a:lvl6pPr marL="2286000" indent="0" algn="l" defTabSz="457200" rtl="0" eaLnBrk="1" latinLnBrk="0" hangingPunct="1">
-              <a:spcBef>
-                <a:spcPct val="20000"/>
-              </a:spcBef>
-              <a:buFont typeface="Arial"/>
-              <a:buNone/>
-              <a:defRPr sz="1600" b="1" kern="1200">
-                <a:solidFill>
-                  <a:schemeClr val="tx1"/>
-                </a:solidFill>
-                <a:latin typeface="+mn-lt"/>
-                <a:ea typeface="+mn-ea"/>
-                <a:cs typeface="+mn-cs"/>
-              </a:defRPr>
-            </a:lvl6pPr>
-            <a:lvl7pPr marL="2743200" indent="0" algn="l" defTabSz="457200" rtl="0" eaLnBrk="1" latinLnBrk="0" hangingPunct="1">
-              <a:spcBef>
-                <a:spcPct val="20000"/>
-              </a:spcBef>
-              <a:buFont typeface="Arial"/>
-              <a:buNone/>
-              <a:defRPr sz="1600" b="1" kern="1200">
-                <a:solidFill>
-                  <a:schemeClr val="tx1"/>
-                </a:solidFill>
-                <a:latin typeface="+mn-lt"/>
-                <a:ea typeface="+mn-ea"/>
-                <a:cs typeface="+mn-cs"/>
-              </a:defRPr>
-            </a:lvl7pPr>
-            <a:lvl8pPr marL="3200400" indent="0" algn="l" defTabSz="457200" rtl="0" eaLnBrk="1" latinLnBrk="0" hangingPunct="1">
-              <a:spcBef>
-                <a:spcPct val="20000"/>
-              </a:spcBef>
-              <a:buFont typeface="Arial"/>
-              <a:buNone/>
-              <a:defRPr sz="1600" b="1" kern="1200">
-                <a:solidFill>
-                  <a:schemeClr val="tx1"/>
-                </a:solidFill>
-                <a:latin typeface="+mn-lt"/>
-                <a:ea typeface="+mn-ea"/>
-                <a:cs typeface="+mn-cs"/>
-              </a:defRPr>
-            </a:lvl8pPr>
-            <a:lvl9pPr marL="3657600" indent="0" algn="l" defTabSz="457200" rtl="0" eaLnBrk="1" latinLnBrk="0" hangingPunct="1">
-              <a:spcBef>
-                <a:spcPct val="20000"/>
-              </a:spcBef>
-              <a:buFont typeface="Arial"/>
-              <a:buNone/>
-              <a:defRPr sz="1600" b="1" kern="1200">
-                <a:solidFill>
-                  <a:schemeClr val="tx1"/>
-                </a:solidFill>
-                <a:latin typeface="+mn-lt"/>
-                <a:ea typeface="+mn-ea"/>
-                <a:cs typeface="+mn-cs"/>
-              </a:defRPr>
-            </a:lvl9pPr>
-          </a:lstStyle>
-          <a:p>
-            <a:r>
-              <a:rPr lang="en-US" dirty="0"/>
-              <a:t>N=9</a:t>
-            </a:r>
-          </a:p>
-        </p:txBody>
-      </p:sp>
-    </p:spTree>
-  </p:cSld>
-  <p:clrMapOvr>
-    <a:masterClrMapping/>
-  </p:clrMapOvr>
-</p:sld>
-</file>
-
-<file path=ppt/slides/slide30.xml><?xml version="1.0" encoding="utf-8"?>
-<p:sld xmlns:a="http://schemas.openxmlformats.org/drawingml/2006/main" xmlns:r="http://schemas.openxmlformats.org/officeDocument/2006/relationships" xmlns:p="http://schemas.openxmlformats.org/presentationml/2006/main">
-  <p:cSld>
-    <p:spTree>
-      <p:nvGrpSpPr>
-        <p:cNvPr id="1" name="">
-          <a:extLst>
-            <a:ext uri="{FF2B5EF4-FFF2-40B4-BE49-F238E27FC236}">
-              <a16:creationId xmlns:a16="http://schemas.microsoft.com/office/drawing/2014/main" id="{F82CABF4-AF11-BC62-10F9-ED5DCDAFF170}"/>
-            </a:ext>
-          </a:extLst>
-        </p:cNvPr>
-        <p:cNvGrpSpPr/>
-        <p:nvPr/>
-      </p:nvGrpSpPr>
-      <p:grpSpPr>
-        <a:xfrm>
-          <a:off x="0" y="0"/>
-          <a:ext cx="0" cy="0"/>
-          <a:chOff x="0" y="0"/>
-          <a:chExt cx="0" cy="0"/>
-        </a:xfrm>
-      </p:grpSpPr>
-      <p:sp>
-        <p:nvSpPr>
-          <p:cNvPr id="2" name="Title 1">
-            <a:extLst>
-              <a:ext uri="{FF2B5EF4-FFF2-40B4-BE49-F238E27FC236}">
-                <a16:creationId xmlns:a16="http://schemas.microsoft.com/office/drawing/2014/main" id="{1CF4DE44-5411-9A84-7392-3CBA35259AF7}"/>
-              </a:ext>
-            </a:extLst>
-          </p:cNvPr>
-          <p:cNvSpPr>
-            <a:spLocks noGrp="1"/>
-          </p:cNvSpPr>
-          <p:nvPr>
-            <p:ph type="title"/>
-          </p:nvPr>
-        </p:nvSpPr>
-        <p:spPr/>
-        <p:txBody>
-          <a:bodyPr/>
-          <a:lstStyle/>
-          <a:p>
-            <a:r>
-              <a:rPr lang="en-US" dirty="0"/>
-              <a:t>Armchair vs zigzag</a:t>
-            </a:r>
-          </a:p>
-        </p:txBody>
-      </p:sp>
-      <p:sp>
-        <p:nvSpPr>
-          <p:cNvPr id="3" name="Text Placeholder 2">
-            <a:extLst>
-              <a:ext uri="{FF2B5EF4-FFF2-40B4-BE49-F238E27FC236}">
-                <a16:creationId xmlns:a16="http://schemas.microsoft.com/office/drawing/2014/main" id="{D42B1CF9-AAD4-54E2-346C-F1664288A241}"/>
-              </a:ext>
-            </a:extLst>
-          </p:cNvPr>
-          <p:cNvSpPr>
-            <a:spLocks noGrp="1"/>
-          </p:cNvSpPr>
-          <p:nvPr>
-            <p:ph type="body" idx="1"/>
-          </p:nvPr>
-        </p:nvSpPr>
-        <p:spPr/>
-        <p:txBody>
-          <a:bodyPr/>
-          <a:lstStyle/>
-          <a:p>
-            <a:r>
-              <a:rPr lang="en-US" dirty="0"/>
-              <a:t>E=0 eV, N=12, eta=10</a:t>
-            </a:r>
-            <a:r>
-              <a:rPr lang="en-US" baseline="30000" dirty="0"/>
-              <a:t>-5</a:t>
-            </a:r>
-            <a:endParaRPr lang="en-US" dirty="0"/>
-          </a:p>
-        </p:txBody>
-      </p:sp>
-      <p:pic>
-        <p:nvPicPr>
-          <p:cNvPr id="8" name="Content Placeholder 7">
-            <a:extLst>
-              <a:ext uri="{FF2B5EF4-FFF2-40B4-BE49-F238E27FC236}">
-                <a16:creationId xmlns:a16="http://schemas.microsoft.com/office/drawing/2014/main" id="{6D4D30D6-EBED-C04D-CB28-FA8982927DE9}"/>
-              </a:ext>
-            </a:extLst>
-          </p:cNvPr>
-          <p:cNvPicPr>
-            <a:picLocks noGrp="1" noChangeAspect="1"/>
-          </p:cNvPicPr>
-          <p:nvPr>
-            <p:ph sz="half" idx="2"/>
-          </p:nvPr>
-        </p:nvPicPr>
-        <p:blipFill>
-          <a:blip r:embed="rId2"/>
-          <a:srcRect/>
-          <a:stretch/>
-        </p:blipFill>
-        <p:spPr>
-          <a:xfrm>
-            <a:off x="500423" y="2283283"/>
-            <a:ext cx="7993930" cy="4570249"/>
-          </a:xfrm>
-          <a:prstGeom prst="rect">
-            <a:avLst/>
-          </a:prstGeom>
-        </p:spPr>
-      </p:pic>
-    </p:spTree>
-    <p:extLst>
-      <p:ext uri="{BB962C8B-B14F-4D97-AF65-F5344CB8AC3E}">
-        <p14:creationId xmlns:p14="http://schemas.microsoft.com/office/powerpoint/2010/main" val="1378727748"/>
-      </p:ext>
-    </p:extLst>
-  </p:cSld>
-  <p:clrMapOvr>
-    <a:masterClrMapping/>
-  </p:clrMapOvr>
-</p:sld>
-</file>
-
-<file path=ppt/slides/slide4.xml><?xml version="1.0" encoding="utf-8"?>
-<p:sld xmlns:a="http://schemas.openxmlformats.org/drawingml/2006/main" xmlns:r="http://schemas.openxmlformats.org/officeDocument/2006/relationships" xmlns:p="http://schemas.openxmlformats.org/presentationml/2006/main">
-  <p:cSld>
-    <p:spTree>
-      <p:nvGrpSpPr>
-        <p:cNvPr id="1" name="">
-          <a:extLst>
-            <a:ext uri="{FF2B5EF4-FFF2-40B4-BE49-F238E27FC236}">
-              <a16:creationId xmlns:a16="http://schemas.microsoft.com/office/drawing/2014/main" id="{D7E2BE3E-2AB8-F949-218D-DE9DE3907B67}"/>
-            </a:ext>
-          </a:extLst>
-        </p:cNvPr>
-        <p:cNvGrpSpPr/>
-        <p:nvPr/>
-      </p:nvGrpSpPr>
-      <p:grpSpPr>
-        <a:xfrm>
-          <a:off x="0" y="0"/>
-          <a:ext cx="0" cy="0"/>
-          <a:chOff x="0" y="0"/>
-          <a:chExt cx="0" cy="0"/>
-        </a:xfrm>
-      </p:grpSpPr>
-      <p:sp>
-        <p:nvSpPr>
-          <p:cNvPr id="2" name="Title 1">
-            <a:extLst>
-              <a:ext uri="{FF2B5EF4-FFF2-40B4-BE49-F238E27FC236}">
-                <a16:creationId xmlns:a16="http://schemas.microsoft.com/office/drawing/2014/main" id="{742EC764-037A-1B3E-129B-CB3C75EFAECC}"/>
-              </a:ext>
-            </a:extLst>
-          </p:cNvPr>
-          <p:cNvSpPr>
-            <a:spLocks noGrp="1"/>
-          </p:cNvSpPr>
-          <p:nvPr>
-            <p:ph type="title"/>
-          </p:nvPr>
-        </p:nvSpPr>
-        <p:spPr/>
-        <p:txBody>
-          <a:bodyPr/>
-          <a:lstStyle/>
-          <a:p>
-            <a:r>
-              <a:rPr lang="en-US" dirty="0"/>
-              <a:t>Default (</a:t>
-            </a:r>
-            <a:r>
-              <a:rPr lang="en-US" dirty="0" err="1"/>
-              <a:t>romb</a:t>
-            </a:r>
-            <a:r>
-              <a:rPr lang="en-US" dirty="0"/>
-              <a:t>)</a:t>
-            </a:r>
-          </a:p>
-        </p:txBody>
-      </p:sp>
-      <p:sp>
-        <p:nvSpPr>
-          <p:cNvPr id="4" name="Text Placeholder 3">
-            <a:extLst>
-              <a:ext uri="{FF2B5EF4-FFF2-40B4-BE49-F238E27FC236}">
-                <a16:creationId xmlns:a16="http://schemas.microsoft.com/office/drawing/2014/main" id="{0FEA6A72-8CA8-0F9E-20A7-02B37B8A10E5}"/>
-              </a:ext>
-            </a:extLst>
-          </p:cNvPr>
-          <p:cNvSpPr>
-            <a:spLocks noGrp="1"/>
-          </p:cNvSpPr>
-          <p:nvPr>
-            <p:ph type="body" idx="1"/>
-          </p:nvPr>
-        </p:nvSpPr>
-        <p:spPr/>
-        <p:txBody>
-          <a:bodyPr/>
-          <a:lstStyle/>
-          <a:p>
-            <a:r>
-              <a:rPr lang="en-US" dirty="0"/>
-              <a:t>E=0 eV, eta=10</a:t>
-            </a:r>
-            <a:r>
-              <a:rPr lang="en-US" baseline="30000" dirty="0"/>
-              <a:t>-3</a:t>
-            </a:r>
-            <a:r>
-              <a:rPr lang="en-US" dirty="0"/>
-              <a:t>, NN=4</a:t>
-            </a:r>
-          </a:p>
-        </p:txBody>
-      </p:sp>
-      <p:pic>
-        <p:nvPicPr>
-          <p:cNvPr id="8" name="Content Placeholder 7">
-            <a:extLst>
-              <a:ext uri="{FF2B5EF4-FFF2-40B4-BE49-F238E27FC236}">
-                <a16:creationId xmlns:a16="http://schemas.microsoft.com/office/drawing/2014/main" id="{EA55BDFF-C47E-72AE-03DB-1D3201045697}"/>
               </a:ext>
             </a:extLst>
           </p:cNvPr>
@@ -7570,7 +8716,7 @@
           <p:cNvPr id="9" name="Text Placeholder 3">
             <a:extLst>
               <a:ext uri="{FF2B5EF4-FFF2-40B4-BE49-F238E27FC236}">
-                <a16:creationId xmlns:a16="http://schemas.microsoft.com/office/drawing/2014/main" id="{9360DD3C-B06F-241C-2D24-7B69C8F1A5D5}"/>
+                <a16:creationId xmlns:a16="http://schemas.microsoft.com/office/drawing/2014/main" id="{5469C602-6024-6716-3551-B4DFAA4E5C24}"/>
               </a:ext>
             </a:extLst>
           </p:cNvPr>
@@ -7732,17 +8878,12 @@
           <a:p>
             <a:r>
               <a:rPr lang="en-US" dirty="0"/>
-              <a:t>N=13</a:t>
+              <a:t>N=9</a:t>
             </a:r>
           </a:p>
         </p:txBody>
       </p:sp>
     </p:spTree>
-    <p:extLst>
-      <p:ext uri="{BB962C8B-B14F-4D97-AF65-F5344CB8AC3E}">
-        <p14:creationId xmlns:p14="http://schemas.microsoft.com/office/powerpoint/2010/main" val="3142564818"/>
-      </p:ext>
-    </p:extLst>
   </p:cSld>
   <p:clrMapOvr>
     <a:masterClrMapping/>
@@ -7758,7 +8899,7 @@
         <p:cNvPr id="1" name="">
           <a:extLst>
             <a:ext uri="{FF2B5EF4-FFF2-40B4-BE49-F238E27FC236}">
-              <a16:creationId xmlns:a16="http://schemas.microsoft.com/office/drawing/2014/main" id="{54DCB450-AB2D-F47B-ADFD-BB893968E994}"/>
+              <a16:creationId xmlns:a16="http://schemas.microsoft.com/office/drawing/2014/main" id="{0CA9E536-7C75-895B-0262-7E3B7CCB9DC8}"/>
             </a:ext>
           </a:extLst>
         </p:cNvPr>
@@ -7778,7 +8919,7 @@
           <p:cNvPr id="2" name="Title 1">
             <a:extLst>
               <a:ext uri="{FF2B5EF4-FFF2-40B4-BE49-F238E27FC236}">
-                <a16:creationId xmlns:a16="http://schemas.microsoft.com/office/drawing/2014/main" id="{584767A3-A77A-DF9E-F5FB-6F754CC17439}"/>
+                <a16:creationId xmlns:a16="http://schemas.microsoft.com/office/drawing/2014/main" id="{DB2000E2-A30D-E0C6-8C05-F44AE4E05AAD}"/>
               </a:ext>
             </a:extLst>
           </p:cNvPr>
@@ -7804,7 +8945,7 @@
             </a:r>
             <a:r>
               <a:rPr lang="en-US" dirty="0"/>
-              <a:t>)</a:t>
+              <a:t>), Increasing eta</a:t>
             </a:r>
           </a:p>
         </p:txBody>
@@ -7814,7 +8955,7 @@
           <p:cNvPr id="4" name="Text Placeholder 3">
             <a:extLst>
               <a:ext uri="{FF2B5EF4-FFF2-40B4-BE49-F238E27FC236}">
-                <a16:creationId xmlns:a16="http://schemas.microsoft.com/office/drawing/2014/main" id="{525A97CB-1DFE-31C1-F337-96AE4EF2C7A0}"/>
+                <a16:creationId xmlns:a16="http://schemas.microsoft.com/office/drawing/2014/main" id="{1B1105FB-AD39-67D2-6F22-B3549E3533CA}"/>
               </a:ext>
             </a:extLst>
           </p:cNvPr>
@@ -7840,7 +8981,7 @@
             </a:r>
             <a:r>
               <a:rPr lang="en-US" dirty="0"/>
-              <a:t>, NN=4</a:t>
+              <a:t>, NN=2</a:t>
             </a:r>
           </a:p>
         </p:txBody>
@@ -7850,7 +8991,7 @@
           <p:cNvPr id="8" name="Content Placeholder 7">
             <a:extLst>
               <a:ext uri="{FF2B5EF4-FFF2-40B4-BE49-F238E27FC236}">
-                <a16:creationId xmlns:a16="http://schemas.microsoft.com/office/drawing/2014/main" id="{97BF0C09-A222-1A43-253F-A5064B8F39A7}"/>
+                <a16:creationId xmlns:a16="http://schemas.microsoft.com/office/drawing/2014/main" id="{97E2A6B2-B441-0EEF-C2EC-A53F84483686}"/>
               </a:ext>
             </a:extLst>
           </p:cNvPr>
@@ -7881,7 +9022,7 @@
           <p:cNvPr id="9" name="Text Placeholder 3">
             <a:extLst>
               <a:ext uri="{FF2B5EF4-FFF2-40B4-BE49-F238E27FC236}">
-                <a16:creationId xmlns:a16="http://schemas.microsoft.com/office/drawing/2014/main" id="{08F6A0E8-1D5A-3A0D-F392-2E3AFC366CC0}"/>
+                <a16:creationId xmlns:a16="http://schemas.microsoft.com/office/drawing/2014/main" id="{B6263127-4EFC-A7DC-6395-8CB4BE7C45D9}"/>
               </a:ext>
             </a:extLst>
           </p:cNvPr>
@@ -8043,7 +9184,7 @@
           <a:p>
             <a:r>
               <a:rPr lang="en-US" dirty="0"/>
-              <a:t>N=17</a:t>
+              <a:t>N=9</a:t>
             </a:r>
           </a:p>
         </p:txBody>
@@ -8051,7 +9192,7 @@
     </p:spTree>
     <p:extLst>
       <p:ext uri="{BB962C8B-B14F-4D97-AF65-F5344CB8AC3E}">
-        <p14:creationId xmlns:p14="http://schemas.microsoft.com/office/powerpoint/2010/main" val="463496342"/>
+        <p14:creationId xmlns:p14="http://schemas.microsoft.com/office/powerpoint/2010/main" val="1903089167"/>
       </p:ext>
     </p:extLst>
   </p:cSld>
@@ -8069,7 +9210,7 @@
         <p:cNvPr id="1" name="">
           <a:extLst>
             <a:ext uri="{FF2B5EF4-FFF2-40B4-BE49-F238E27FC236}">
-              <a16:creationId xmlns:a16="http://schemas.microsoft.com/office/drawing/2014/main" id="{12724FF4-A195-0FCB-6992-B74FD87833AF}"/>
+              <a16:creationId xmlns:a16="http://schemas.microsoft.com/office/drawing/2014/main" id="{C7B15C13-EE14-52E5-0A7A-476F0D7EF6D9}"/>
             </a:ext>
           </a:extLst>
         </p:cNvPr>
@@ -8089,7 +9230,7 @@
           <p:cNvPr id="2" name="Title 1">
             <a:extLst>
               <a:ext uri="{FF2B5EF4-FFF2-40B4-BE49-F238E27FC236}">
-                <a16:creationId xmlns:a16="http://schemas.microsoft.com/office/drawing/2014/main" id="{CCB02A32-F898-87E5-E67E-5A244B0DA7F5}"/>
+                <a16:creationId xmlns:a16="http://schemas.microsoft.com/office/drawing/2014/main" id="{39A35E66-F0A8-148D-0311-8EB9EE8B66F1}"/>
               </a:ext>
             </a:extLst>
           </p:cNvPr>
@@ -8115,7 +9256,7 @@
             </a:r>
             <a:r>
               <a:rPr lang="en-US" dirty="0"/>
-              <a:t>)</a:t>
+              <a:t>), Increasing eta</a:t>
             </a:r>
           </a:p>
         </p:txBody>
@@ -8125,7 +9266,7 @@
           <p:cNvPr id="4" name="Text Placeholder 3">
             <a:extLst>
               <a:ext uri="{FF2B5EF4-FFF2-40B4-BE49-F238E27FC236}">
-                <a16:creationId xmlns:a16="http://schemas.microsoft.com/office/drawing/2014/main" id="{3FCE91C6-3185-0076-335B-3932B020C3E3}"/>
+                <a16:creationId xmlns:a16="http://schemas.microsoft.com/office/drawing/2014/main" id="{FB42E127-3CFA-3C2C-2BE9-5541431B1ED6}"/>
               </a:ext>
             </a:extLst>
           </p:cNvPr>
@@ -8147,11 +9288,11 @@
             </a:r>
             <a:r>
               <a:rPr lang="en-US" baseline="30000" dirty="0"/>
-              <a:t>-3</a:t>
+              <a:t>-4</a:t>
             </a:r>
             <a:r>
               <a:rPr lang="en-US" dirty="0"/>
-              <a:t>, NN=4</a:t>
+              <a:t>, NN=2</a:t>
             </a:r>
           </a:p>
         </p:txBody>
@@ -8161,7 +9302,7 @@
           <p:cNvPr id="8" name="Content Placeholder 7">
             <a:extLst>
               <a:ext uri="{FF2B5EF4-FFF2-40B4-BE49-F238E27FC236}">
-                <a16:creationId xmlns:a16="http://schemas.microsoft.com/office/drawing/2014/main" id="{D0139DDF-9EB0-457A-631B-4568CED6377C}"/>
+                <a16:creationId xmlns:a16="http://schemas.microsoft.com/office/drawing/2014/main" id="{EBC3D1B8-52F3-357C-44BB-13CA528971C0}"/>
               </a:ext>
             </a:extLst>
           </p:cNvPr>
@@ -8192,7 +9333,7 @@
           <p:cNvPr id="9" name="Text Placeholder 3">
             <a:extLst>
               <a:ext uri="{FF2B5EF4-FFF2-40B4-BE49-F238E27FC236}">
-                <a16:creationId xmlns:a16="http://schemas.microsoft.com/office/drawing/2014/main" id="{6384B2C4-B319-D19E-3EBB-280FCD473997}"/>
+                <a16:creationId xmlns:a16="http://schemas.microsoft.com/office/drawing/2014/main" id="{8744BE98-160A-9C51-2B1B-F5A1F49ABB57}"/>
               </a:ext>
             </a:extLst>
           </p:cNvPr>
@@ -8354,7 +9495,7 @@
           <a:p>
             <a:r>
               <a:rPr lang="en-US" dirty="0"/>
-              <a:t>N=21</a:t>
+              <a:t>N=9</a:t>
             </a:r>
           </a:p>
         </p:txBody>
@@ -8362,7 +9503,7 @@
     </p:spTree>
     <p:extLst>
       <p:ext uri="{BB962C8B-B14F-4D97-AF65-F5344CB8AC3E}">
-        <p14:creationId xmlns:p14="http://schemas.microsoft.com/office/powerpoint/2010/main" val="921654947"/>
+        <p14:creationId xmlns:p14="http://schemas.microsoft.com/office/powerpoint/2010/main" val="4113906377"/>
       </p:ext>
     </p:extLst>
   </p:cSld>
@@ -8377,7 +9518,13 @@
   <p:cSld>
     <p:spTree>
       <p:nvGrpSpPr>
-        <p:cNvPr id="1" name=""/>
+        <p:cNvPr id="1" name="">
+          <a:extLst>
+            <a:ext uri="{FF2B5EF4-FFF2-40B4-BE49-F238E27FC236}">
+              <a16:creationId xmlns:a16="http://schemas.microsoft.com/office/drawing/2014/main" id="{A729C8F8-BACA-9A49-515C-43B61DF36E3C}"/>
+            </a:ext>
+          </a:extLst>
+        </p:cNvPr>
         <p:cNvGrpSpPr/>
         <p:nvPr/>
       </p:nvGrpSpPr>
@@ -8391,18 +9538,18 @@
       </p:grpSpPr>
       <p:sp>
         <p:nvSpPr>
-          <p:cNvPr id="7" name="Title 6">
-            <a:extLst>
-              <a:ext uri="{FF2B5EF4-FFF2-40B4-BE49-F238E27FC236}">
-                <a16:creationId xmlns:a16="http://schemas.microsoft.com/office/drawing/2014/main" id="{401325A6-31AA-EC4D-C081-5A4E53CC7349}"/>
-              </a:ext>
-            </a:extLst>
-          </p:cNvPr>
-          <p:cNvSpPr>
-            <a:spLocks noGrp="1"/>
-          </p:cNvSpPr>
-          <p:nvPr>
-            <p:ph type="ctrTitle"/>
+          <p:cNvPr id="2" name="Title 1">
+            <a:extLst>
+              <a:ext uri="{FF2B5EF4-FFF2-40B4-BE49-F238E27FC236}">
+                <a16:creationId xmlns:a16="http://schemas.microsoft.com/office/drawing/2014/main" id="{3D14F33D-ED4F-C6D7-018D-C2D8DD401F61}"/>
+              </a:ext>
+            </a:extLst>
+          </p:cNvPr>
+          <p:cNvSpPr>
+            <a:spLocks noGrp="1"/>
+          </p:cNvSpPr>
+          <p:nvPr>
+            <p:ph type="title"/>
           </p:nvPr>
         </p:nvSpPr>
         <p:spPr/>
@@ -8412,25 +9559,33 @@
           <a:p>
             <a:r>
               <a:rPr lang="en-US" dirty="0"/>
-              <a:t>Energy offset</a:t>
-            </a:r>
-          </a:p>
-        </p:txBody>
-      </p:sp>
-      <p:sp>
-        <p:nvSpPr>
-          <p:cNvPr id="8" name="Subtitle 7">
-            <a:extLst>
-              <a:ext uri="{FF2B5EF4-FFF2-40B4-BE49-F238E27FC236}">
-                <a16:creationId xmlns:a16="http://schemas.microsoft.com/office/drawing/2014/main" id="{395EDDC9-0583-6394-E60F-979B0C68E586}"/>
-              </a:ext>
-            </a:extLst>
-          </p:cNvPr>
-          <p:cNvSpPr>
-            <a:spLocks noGrp="1"/>
-          </p:cNvSpPr>
-          <p:nvPr>
-            <p:ph type="subTitle" idx="1"/>
+              <a:t>Default (</a:t>
+            </a:r>
+            <a:r>
+              <a:rPr lang="en-US" dirty="0" err="1"/>
+              <a:t>romb</a:t>
+            </a:r>
+            <a:r>
+              <a:rPr lang="en-US" dirty="0"/>
+              <a:t>), Increasing eta</a:t>
+            </a:r>
+          </a:p>
+        </p:txBody>
+      </p:sp>
+      <p:sp>
+        <p:nvSpPr>
+          <p:cNvPr id="4" name="Text Placeholder 3">
+            <a:extLst>
+              <a:ext uri="{FF2B5EF4-FFF2-40B4-BE49-F238E27FC236}">
+                <a16:creationId xmlns:a16="http://schemas.microsoft.com/office/drawing/2014/main" id="{C66E197C-BAD2-C53A-5704-119037155D74}"/>
+              </a:ext>
+            </a:extLst>
+          </p:cNvPr>
+          <p:cNvSpPr>
+            <a:spLocks noGrp="1"/>
+          </p:cNvSpPr>
+          <p:nvPr>
+            <p:ph type="body" idx="1"/>
           </p:nvPr>
         </p:nvSpPr>
         <p:spPr/>
@@ -8438,14 +9593,228 @@
           <a:bodyPr/>
           <a:lstStyle/>
           <a:p>
-            <a:endParaRPr lang="en-US"/>
+            <a:r>
+              <a:rPr lang="en-US" dirty="0"/>
+              <a:t>E=0 eV, eta=10</a:t>
+            </a:r>
+            <a:r>
+              <a:rPr lang="en-US" baseline="30000" dirty="0"/>
+              <a:t>-5</a:t>
+            </a:r>
+            <a:r>
+              <a:rPr lang="en-US" dirty="0"/>
+              <a:t>, NN=2</a:t>
+            </a:r>
+          </a:p>
+        </p:txBody>
+      </p:sp>
+      <p:pic>
+        <p:nvPicPr>
+          <p:cNvPr id="8" name="Content Placeholder 7">
+            <a:extLst>
+              <a:ext uri="{FF2B5EF4-FFF2-40B4-BE49-F238E27FC236}">
+                <a16:creationId xmlns:a16="http://schemas.microsoft.com/office/drawing/2014/main" id="{3CD2ED13-A7AC-0C5F-77FA-E33F42A6923A}"/>
+              </a:ext>
+            </a:extLst>
+          </p:cNvPr>
+          <p:cNvPicPr>
+            <a:picLocks noGrp="1" noChangeAspect="1"/>
+          </p:cNvPicPr>
+          <p:nvPr>
+            <p:ph sz="half" idx="2"/>
+          </p:nvPr>
+        </p:nvPicPr>
+        <p:blipFill>
+          <a:blip r:embed="rId2"/>
+          <a:srcRect/>
+          <a:stretch/>
+        </p:blipFill>
+        <p:spPr>
+          <a:xfrm>
+            <a:off x="0" y="2306166"/>
+            <a:ext cx="9146530" cy="3896671"/>
+          </a:xfrm>
+          <a:prstGeom prst="rect">
+            <a:avLst/>
+          </a:prstGeom>
+        </p:spPr>
+      </p:pic>
+      <p:sp>
+        <p:nvSpPr>
+          <p:cNvPr id="9" name="Text Placeholder 3">
+            <a:extLst>
+              <a:ext uri="{FF2B5EF4-FFF2-40B4-BE49-F238E27FC236}">
+                <a16:creationId xmlns:a16="http://schemas.microsoft.com/office/drawing/2014/main" id="{B2695D06-FFED-6D35-DB9C-2BFAE0E9EBBA}"/>
+              </a:ext>
+            </a:extLst>
+          </p:cNvPr>
+          <p:cNvSpPr txBox="1">
+            <a:spLocks/>
+          </p:cNvSpPr>
+          <p:nvPr/>
+        </p:nvSpPr>
+        <p:spPr>
+          <a:xfrm>
+            <a:off x="4497388" y="1535113"/>
+            <a:ext cx="4040188" cy="639762"/>
+          </a:xfrm>
+          <a:prstGeom prst="rect">
+            <a:avLst/>
+          </a:prstGeom>
+        </p:spPr>
+        <p:txBody>
+          <a:bodyPr vert="horz" lIns="91440" tIns="45720" rIns="91440" bIns="45720" rtlCol="0" anchor="b">
+            <a:normAutofit/>
+          </a:bodyPr>
+          <a:lstStyle>
+            <a:lvl1pPr marL="0" indent="0" algn="l" defTabSz="457200" rtl="0" eaLnBrk="1" latinLnBrk="0" hangingPunct="1">
+              <a:spcBef>
+                <a:spcPct val="20000"/>
+              </a:spcBef>
+              <a:buFont typeface="Arial"/>
+              <a:buNone/>
+              <a:defRPr sz="2400" b="1" kern="1200">
+                <a:solidFill>
+                  <a:schemeClr val="tx1"/>
+                </a:solidFill>
+                <a:latin typeface="+mn-lt"/>
+                <a:ea typeface="+mn-ea"/>
+                <a:cs typeface="+mn-cs"/>
+              </a:defRPr>
+            </a:lvl1pPr>
+            <a:lvl2pPr marL="457200" indent="0" algn="l" defTabSz="457200" rtl="0" eaLnBrk="1" latinLnBrk="0" hangingPunct="1">
+              <a:spcBef>
+                <a:spcPct val="20000"/>
+              </a:spcBef>
+              <a:buFont typeface="Arial"/>
+              <a:buNone/>
+              <a:defRPr sz="2000" b="1" kern="1200">
+                <a:solidFill>
+                  <a:schemeClr val="tx1"/>
+                </a:solidFill>
+                <a:latin typeface="+mn-lt"/>
+                <a:ea typeface="+mn-ea"/>
+                <a:cs typeface="+mn-cs"/>
+              </a:defRPr>
+            </a:lvl2pPr>
+            <a:lvl3pPr marL="914400" indent="0" algn="l" defTabSz="457200" rtl="0" eaLnBrk="1" latinLnBrk="0" hangingPunct="1">
+              <a:spcBef>
+                <a:spcPct val="20000"/>
+              </a:spcBef>
+              <a:buFont typeface="Arial"/>
+              <a:buNone/>
+              <a:defRPr sz="1800" b="1" kern="1200">
+                <a:solidFill>
+                  <a:schemeClr val="tx1"/>
+                </a:solidFill>
+                <a:latin typeface="+mn-lt"/>
+                <a:ea typeface="+mn-ea"/>
+                <a:cs typeface="+mn-cs"/>
+              </a:defRPr>
+            </a:lvl3pPr>
+            <a:lvl4pPr marL="1371600" indent="0" algn="l" defTabSz="457200" rtl="0" eaLnBrk="1" latinLnBrk="0" hangingPunct="1">
+              <a:spcBef>
+                <a:spcPct val="20000"/>
+              </a:spcBef>
+              <a:buFont typeface="Arial"/>
+              <a:buNone/>
+              <a:defRPr sz="1600" b="1" kern="1200">
+                <a:solidFill>
+                  <a:schemeClr val="tx1"/>
+                </a:solidFill>
+                <a:latin typeface="+mn-lt"/>
+                <a:ea typeface="+mn-ea"/>
+                <a:cs typeface="+mn-cs"/>
+              </a:defRPr>
+            </a:lvl4pPr>
+            <a:lvl5pPr marL="1828800" indent="0" algn="l" defTabSz="457200" rtl="0" eaLnBrk="1" latinLnBrk="0" hangingPunct="1">
+              <a:spcBef>
+                <a:spcPct val="20000"/>
+              </a:spcBef>
+              <a:buFont typeface="Arial"/>
+              <a:buNone/>
+              <a:defRPr sz="1600" b="1" kern="1200">
+                <a:solidFill>
+                  <a:schemeClr val="tx1"/>
+                </a:solidFill>
+                <a:latin typeface="+mn-lt"/>
+                <a:ea typeface="+mn-ea"/>
+                <a:cs typeface="+mn-cs"/>
+              </a:defRPr>
+            </a:lvl5pPr>
+            <a:lvl6pPr marL="2286000" indent="0" algn="l" defTabSz="457200" rtl="0" eaLnBrk="1" latinLnBrk="0" hangingPunct="1">
+              <a:spcBef>
+                <a:spcPct val="20000"/>
+              </a:spcBef>
+              <a:buFont typeface="Arial"/>
+              <a:buNone/>
+              <a:defRPr sz="1600" b="1" kern="1200">
+                <a:solidFill>
+                  <a:schemeClr val="tx1"/>
+                </a:solidFill>
+                <a:latin typeface="+mn-lt"/>
+                <a:ea typeface="+mn-ea"/>
+                <a:cs typeface="+mn-cs"/>
+              </a:defRPr>
+            </a:lvl6pPr>
+            <a:lvl7pPr marL="2743200" indent="0" algn="l" defTabSz="457200" rtl="0" eaLnBrk="1" latinLnBrk="0" hangingPunct="1">
+              <a:spcBef>
+                <a:spcPct val="20000"/>
+              </a:spcBef>
+              <a:buFont typeface="Arial"/>
+              <a:buNone/>
+              <a:defRPr sz="1600" b="1" kern="1200">
+                <a:solidFill>
+                  <a:schemeClr val="tx1"/>
+                </a:solidFill>
+                <a:latin typeface="+mn-lt"/>
+                <a:ea typeface="+mn-ea"/>
+                <a:cs typeface="+mn-cs"/>
+              </a:defRPr>
+            </a:lvl7pPr>
+            <a:lvl8pPr marL="3200400" indent="0" algn="l" defTabSz="457200" rtl="0" eaLnBrk="1" latinLnBrk="0" hangingPunct="1">
+              <a:spcBef>
+                <a:spcPct val="20000"/>
+              </a:spcBef>
+              <a:buFont typeface="Arial"/>
+              <a:buNone/>
+              <a:defRPr sz="1600" b="1" kern="1200">
+                <a:solidFill>
+                  <a:schemeClr val="tx1"/>
+                </a:solidFill>
+                <a:latin typeface="+mn-lt"/>
+                <a:ea typeface="+mn-ea"/>
+                <a:cs typeface="+mn-cs"/>
+              </a:defRPr>
+            </a:lvl8pPr>
+            <a:lvl9pPr marL="3657600" indent="0" algn="l" defTabSz="457200" rtl="0" eaLnBrk="1" latinLnBrk="0" hangingPunct="1">
+              <a:spcBef>
+                <a:spcPct val="20000"/>
+              </a:spcBef>
+              <a:buFont typeface="Arial"/>
+              <a:buNone/>
+              <a:defRPr sz="1600" b="1" kern="1200">
+                <a:solidFill>
+                  <a:schemeClr val="tx1"/>
+                </a:solidFill>
+                <a:latin typeface="+mn-lt"/>
+                <a:ea typeface="+mn-ea"/>
+                <a:cs typeface="+mn-cs"/>
+              </a:defRPr>
+            </a:lvl9pPr>
+          </a:lstStyle>
+          <a:p>
+            <a:r>
+              <a:rPr lang="en-US" dirty="0"/>
+              <a:t>N=9</a:t>
+            </a:r>
           </a:p>
         </p:txBody>
       </p:sp>
     </p:spTree>
     <p:extLst>
       <p:ext uri="{BB962C8B-B14F-4D97-AF65-F5344CB8AC3E}">
-        <p14:creationId xmlns:p14="http://schemas.microsoft.com/office/powerpoint/2010/main" val="1964249379"/>
+        <p14:creationId xmlns:p14="http://schemas.microsoft.com/office/powerpoint/2010/main" val="2039690296"/>
       </p:ext>
     </p:extLst>
   </p:cSld>
@@ -8463,7 +9832,7 @@
         <p:cNvPr id="1" name="">
           <a:extLst>
             <a:ext uri="{FF2B5EF4-FFF2-40B4-BE49-F238E27FC236}">
-              <a16:creationId xmlns:a16="http://schemas.microsoft.com/office/drawing/2014/main" id="{E5AE5380-9CFE-606D-6DA8-12C1C43B5A1F}"/>
+              <a16:creationId xmlns:a16="http://schemas.microsoft.com/office/drawing/2014/main" id="{ECE46189-BC8B-550A-4211-4D337C2AABF1}"/>
             </a:ext>
           </a:extLst>
         </p:cNvPr>
@@ -8478,20 +9847,144 @@
           <a:chExt cx="0" cy="0"/>
         </a:xfrm>
       </p:grpSpPr>
-      <p:sp>
-        <p:nvSpPr>
-          <p:cNvPr id="2" name="Title 1">
-            <a:extLst>
-              <a:ext uri="{FF2B5EF4-FFF2-40B4-BE49-F238E27FC236}">
-                <a16:creationId xmlns:a16="http://schemas.microsoft.com/office/drawing/2014/main" id="{8C109848-EA12-E957-511C-EE5BAB9CD75C}"/>
-              </a:ext>
-            </a:extLst>
-          </p:cNvPr>
-          <p:cNvSpPr>
-            <a:spLocks noGrp="1"/>
-          </p:cNvSpPr>
-          <p:nvPr>
-            <p:ph type="title"/>
+      <mc:AlternateContent xmlns:mc="http://schemas.openxmlformats.org/markup-compatibility/2006" xmlns:a14="http://schemas.microsoft.com/office/drawing/2010/main">
+        <mc:Choice Requires="a14">
+          <p:sp>
+            <p:nvSpPr>
+              <p:cNvPr id="7" name="Title 6">
+                <a:extLst>
+                  <a:ext uri="{FF2B5EF4-FFF2-40B4-BE49-F238E27FC236}">
+                    <a16:creationId xmlns:a16="http://schemas.microsoft.com/office/drawing/2014/main" id="{D42C4DBF-0738-4CA2-DFB3-FAFC84899B9B}"/>
+                  </a:ext>
+                </a:extLst>
+              </p:cNvPr>
+              <p:cNvSpPr>
+                <a:spLocks noGrp="1"/>
+              </p:cNvSpPr>
+              <p:nvPr>
+                <p:ph type="ctrTitle"/>
+              </p:nvPr>
+            </p:nvSpPr>
+            <p:spPr/>
+            <p:txBody>
+              <a:bodyPr>
+                <a:normAutofit/>
+              </a:bodyPr>
+              <a:lstStyle/>
+              <a:p>
+                <a:pPr/>
+                <a:r>
+                  <a:rPr lang="en-US" dirty="0"/>
+                  <a:t>Larger structure and constant</a:t>
+                </a:r>
+                <a:br>
+                  <a:rPr lang="en-US" dirty="0"/>
+                </a:br>
+                <a14:m>
+                  <m:oMathPara xmlns:m="http://schemas.openxmlformats.org/officeDocument/2006/math">
+                    <m:oMathParaPr>
+                      <m:jc m:val="centerGroup"/>
+                    </m:oMathParaPr>
+                    <m:oMath xmlns:m="http://schemas.openxmlformats.org/officeDocument/2006/math">
+                      <m:r>
+                        <a:rPr lang="da-DK" b="0" i="1" smtClean="0">
+                          <a:latin typeface="Cambria Math" panose="02040503050406030204" pitchFamily="18" charset="0"/>
+                        </a:rPr>
+                        <m:t>𝜂</m:t>
+                      </m:r>
+                      <m:r>
+                        <a:rPr lang="da-DK" b="0" i="1" smtClean="0">
+                          <a:latin typeface="Cambria Math" panose="02040503050406030204" pitchFamily="18" charset="0"/>
+                        </a:rPr>
+                        <m:t>=</m:t>
+                      </m:r>
+                      <m:sSup>
+                        <m:sSupPr>
+                          <m:ctrlPr>
+                            <a:rPr lang="da-DK" b="0" i="1" smtClean="0">
+                              <a:latin typeface="Cambria Math" panose="02040503050406030204" pitchFamily="18" charset="0"/>
+                            </a:rPr>
+                          </m:ctrlPr>
+                        </m:sSupPr>
+                        <m:e>
+                          <m:r>
+                            <a:rPr lang="da-DK" b="0" i="1" smtClean="0">
+                              <a:latin typeface="Cambria Math" panose="02040503050406030204" pitchFamily="18" charset="0"/>
+                            </a:rPr>
+                            <m:t>10</m:t>
+                          </m:r>
+                        </m:e>
+                        <m:sup>
+                          <m:r>
+                            <a:rPr lang="da-DK" b="0" i="1" smtClean="0">
+                              <a:latin typeface="Cambria Math" panose="02040503050406030204" pitchFamily="18" charset="0"/>
+                            </a:rPr>
+                            <m:t>−5</m:t>
+                          </m:r>
+                        </m:sup>
+                      </m:sSup>
+                    </m:oMath>
+                  </m:oMathPara>
+                </a14:m>
+                <a:endParaRPr lang="en-US" dirty="0"/>
+              </a:p>
+            </p:txBody>
+          </p:sp>
+        </mc:Choice>
+        <mc:Fallback xmlns="">
+          <p:sp>
+            <p:nvSpPr>
+              <p:cNvPr id="7" name="Title 6">
+                <a:extLst>
+                  <a:ext uri="{FF2B5EF4-FFF2-40B4-BE49-F238E27FC236}">
+                    <a16:creationId xmlns:a16="http://schemas.microsoft.com/office/drawing/2014/main" id="{D42C4DBF-0738-4CA2-DFB3-FAFC84899B9B}"/>
+                  </a:ext>
+                </a:extLst>
+              </p:cNvPr>
+              <p:cNvSpPr>
+                <a:spLocks noGrp="1" noRot="1" noChangeAspect="1" noMove="1" noResize="1" noEditPoints="1" noAdjustHandles="1" noChangeArrowheads="1" noChangeShapeType="1" noTextEdit="1"/>
+              </p:cNvSpPr>
+              <p:nvPr>
+                <p:ph type="ctrTitle"/>
+              </p:nvPr>
+            </p:nvSpPr>
+            <p:spPr>
+              <a:blipFill>
+                <a:blip r:embed="rId2"/>
+                <a:stretch>
+                  <a:fillRect t="-7438"/>
+                </a:stretch>
+              </a:blipFill>
+            </p:spPr>
+            <p:txBody>
+              <a:bodyPr/>
+              <a:lstStyle/>
+              <a:p>
+                <a:r>
+                  <a:rPr lang="en-US">
+                    <a:noFill/>
+                  </a:rPr>
+                  <a:t> </a:t>
+                </a:r>
+              </a:p>
+            </p:txBody>
+          </p:sp>
+        </mc:Fallback>
+      </mc:AlternateContent>
+      <p:sp>
+        <p:nvSpPr>
+          <p:cNvPr id="8" name="Subtitle 7">
+            <a:extLst>
+              <a:ext uri="{FF2B5EF4-FFF2-40B4-BE49-F238E27FC236}">
+                <a16:creationId xmlns:a16="http://schemas.microsoft.com/office/drawing/2014/main" id="{AF16F265-5069-74BC-7451-F3A0A7603CBD}"/>
+              </a:ext>
+            </a:extLst>
+          </p:cNvPr>
+          <p:cNvSpPr>
+            <a:spLocks noGrp="1"/>
+          </p:cNvSpPr>
+          <p:nvPr>
+            <p:ph type="subTitle" idx="1"/>
           </p:nvPr>
         </p:nvSpPr>
         <p:spPr/>
@@ -8499,264 +9992,14 @@
           <a:bodyPr/>
           <a:lstStyle/>
           <a:p>
-            <a:r>
-              <a:rPr lang="en-US" dirty="0"/>
-              <a:t>Energy offset (</a:t>
-            </a:r>
-            <a:r>
-              <a:rPr lang="en-US" dirty="0" err="1"/>
-              <a:t>romb</a:t>
-            </a:r>
-            <a:r>
-              <a:rPr lang="en-US" dirty="0"/>
-              <a:t>)</a:t>
-            </a:r>
-          </a:p>
-        </p:txBody>
-      </p:sp>
-      <p:sp>
-        <p:nvSpPr>
-          <p:cNvPr id="4" name="Text Placeholder 3">
-            <a:extLst>
-              <a:ext uri="{FF2B5EF4-FFF2-40B4-BE49-F238E27FC236}">
-                <a16:creationId xmlns:a16="http://schemas.microsoft.com/office/drawing/2014/main" id="{744F0573-114B-40D6-4065-FA8EE4908A43}"/>
-              </a:ext>
-            </a:extLst>
-          </p:cNvPr>
-          <p:cNvSpPr>
-            <a:spLocks noGrp="1"/>
-          </p:cNvSpPr>
-          <p:nvPr>
-            <p:ph type="body" idx="1"/>
-          </p:nvPr>
-        </p:nvSpPr>
-        <p:spPr/>
-        <p:txBody>
-          <a:bodyPr/>
-          <a:lstStyle/>
-          <a:p>
-            <a:r>
-              <a:rPr lang="en-US" dirty="0"/>
-              <a:t>E=-0.1 eV, eta=10</a:t>
-            </a:r>
-            <a:r>
-              <a:rPr lang="en-US" baseline="30000" dirty="0"/>
-              <a:t>-3</a:t>
-            </a:r>
-            <a:r>
-              <a:rPr lang="en-US" dirty="0"/>
-              <a:t>, NN=4</a:t>
-            </a:r>
-          </a:p>
-        </p:txBody>
-      </p:sp>
-      <p:pic>
-        <p:nvPicPr>
-          <p:cNvPr id="8" name="Content Placeholder 7">
-            <a:extLst>
-              <a:ext uri="{FF2B5EF4-FFF2-40B4-BE49-F238E27FC236}">
-                <a16:creationId xmlns:a16="http://schemas.microsoft.com/office/drawing/2014/main" id="{96618A16-8CC4-9884-8565-56E0638593CE}"/>
-              </a:ext>
-            </a:extLst>
-          </p:cNvPr>
-          <p:cNvPicPr>
-            <a:picLocks noGrp="1" noChangeAspect="1"/>
-          </p:cNvPicPr>
-          <p:nvPr>
-            <p:ph sz="half" idx="2"/>
-          </p:nvPr>
-        </p:nvPicPr>
-        <p:blipFill>
-          <a:blip r:embed="rId2"/>
-          <a:srcRect/>
-          <a:stretch/>
-        </p:blipFill>
-        <p:spPr>
-          <a:xfrm>
-            <a:off x="0" y="2306166"/>
-            <a:ext cx="9146530" cy="3896671"/>
-          </a:xfrm>
-          <a:prstGeom prst="rect">
-            <a:avLst/>
-          </a:prstGeom>
-        </p:spPr>
-      </p:pic>
-      <p:sp>
-        <p:nvSpPr>
-          <p:cNvPr id="9" name="Text Placeholder 3">
-            <a:extLst>
-              <a:ext uri="{FF2B5EF4-FFF2-40B4-BE49-F238E27FC236}">
-                <a16:creationId xmlns:a16="http://schemas.microsoft.com/office/drawing/2014/main" id="{8230F510-AFFB-2F8B-4040-566C28DA5BE4}"/>
-              </a:ext>
-            </a:extLst>
-          </p:cNvPr>
-          <p:cNvSpPr txBox="1">
-            <a:spLocks/>
-          </p:cNvSpPr>
-          <p:nvPr/>
-        </p:nvSpPr>
-        <p:spPr>
-          <a:xfrm>
-            <a:off x="4497388" y="1535113"/>
-            <a:ext cx="4040188" cy="639762"/>
-          </a:xfrm>
-          <a:prstGeom prst="rect">
-            <a:avLst/>
-          </a:prstGeom>
-        </p:spPr>
-        <p:txBody>
-          <a:bodyPr vert="horz" lIns="91440" tIns="45720" rIns="91440" bIns="45720" rtlCol="0" anchor="b">
-            <a:normAutofit/>
-          </a:bodyPr>
-          <a:lstStyle>
-            <a:lvl1pPr marL="0" indent="0" algn="l" defTabSz="457200" rtl="0" eaLnBrk="1" latinLnBrk="0" hangingPunct="1">
-              <a:spcBef>
-                <a:spcPct val="20000"/>
-              </a:spcBef>
-              <a:buFont typeface="Arial"/>
-              <a:buNone/>
-              <a:defRPr sz="2400" b="1" kern="1200">
-                <a:solidFill>
-                  <a:schemeClr val="tx1"/>
-                </a:solidFill>
-                <a:latin typeface="+mn-lt"/>
-                <a:ea typeface="+mn-ea"/>
-                <a:cs typeface="+mn-cs"/>
-              </a:defRPr>
-            </a:lvl1pPr>
-            <a:lvl2pPr marL="457200" indent="0" algn="l" defTabSz="457200" rtl="0" eaLnBrk="1" latinLnBrk="0" hangingPunct="1">
-              <a:spcBef>
-                <a:spcPct val="20000"/>
-              </a:spcBef>
-              <a:buFont typeface="Arial"/>
-              <a:buNone/>
-              <a:defRPr sz="2000" b="1" kern="1200">
-                <a:solidFill>
-                  <a:schemeClr val="tx1"/>
-                </a:solidFill>
-                <a:latin typeface="+mn-lt"/>
-                <a:ea typeface="+mn-ea"/>
-                <a:cs typeface="+mn-cs"/>
-              </a:defRPr>
-            </a:lvl2pPr>
-            <a:lvl3pPr marL="914400" indent="0" algn="l" defTabSz="457200" rtl="0" eaLnBrk="1" latinLnBrk="0" hangingPunct="1">
-              <a:spcBef>
-                <a:spcPct val="20000"/>
-              </a:spcBef>
-              <a:buFont typeface="Arial"/>
-              <a:buNone/>
-              <a:defRPr sz="1800" b="1" kern="1200">
-                <a:solidFill>
-                  <a:schemeClr val="tx1"/>
-                </a:solidFill>
-                <a:latin typeface="+mn-lt"/>
-                <a:ea typeface="+mn-ea"/>
-                <a:cs typeface="+mn-cs"/>
-              </a:defRPr>
-            </a:lvl3pPr>
-            <a:lvl4pPr marL="1371600" indent="0" algn="l" defTabSz="457200" rtl="0" eaLnBrk="1" latinLnBrk="0" hangingPunct="1">
-              <a:spcBef>
-                <a:spcPct val="20000"/>
-              </a:spcBef>
-              <a:buFont typeface="Arial"/>
-              <a:buNone/>
-              <a:defRPr sz="1600" b="1" kern="1200">
-                <a:solidFill>
-                  <a:schemeClr val="tx1"/>
-                </a:solidFill>
-                <a:latin typeface="+mn-lt"/>
-                <a:ea typeface="+mn-ea"/>
-                <a:cs typeface="+mn-cs"/>
-              </a:defRPr>
-            </a:lvl4pPr>
-            <a:lvl5pPr marL="1828800" indent="0" algn="l" defTabSz="457200" rtl="0" eaLnBrk="1" latinLnBrk="0" hangingPunct="1">
-              <a:spcBef>
-                <a:spcPct val="20000"/>
-              </a:spcBef>
-              <a:buFont typeface="Arial"/>
-              <a:buNone/>
-              <a:defRPr sz="1600" b="1" kern="1200">
-                <a:solidFill>
-                  <a:schemeClr val="tx1"/>
-                </a:solidFill>
-                <a:latin typeface="+mn-lt"/>
-                <a:ea typeface="+mn-ea"/>
-                <a:cs typeface="+mn-cs"/>
-              </a:defRPr>
-            </a:lvl5pPr>
-            <a:lvl6pPr marL="2286000" indent="0" algn="l" defTabSz="457200" rtl="0" eaLnBrk="1" latinLnBrk="0" hangingPunct="1">
-              <a:spcBef>
-                <a:spcPct val="20000"/>
-              </a:spcBef>
-              <a:buFont typeface="Arial"/>
-              <a:buNone/>
-              <a:defRPr sz="1600" b="1" kern="1200">
-                <a:solidFill>
-                  <a:schemeClr val="tx1"/>
-                </a:solidFill>
-                <a:latin typeface="+mn-lt"/>
-                <a:ea typeface="+mn-ea"/>
-                <a:cs typeface="+mn-cs"/>
-              </a:defRPr>
-            </a:lvl6pPr>
-            <a:lvl7pPr marL="2743200" indent="0" algn="l" defTabSz="457200" rtl="0" eaLnBrk="1" latinLnBrk="0" hangingPunct="1">
-              <a:spcBef>
-                <a:spcPct val="20000"/>
-              </a:spcBef>
-              <a:buFont typeface="Arial"/>
-              <a:buNone/>
-              <a:defRPr sz="1600" b="1" kern="1200">
-                <a:solidFill>
-                  <a:schemeClr val="tx1"/>
-                </a:solidFill>
-                <a:latin typeface="+mn-lt"/>
-                <a:ea typeface="+mn-ea"/>
-                <a:cs typeface="+mn-cs"/>
-              </a:defRPr>
-            </a:lvl7pPr>
-            <a:lvl8pPr marL="3200400" indent="0" algn="l" defTabSz="457200" rtl="0" eaLnBrk="1" latinLnBrk="0" hangingPunct="1">
-              <a:spcBef>
-                <a:spcPct val="20000"/>
-              </a:spcBef>
-              <a:buFont typeface="Arial"/>
-              <a:buNone/>
-              <a:defRPr sz="1600" b="1" kern="1200">
-                <a:solidFill>
-                  <a:schemeClr val="tx1"/>
-                </a:solidFill>
-                <a:latin typeface="+mn-lt"/>
-                <a:ea typeface="+mn-ea"/>
-                <a:cs typeface="+mn-cs"/>
-              </a:defRPr>
-            </a:lvl8pPr>
-            <a:lvl9pPr marL="3657600" indent="0" algn="l" defTabSz="457200" rtl="0" eaLnBrk="1" latinLnBrk="0" hangingPunct="1">
-              <a:spcBef>
-                <a:spcPct val="20000"/>
-              </a:spcBef>
-              <a:buFont typeface="Arial"/>
-              <a:buNone/>
-              <a:defRPr sz="1600" b="1" kern="1200">
-                <a:solidFill>
-                  <a:schemeClr val="tx1"/>
-                </a:solidFill>
-                <a:latin typeface="+mn-lt"/>
-                <a:ea typeface="+mn-ea"/>
-                <a:cs typeface="+mn-cs"/>
-              </a:defRPr>
-            </a:lvl9pPr>
-          </a:lstStyle>
-          <a:p>
-            <a:r>
-              <a:rPr lang="en-US" dirty="0"/>
-              <a:t>N=9</a:t>
-            </a:r>
+            <a:endParaRPr lang="en-US" dirty="0"/>
           </a:p>
         </p:txBody>
       </p:sp>
     </p:spTree>
     <p:extLst>
       <p:ext uri="{BB962C8B-B14F-4D97-AF65-F5344CB8AC3E}">
-        <p14:creationId xmlns:p14="http://schemas.microsoft.com/office/powerpoint/2010/main" val="1623612759"/>
+        <p14:creationId xmlns:p14="http://schemas.microsoft.com/office/powerpoint/2010/main" val="2864757908"/>
       </p:ext>
     </p:extLst>
   </p:cSld>
@@ -8774,7 +10017,7 @@
         <p:cNvPr id="1" name="">
           <a:extLst>
             <a:ext uri="{FF2B5EF4-FFF2-40B4-BE49-F238E27FC236}">
-              <a16:creationId xmlns:a16="http://schemas.microsoft.com/office/drawing/2014/main" id="{E8755A89-10C2-15C9-CB13-0A6818878E83}"/>
+              <a16:creationId xmlns:a16="http://schemas.microsoft.com/office/drawing/2014/main" id="{C682CD4E-6754-D554-B766-3C1ECC26E1BE}"/>
             </a:ext>
           </a:extLst>
         </p:cNvPr>
@@ -8794,7 +10037,7 @@
           <p:cNvPr id="2" name="Title 1">
             <a:extLst>
               <a:ext uri="{FF2B5EF4-FFF2-40B4-BE49-F238E27FC236}">
-                <a16:creationId xmlns:a16="http://schemas.microsoft.com/office/drawing/2014/main" id="{23ADAF23-745F-5147-966A-4E2756DDD865}"/>
+                <a16:creationId xmlns:a16="http://schemas.microsoft.com/office/drawing/2014/main" id="{EE067B54-6CDE-F70F-8C20-DF028F9311CC}"/>
               </a:ext>
             </a:extLst>
           </p:cNvPr>
@@ -8812,7 +10055,7 @@
           <a:p>
             <a:r>
               <a:rPr lang="en-US" dirty="0"/>
-              <a:t>Energy offset (</a:t>
+              <a:t>Default (</a:t>
             </a:r>
             <a:r>
               <a:rPr lang="en-US" dirty="0" err="1"/>
@@ -8820,7 +10063,7 @@
             </a:r>
             <a:r>
               <a:rPr lang="en-US" dirty="0"/>
-              <a:t>)</a:t>
+              <a:t>), Increasing N</a:t>
             </a:r>
           </a:p>
         </p:txBody>
@@ -8830,7 +10073,7 @@
           <p:cNvPr id="4" name="Text Placeholder 3">
             <a:extLst>
               <a:ext uri="{FF2B5EF4-FFF2-40B4-BE49-F238E27FC236}">
-                <a16:creationId xmlns:a16="http://schemas.microsoft.com/office/drawing/2014/main" id="{6297C9C1-1E6B-E54A-DAC4-73DD2008B987}"/>
+                <a16:creationId xmlns:a16="http://schemas.microsoft.com/office/drawing/2014/main" id="{8018A88C-E528-E3F1-A955-4708F9EC69EF}"/>
               </a:ext>
             </a:extLst>
           </p:cNvPr>
@@ -8848,15 +10091,15 @@
           <a:p>
             <a:r>
               <a:rPr lang="en-US" dirty="0"/>
-              <a:t>E=-0.1 eV, eta=10</a:t>
+              <a:t>E=0 eV, eta=10</a:t>
             </a:r>
             <a:r>
               <a:rPr lang="en-US" baseline="30000" dirty="0"/>
-              <a:t>-3</a:t>
+              <a:t>-5</a:t>
             </a:r>
             <a:r>
               <a:rPr lang="en-US" dirty="0"/>
-              <a:t>, NN=4</a:t>
+              <a:t>, NN=2</a:t>
             </a:r>
           </a:p>
         </p:txBody>
@@ -8866,7 +10109,7 @@
           <p:cNvPr id="8" name="Content Placeholder 7">
             <a:extLst>
               <a:ext uri="{FF2B5EF4-FFF2-40B4-BE49-F238E27FC236}">
-                <a16:creationId xmlns:a16="http://schemas.microsoft.com/office/drawing/2014/main" id="{4BB8B063-CB49-CC8F-5B46-E45C14A6C4B9}"/>
+                <a16:creationId xmlns:a16="http://schemas.microsoft.com/office/drawing/2014/main" id="{30BAC3C2-560D-6C29-33FB-09AA620093F3}"/>
               </a:ext>
             </a:extLst>
           </p:cNvPr>
@@ -8897,7 +10140,7 @@
           <p:cNvPr id="9" name="Text Placeholder 3">
             <a:extLst>
               <a:ext uri="{FF2B5EF4-FFF2-40B4-BE49-F238E27FC236}">
-                <a16:creationId xmlns:a16="http://schemas.microsoft.com/office/drawing/2014/main" id="{72F657F9-80C2-AA64-93D9-9B6A4C9DD0D1}"/>
+                <a16:creationId xmlns:a16="http://schemas.microsoft.com/office/drawing/2014/main" id="{4E9F3485-DDFD-2DFF-59BD-92B0F20A9B78}"/>
               </a:ext>
             </a:extLst>
           </p:cNvPr>
@@ -9059,7 +10302,7 @@
           <a:p>
             <a:r>
               <a:rPr lang="en-US" dirty="0"/>
-              <a:t>N=13</a:t>
+              <a:t>N=9</a:t>
             </a:r>
           </a:p>
         </p:txBody>
@@ -9067,7 +10310,7 @@
     </p:spTree>
     <p:extLst>
       <p:ext uri="{BB962C8B-B14F-4D97-AF65-F5344CB8AC3E}">
-        <p14:creationId xmlns:p14="http://schemas.microsoft.com/office/powerpoint/2010/main" val="1037466753"/>
+        <p14:creationId xmlns:p14="http://schemas.microsoft.com/office/powerpoint/2010/main" val="2800543114"/>
       </p:ext>
     </p:extLst>
   </p:cSld>

--- a/meeting_notes/presentation.pptx
+++ b/meeting_notes/presentation.pptx
@@ -33,13 +33,14 @@
     <p:sldId id="309" r:id="rId27"/>
     <p:sldId id="311" r:id="rId28"/>
     <p:sldId id="312" r:id="rId29"/>
-    <p:sldId id="282" r:id="rId30"/>
-    <p:sldId id="277" r:id="rId31"/>
-    <p:sldId id="283" r:id="rId32"/>
-    <p:sldId id="278" r:id="rId33"/>
-    <p:sldId id="280" r:id="rId34"/>
-    <p:sldId id="279" r:id="rId35"/>
-    <p:sldId id="281" r:id="rId36"/>
+    <p:sldId id="313" r:id="rId30"/>
+    <p:sldId id="282" r:id="rId31"/>
+    <p:sldId id="277" r:id="rId32"/>
+    <p:sldId id="283" r:id="rId33"/>
+    <p:sldId id="278" r:id="rId34"/>
+    <p:sldId id="280" r:id="rId35"/>
+    <p:sldId id="279" r:id="rId36"/>
+    <p:sldId id="281" r:id="rId37"/>
   </p:sldIdLst>
   <p:sldSz cx="9144000" cy="6858000" type="screen4x3"/>
   <p:notesSz cx="6858000" cy="9144000"/>
@@ -336,7 +337,7 @@
           <a:p>
             <a:fld id="{241EB5C9-1307-BA42-ABA2-0BC069CD8E7F}" type="datetimeFigureOut">
               <a:rPr lang="en-US" smtClean="0"/>
-              <a:t>3/15/2026</a:t>
+              <a:t>6/14/2026</a:t>
             </a:fld>
             <a:endParaRPr lang="en-US"/>
           </a:p>
@@ -504,7 +505,7 @@
           <a:p>
             <a:fld id="{241EB5C9-1307-BA42-ABA2-0BC069CD8E7F}" type="datetimeFigureOut">
               <a:rPr lang="en-US" smtClean="0"/>
-              <a:t>3/15/2026</a:t>
+              <a:t>6/14/2026</a:t>
             </a:fld>
             <a:endParaRPr lang="en-US"/>
           </a:p>
@@ -682,7 +683,7 @@
           <a:p>
             <a:fld id="{241EB5C9-1307-BA42-ABA2-0BC069CD8E7F}" type="datetimeFigureOut">
               <a:rPr lang="en-US" smtClean="0"/>
-              <a:t>3/15/2026</a:t>
+              <a:t>6/14/2026</a:t>
             </a:fld>
             <a:endParaRPr lang="en-US"/>
           </a:p>
@@ -850,7 +851,7 @@
           <a:p>
             <a:fld id="{241EB5C9-1307-BA42-ABA2-0BC069CD8E7F}" type="datetimeFigureOut">
               <a:rPr lang="en-US" smtClean="0"/>
-              <a:t>3/15/2026</a:t>
+              <a:t>6/14/2026</a:t>
             </a:fld>
             <a:endParaRPr lang="en-US"/>
           </a:p>
@@ -1095,7 +1096,7 @@
           <a:p>
             <a:fld id="{241EB5C9-1307-BA42-ABA2-0BC069CD8E7F}" type="datetimeFigureOut">
               <a:rPr lang="en-US" smtClean="0"/>
-              <a:t>3/15/2026</a:t>
+              <a:t>6/14/2026</a:t>
             </a:fld>
             <a:endParaRPr lang="en-US"/>
           </a:p>
@@ -1380,7 +1381,7 @@
           <a:p>
             <a:fld id="{241EB5C9-1307-BA42-ABA2-0BC069CD8E7F}" type="datetimeFigureOut">
               <a:rPr lang="en-US" smtClean="0"/>
-              <a:t>3/15/2026</a:t>
+              <a:t>6/14/2026</a:t>
             </a:fld>
             <a:endParaRPr lang="en-US"/>
           </a:p>
@@ -1799,7 +1800,7 @@
           <a:p>
             <a:fld id="{241EB5C9-1307-BA42-ABA2-0BC069CD8E7F}" type="datetimeFigureOut">
               <a:rPr lang="en-US" smtClean="0"/>
-              <a:t>3/15/2026</a:t>
+              <a:t>6/14/2026</a:t>
             </a:fld>
             <a:endParaRPr lang="en-US"/>
           </a:p>
@@ -1916,7 +1917,7 @@
           <a:p>
             <a:fld id="{241EB5C9-1307-BA42-ABA2-0BC069CD8E7F}" type="datetimeFigureOut">
               <a:rPr lang="en-US" smtClean="0"/>
-              <a:t>3/15/2026</a:t>
+              <a:t>6/14/2026</a:t>
             </a:fld>
             <a:endParaRPr lang="en-US"/>
           </a:p>
@@ -2011,7 +2012,7 @@
           <a:p>
             <a:fld id="{241EB5C9-1307-BA42-ABA2-0BC069CD8E7F}" type="datetimeFigureOut">
               <a:rPr lang="en-US" smtClean="0"/>
-              <a:t>3/15/2026</a:t>
+              <a:t>6/14/2026</a:t>
             </a:fld>
             <a:endParaRPr lang="en-US"/>
           </a:p>
@@ -2286,7 +2287,7 @@
           <a:p>
             <a:fld id="{241EB5C9-1307-BA42-ABA2-0BC069CD8E7F}" type="datetimeFigureOut">
               <a:rPr lang="en-US" smtClean="0"/>
-              <a:t>3/15/2026</a:t>
+              <a:t>6/14/2026</a:t>
             </a:fld>
             <a:endParaRPr lang="en-US"/>
           </a:p>
@@ -2538,7 +2539,7 @@
           <a:p>
             <a:fld id="{241EB5C9-1307-BA42-ABA2-0BC069CD8E7F}" type="datetimeFigureOut">
               <a:rPr lang="en-US" smtClean="0"/>
-              <a:t>3/15/2026</a:t>
+              <a:t>6/14/2026</a:t>
             </a:fld>
             <a:endParaRPr lang="en-US"/>
           </a:p>
@@ -2749,7 +2750,7 @@
           <a:p>
             <a:fld id="{241EB5C9-1307-BA42-ABA2-0BC069CD8E7F}" type="datetimeFigureOut">
               <a:rPr lang="en-US" smtClean="0"/>
-              <a:t>3/15/2026</a:t>
+              <a:t>6/14/2026</a:t>
             </a:fld>
             <a:endParaRPr lang="en-US"/>
           </a:p>
@@ -7440,7 +7441,7 @@
 </file>
 
 <file path=ppt/slides/slide29.xml><?xml version="1.0" encoding="utf-8"?>
-<p:sld xmlns:a="http://schemas.openxmlformats.org/drawingml/2006/main" xmlns:r="http://schemas.openxmlformats.org/officeDocument/2006/relationships" xmlns:p="http://schemas.openxmlformats.org/presentationml/2006/main" show="0">
+<p:sld xmlns:a="http://schemas.openxmlformats.org/drawingml/2006/main" xmlns:r="http://schemas.openxmlformats.org/officeDocument/2006/relationships" xmlns:p="http://schemas.openxmlformats.org/presentationml/2006/main">
   <p:cSld>
     <p:spTree>
       <p:nvGrpSpPr>
@@ -7458,18 +7459,18 @@
       </p:grpSpPr>
       <p:sp>
         <p:nvSpPr>
-          <p:cNvPr id="7" name="Title 6">
-            <a:extLst>
-              <a:ext uri="{FF2B5EF4-FFF2-40B4-BE49-F238E27FC236}">
-                <a16:creationId xmlns:a16="http://schemas.microsoft.com/office/drawing/2014/main" id="{442990F7-FDA5-0C94-A608-69F719BA7ADF}"/>
-              </a:ext>
-            </a:extLst>
-          </p:cNvPr>
-          <p:cNvSpPr>
-            <a:spLocks noGrp="1"/>
-          </p:cNvSpPr>
-          <p:nvPr>
-            <p:ph type="ctrTitle"/>
+          <p:cNvPr id="2" name="Title 1">
+            <a:extLst>
+              <a:ext uri="{FF2B5EF4-FFF2-40B4-BE49-F238E27FC236}">
+                <a16:creationId xmlns:a16="http://schemas.microsoft.com/office/drawing/2014/main" id="{AC5EB0AB-1723-75F9-43CE-D3DED6A990DF}"/>
+              </a:ext>
+            </a:extLst>
+          </p:cNvPr>
+          <p:cNvSpPr>
+            <a:spLocks noGrp="1"/>
+          </p:cNvSpPr>
+          <p:nvPr>
+            <p:ph type="title"/>
           </p:nvPr>
         </p:nvSpPr>
         <p:spPr/>
@@ -7478,41 +7479,151 @@
           <a:lstStyle/>
           <a:p>
             <a:r>
-              <a:rPr lang="en-US" dirty="0"/>
-              <a:t>RSE for armchair + zigzag</a:t>
-            </a:r>
-          </a:p>
-        </p:txBody>
-      </p:sp>
-      <p:sp>
-        <p:nvSpPr>
-          <p:cNvPr id="8" name="Subtitle 7">
-            <a:extLst>
-              <a:ext uri="{FF2B5EF4-FFF2-40B4-BE49-F238E27FC236}">
-                <a16:creationId xmlns:a16="http://schemas.microsoft.com/office/drawing/2014/main" id="{591C8F23-4878-D975-ED4B-AB5584C19A7F}"/>
-              </a:ext>
-            </a:extLst>
-          </p:cNvPr>
-          <p:cNvSpPr>
-            <a:spLocks noGrp="1"/>
-          </p:cNvSpPr>
-          <p:nvPr>
-            <p:ph type="subTitle" idx="1"/>
+              <a:rPr lang="da-DK" dirty="0"/>
+              <a:t>Now </a:t>
+            </a:r>
+            <a:r>
+              <a:rPr lang="da-DK" dirty="0" err="1"/>
+              <a:t>deleted</a:t>
+            </a:r>
+            <a:r>
+              <a:rPr lang="da-DK" dirty="0"/>
+              <a:t> data</a:t>
+            </a:r>
+          </a:p>
+        </p:txBody>
+      </p:sp>
+      <p:sp>
+        <p:nvSpPr>
+          <p:cNvPr id="3" name="Text Placeholder 2">
+            <a:extLst>
+              <a:ext uri="{FF2B5EF4-FFF2-40B4-BE49-F238E27FC236}">
+                <a16:creationId xmlns:a16="http://schemas.microsoft.com/office/drawing/2014/main" id="{06F32478-5AB2-1527-82F6-7F5DA087C046}"/>
+              </a:ext>
+            </a:extLst>
+          </p:cNvPr>
+          <p:cNvSpPr>
+            <a:spLocks noGrp="1"/>
+          </p:cNvSpPr>
+          <p:nvPr>
+            <p:ph type="body" idx="1"/>
           </p:nvPr>
         </p:nvSpPr>
         <p:spPr/>
         <p:txBody>
-          <a:bodyPr/>
-          <a:lstStyle/>
-          <a:p>
-            <a:endParaRPr lang="en-US"/>
+          <a:bodyPr>
+            <a:normAutofit fontScale="92500"/>
+          </a:bodyPr>
+          <a:lstStyle/>
+          <a:p>
+            <a:r>
+              <a:rPr lang="da-DK" dirty="0"/>
+              <a:t>NC=1 angle=0 </a:t>
+            </a:r>
+            <a:r>
+              <a:rPr lang="da-DK" dirty="0" err="1"/>
+              <a:t>deg</a:t>
+            </a:r>
+            <a:r>
+              <a:rPr lang="da-DK" dirty="0"/>
+              <a:t>. R/2 -&gt; R </a:t>
+            </a:r>
+            <a:r>
+              <a:rPr lang="da-DK" dirty="0" err="1"/>
+              <a:t>layer</a:t>
+            </a:r>
+            <a:endParaRPr lang="da-DK" dirty="0"/>
+          </a:p>
+        </p:txBody>
+      </p:sp>
+      <p:pic>
+        <p:nvPicPr>
+          <p:cNvPr id="8" name="Content Placeholder 7">
+            <a:extLst>
+              <a:ext uri="{FF2B5EF4-FFF2-40B4-BE49-F238E27FC236}">
+                <a16:creationId xmlns:a16="http://schemas.microsoft.com/office/drawing/2014/main" id="{EBABB826-DD3A-9E30-7E31-58FD8DFB6CE9}"/>
+              </a:ext>
+            </a:extLst>
+          </p:cNvPr>
+          <p:cNvPicPr>
+            <a:picLocks noGrp="1" noChangeAspect="1"/>
+          </p:cNvPicPr>
+          <p:nvPr>
+            <p:ph sz="half" idx="2"/>
+          </p:nvPr>
+        </p:nvPicPr>
+        <p:blipFill>
+          <a:blip r:embed="rId2"/>
+          <a:stretch>
+            <a:fillRect/>
+          </a:stretch>
+        </p:blipFill>
+        <p:spPr>
+          <a:xfrm>
+            <a:off x="457200" y="2452366"/>
+            <a:ext cx="4040188" cy="3396305"/>
+          </a:xfrm>
+          <a:prstGeom prst="rect">
+            <a:avLst/>
+          </a:prstGeom>
+        </p:spPr>
+      </p:pic>
+      <p:sp>
+        <p:nvSpPr>
+          <p:cNvPr id="5" name="Text Placeholder 4">
+            <a:extLst>
+              <a:ext uri="{FF2B5EF4-FFF2-40B4-BE49-F238E27FC236}">
+                <a16:creationId xmlns:a16="http://schemas.microsoft.com/office/drawing/2014/main" id="{D234D8A1-83D6-349B-3025-49C806E4205A}"/>
+              </a:ext>
+            </a:extLst>
+          </p:cNvPr>
+          <p:cNvSpPr>
+            <a:spLocks noGrp="1"/>
+          </p:cNvSpPr>
+          <p:nvPr>
+            <p:ph type="body" sz="quarter" idx="3"/>
+          </p:nvPr>
+        </p:nvSpPr>
+        <p:spPr/>
+        <p:txBody>
+          <a:bodyPr>
+            <a:normAutofit fontScale="92500"/>
+          </a:bodyPr>
+          <a:lstStyle/>
+          <a:p>
+            <a:endParaRPr lang="da-DK"/>
+          </a:p>
+        </p:txBody>
+      </p:sp>
+      <p:sp>
+        <p:nvSpPr>
+          <p:cNvPr id="6" name="Content Placeholder 5">
+            <a:extLst>
+              <a:ext uri="{FF2B5EF4-FFF2-40B4-BE49-F238E27FC236}">
+                <a16:creationId xmlns:a16="http://schemas.microsoft.com/office/drawing/2014/main" id="{05FC30D8-2D87-A04E-DB63-F47BF4BF46CD}"/>
+              </a:ext>
+            </a:extLst>
+          </p:cNvPr>
+          <p:cNvSpPr>
+            <a:spLocks noGrp="1"/>
+          </p:cNvSpPr>
+          <p:nvPr>
+            <p:ph sz="quarter" idx="4"/>
+          </p:nvPr>
+        </p:nvSpPr>
+        <p:spPr/>
+        <p:txBody>
+          <a:bodyPr/>
+          <a:lstStyle/>
+          <a:p>
+            <a:endParaRPr lang="da-DK"/>
           </a:p>
         </p:txBody>
       </p:sp>
     </p:spTree>
     <p:extLst>
       <p:ext uri="{BB962C8B-B14F-4D97-AF65-F5344CB8AC3E}">
-        <p14:creationId xmlns:p14="http://schemas.microsoft.com/office/powerpoint/2010/main" val="2544406285"/>
+        <p14:creationId xmlns:p14="http://schemas.microsoft.com/office/powerpoint/2010/main" val="2634661432"/>
       </p:ext>
     </p:extLst>
   </p:cSld>
@@ -7634,6 +7745,89 @@
       </p:grpSpPr>
       <p:sp>
         <p:nvSpPr>
+          <p:cNvPr id="7" name="Title 6">
+            <a:extLst>
+              <a:ext uri="{FF2B5EF4-FFF2-40B4-BE49-F238E27FC236}">
+                <a16:creationId xmlns:a16="http://schemas.microsoft.com/office/drawing/2014/main" id="{442990F7-FDA5-0C94-A608-69F719BA7ADF}"/>
+              </a:ext>
+            </a:extLst>
+          </p:cNvPr>
+          <p:cNvSpPr>
+            <a:spLocks noGrp="1"/>
+          </p:cNvSpPr>
+          <p:nvPr>
+            <p:ph type="ctrTitle"/>
+          </p:nvPr>
+        </p:nvSpPr>
+        <p:spPr/>
+        <p:txBody>
+          <a:bodyPr/>
+          <a:lstStyle/>
+          <a:p>
+            <a:r>
+              <a:rPr lang="en-US" dirty="0"/>
+              <a:t>RSE for armchair + zigzag</a:t>
+            </a:r>
+          </a:p>
+        </p:txBody>
+      </p:sp>
+      <p:sp>
+        <p:nvSpPr>
+          <p:cNvPr id="8" name="Subtitle 7">
+            <a:extLst>
+              <a:ext uri="{FF2B5EF4-FFF2-40B4-BE49-F238E27FC236}">
+                <a16:creationId xmlns:a16="http://schemas.microsoft.com/office/drawing/2014/main" id="{591C8F23-4878-D975-ED4B-AB5584C19A7F}"/>
+              </a:ext>
+            </a:extLst>
+          </p:cNvPr>
+          <p:cNvSpPr>
+            <a:spLocks noGrp="1"/>
+          </p:cNvSpPr>
+          <p:nvPr>
+            <p:ph type="subTitle" idx="1"/>
+          </p:nvPr>
+        </p:nvSpPr>
+        <p:spPr/>
+        <p:txBody>
+          <a:bodyPr/>
+          <a:lstStyle/>
+          <a:p>
+            <a:endParaRPr lang="en-US"/>
+          </a:p>
+        </p:txBody>
+      </p:sp>
+    </p:spTree>
+    <p:extLst>
+      <p:ext uri="{BB962C8B-B14F-4D97-AF65-F5344CB8AC3E}">
+        <p14:creationId xmlns:p14="http://schemas.microsoft.com/office/powerpoint/2010/main" val="2544406285"/>
+      </p:ext>
+    </p:extLst>
+  </p:cSld>
+  <p:clrMapOvr>
+    <a:masterClrMapping/>
+  </p:clrMapOvr>
+</p:sld>
+</file>
+
+<file path=ppt/slides/slide31.xml><?xml version="1.0" encoding="utf-8"?>
+<p:sld xmlns:a="http://schemas.openxmlformats.org/drawingml/2006/main" xmlns:r="http://schemas.openxmlformats.org/officeDocument/2006/relationships" xmlns:p="http://schemas.openxmlformats.org/presentationml/2006/main" show="0">
+  <p:cSld>
+    <p:spTree>
+      <p:nvGrpSpPr>
+        <p:cNvPr id="1" name=""/>
+        <p:cNvGrpSpPr/>
+        <p:nvPr/>
+      </p:nvGrpSpPr>
+      <p:grpSpPr>
+        <a:xfrm>
+          <a:off x="0" y="0"/>
+          <a:ext cx="0" cy="0"/>
+          <a:chOff x="0" y="0"/>
+          <a:chExt cx="0" cy="0"/>
+        </a:xfrm>
+      </p:grpSpPr>
+      <p:sp>
+        <p:nvSpPr>
           <p:cNvPr id="2" name="Title 1">
             <a:extLst>
               <a:ext uri="{FF2B5EF4-FFF2-40B4-BE49-F238E27FC236}">
@@ -7950,7 +8144,7 @@
 </p:sld>
 </file>
 
-<file path=ppt/slides/slide31.xml><?xml version="1.0" encoding="utf-8"?>
+<file path=ppt/slides/slide32.xml><?xml version="1.0" encoding="utf-8"?>
 <p:sld xmlns:a="http://schemas.openxmlformats.org/drawingml/2006/main" xmlns:r="http://schemas.openxmlformats.org/officeDocument/2006/relationships" xmlns:p="http://schemas.openxmlformats.org/presentationml/2006/main" show="0">
   <p:cSld>
     <p:spTree>
@@ -8078,7 +8272,7 @@
 </p:sld>
 </file>
 
-<file path=ppt/slides/slide32.xml><?xml version="1.0" encoding="utf-8"?>
+<file path=ppt/slides/slide33.xml><?xml version="1.0" encoding="utf-8"?>
 <p:sld xmlns:a="http://schemas.openxmlformats.org/drawingml/2006/main" xmlns:r="http://schemas.openxmlformats.org/officeDocument/2006/relationships" xmlns:p="http://schemas.openxmlformats.org/presentationml/2006/main" show="0">
   <p:cSld>
     <p:spTree>
@@ -8206,7 +8400,7 @@
 </p:sld>
 </file>
 
-<file path=ppt/slides/slide33.xml><?xml version="1.0" encoding="utf-8"?>
+<file path=ppt/slides/slide34.xml><?xml version="1.0" encoding="utf-8"?>
 <p:sld xmlns:a="http://schemas.openxmlformats.org/drawingml/2006/main" xmlns:r="http://schemas.openxmlformats.org/officeDocument/2006/relationships" xmlns:p="http://schemas.openxmlformats.org/presentationml/2006/main" show="0">
   <p:cSld>
     <p:spTree>
@@ -8334,7 +8528,7 @@
 </p:sld>
 </file>
 
-<file path=ppt/slides/slide34.xml><?xml version="1.0" encoding="utf-8"?>
+<file path=ppt/slides/slide35.xml><?xml version="1.0" encoding="utf-8"?>
 <p:sld xmlns:a="http://schemas.openxmlformats.org/drawingml/2006/main" xmlns:r="http://schemas.openxmlformats.org/officeDocument/2006/relationships" xmlns:p="http://schemas.openxmlformats.org/presentationml/2006/main" show="0">
   <p:cSld>
     <p:spTree>
@@ -8462,7 +8656,7 @@
 </p:sld>
 </file>
 
-<file path=ppt/slides/slide35.xml><?xml version="1.0" encoding="utf-8"?>
+<file path=ppt/slides/slide36.xml><?xml version="1.0" encoding="utf-8"?>
 <p:sld xmlns:a="http://schemas.openxmlformats.org/drawingml/2006/main" xmlns:r="http://schemas.openxmlformats.org/officeDocument/2006/relationships" xmlns:p="http://schemas.openxmlformats.org/presentationml/2006/main" show="0">
   <p:cSld>
     <p:spTree>
